--- a/slides/DGE-METRIC_Online_Day2_Slides.pptx
+++ b/slides/DGE-METRIC_Online_Day2_Slides.pptx
@@ -5,28 +5,29 @@
     <p:sldMasterId id="2147483648" r:id="rId1"/>
   </p:sldMasterIdLst>
   <p:sldIdLst>
-    <p:sldId id="256" r:id="rId7"/>
-    <p:sldId id="257" r:id="rId8"/>
-    <p:sldId id="258" r:id="rId9"/>
-    <p:sldId id="259" r:id="rId10"/>
-    <p:sldId id="260" r:id="rId11"/>
-    <p:sldId id="261" r:id="rId12"/>
-    <p:sldId id="262" r:id="rId13"/>
-    <p:sldId id="263" r:id="rId14"/>
-    <p:sldId id="264" r:id="rId15"/>
-    <p:sldId id="265" r:id="rId16"/>
-    <p:sldId id="266" r:id="rId17"/>
-    <p:sldId id="267" r:id="rId18"/>
-    <p:sldId id="268" r:id="rId19"/>
-    <p:sldId id="269" r:id="rId20"/>
-    <p:sldId id="270" r:id="rId21"/>
-    <p:sldId id="271" r:id="rId22"/>
-    <p:sldId id="272" r:id="rId23"/>
-    <p:sldId id="273" r:id="rId24"/>
-    <p:sldId id="274" r:id="rId25"/>
-    <p:sldId id="275" r:id="rId26"/>
+    <p:sldId id="256" r:id="rId2"/>
+    <p:sldId id="257" r:id="rId3"/>
+    <p:sldId id="258" r:id="rId4"/>
+    <p:sldId id="259" r:id="rId5"/>
+    <p:sldId id="260" r:id="rId6"/>
+    <p:sldId id="261" r:id="rId7"/>
+    <p:sldId id="262" r:id="rId8"/>
+    <p:sldId id="263" r:id="rId9"/>
+    <p:sldId id="264" r:id="rId10"/>
+    <p:sldId id="265" r:id="rId11"/>
+    <p:sldId id="266" r:id="rId12"/>
+    <p:sldId id="267" r:id="rId13"/>
+    <p:sldId id="268" r:id="rId14"/>
+    <p:sldId id="269" r:id="rId15"/>
+    <p:sldId id="270" r:id="rId16"/>
+    <p:sldId id="271" r:id="rId17"/>
+    <p:sldId id="272" r:id="rId18"/>
+    <p:sldId id="273" r:id="rId19"/>
+    <p:sldId id="274" r:id="rId20"/>
+    <p:sldId id="275" r:id="rId21"/>
+    <p:sldId id="276" r:id="rId22"/>
   </p:sldIdLst>
-  <p:sldSz cx="12191695" cy="6858000" type="screen4x3"/>
+  <p:sldSz cx="12192000" cy="6858000"/>
   <p:notesSz cx="6858000" cy="9144000"/>
   <p:defaultTextStyle>
     <a:defPPr>
@@ -123,6 +124,22 @@
       </a:defRPr>
     </a:lvl9pPr>
   </p:defaultTextStyle>
+  <p:extLst>
+    <p:ext uri="{EFAFB233-063F-42B5-8137-9DF3F51BA10A}">
+      <p15:sldGuideLst xmlns:p15="http://schemas.microsoft.com/office/powerpoint/2012/main">
+        <p15:guide id="1" orient="horz" pos="2160">
+          <p15:clr>
+            <a:srgbClr val="A4A3A4"/>
+          </p15:clr>
+        </p15:guide>
+        <p15:guide id="2" pos="2880">
+          <p15:clr>
+            <a:srgbClr val="A4A3A4"/>
+          </p15:clr>
+        </p15:guide>
+      </p15:sldGuideLst>
+    </p:ext>
+  </p:extLst>
 </p:presentation>
 </file>
 
@@ -164,10 +181,9 @@
           <a:lstStyle/>
           <a:p>
             <a:r>
-              <a:rPr lang="en-US" smtClean="0"/>
+              <a:rPr lang="en-US"/>
               <a:t>Click to edit Master title style</a:t>
             </a:r>
-            <a:endParaRPr lang="en-US"/>
           </a:p>
         </p:txBody>
       </p:sp>
@@ -283,10 +299,9 @@
           </a:lstStyle>
           <a:p>
             <a:r>
-              <a:rPr lang="en-US" smtClean="0"/>
+              <a:rPr lang="en-US"/>
               <a:t>Click to edit Master subtitle style</a:t>
             </a:r>
-            <a:endParaRPr lang="en-US"/>
           </a:p>
         </p:txBody>
       </p:sp>
@@ -307,7 +322,7 @@
           <a:p>
             <a:fld id="{5BCAD085-E8A6-8845-BD4E-CB4CCA059FC4}" type="datetimeFigureOut">
               <a:rPr lang="en-US" smtClean="0"/>
-              <a:t>1/27/13</a:t>
+              <a:t>7/19/2026</a:t>
             </a:fld>
             <a:endParaRPr lang="en-US"/>
           </a:p>
@@ -401,10 +416,9 @@
           <a:lstStyle/>
           <a:p>
             <a:r>
-              <a:rPr lang="en-US" smtClean="0"/>
+              <a:rPr lang="en-US"/>
               <a:t>Click to edit Master title style</a:t>
             </a:r>
-            <a:endParaRPr lang="en-US"/>
           </a:p>
         </p:txBody>
       </p:sp>
@@ -425,38 +439,37 @@
           <a:p>
             <a:pPr lvl="0"/>
             <a:r>
-              <a:rPr lang="en-US" smtClean="0"/>
+              <a:rPr lang="en-US"/>
               <a:t>Click to edit Master text styles</a:t>
             </a:r>
           </a:p>
           <a:p>
             <a:pPr lvl="1"/>
             <a:r>
-              <a:rPr lang="en-US" smtClean="0"/>
+              <a:rPr lang="en-US"/>
               <a:t>Second level</a:t>
             </a:r>
           </a:p>
           <a:p>
             <a:pPr lvl="2"/>
             <a:r>
-              <a:rPr lang="en-US" smtClean="0"/>
+              <a:rPr lang="en-US"/>
               <a:t>Third level</a:t>
             </a:r>
           </a:p>
           <a:p>
             <a:pPr lvl="3"/>
             <a:r>
-              <a:rPr lang="en-US" smtClean="0"/>
+              <a:rPr lang="en-US"/>
               <a:t>Fourth level</a:t>
             </a:r>
           </a:p>
           <a:p>
             <a:pPr lvl="4"/>
             <a:r>
-              <a:rPr lang="en-US" smtClean="0"/>
+              <a:rPr lang="en-US"/>
               <a:t>Fifth level</a:t>
             </a:r>
-            <a:endParaRPr lang="en-US"/>
           </a:p>
         </p:txBody>
       </p:sp>
@@ -477,7 +490,7 @@
           <a:p>
             <a:fld id="{5BCAD085-E8A6-8845-BD4E-CB4CCA059FC4}" type="datetimeFigureOut">
               <a:rPr lang="en-US" smtClean="0"/>
-              <a:t>1/27/13</a:t>
+              <a:t>7/19/2026</a:t>
             </a:fld>
             <a:endParaRPr lang="en-US"/>
           </a:p>
@@ -576,10 +589,9 @@
           <a:lstStyle/>
           <a:p>
             <a:r>
-              <a:rPr lang="en-US" smtClean="0"/>
+              <a:rPr lang="en-US"/>
               <a:t>Click to edit Master title style</a:t>
             </a:r>
-            <a:endParaRPr lang="en-US"/>
           </a:p>
         </p:txBody>
       </p:sp>
@@ -605,38 +617,37 @@
           <a:p>
             <a:pPr lvl="0"/>
             <a:r>
-              <a:rPr lang="en-US" smtClean="0"/>
+              <a:rPr lang="en-US"/>
               <a:t>Click to edit Master text styles</a:t>
             </a:r>
           </a:p>
           <a:p>
             <a:pPr lvl="1"/>
             <a:r>
-              <a:rPr lang="en-US" smtClean="0"/>
+              <a:rPr lang="en-US"/>
               <a:t>Second level</a:t>
             </a:r>
           </a:p>
           <a:p>
             <a:pPr lvl="2"/>
             <a:r>
-              <a:rPr lang="en-US" smtClean="0"/>
+              <a:rPr lang="en-US"/>
               <a:t>Third level</a:t>
             </a:r>
           </a:p>
           <a:p>
             <a:pPr lvl="3"/>
             <a:r>
-              <a:rPr lang="en-US" smtClean="0"/>
+              <a:rPr lang="en-US"/>
               <a:t>Fourth level</a:t>
             </a:r>
           </a:p>
           <a:p>
             <a:pPr lvl="4"/>
             <a:r>
-              <a:rPr lang="en-US" smtClean="0"/>
+              <a:rPr lang="en-US"/>
               <a:t>Fifth level</a:t>
             </a:r>
-            <a:endParaRPr lang="en-US"/>
           </a:p>
         </p:txBody>
       </p:sp>
@@ -657,7 +668,7 @@
           <a:p>
             <a:fld id="{5BCAD085-E8A6-8845-BD4E-CB4CCA059FC4}" type="datetimeFigureOut">
               <a:rPr lang="en-US" smtClean="0"/>
-              <a:t>1/27/13</a:t>
+              <a:t>7/19/2026</a:t>
             </a:fld>
             <a:endParaRPr lang="en-US"/>
           </a:p>
@@ -751,10 +762,9 @@
           <a:lstStyle/>
           <a:p>
             <a:r>
-              <a:rPr lang="en-US" smtClean="0"/>
+              <a:rPr lang="en-US"/>
               <a:t>Click to edit Master title style</a:t>
             </a:r>
-            <a:endParaRPr lang="en-US"/>
           </a:p>
         </p:txBody>
       </p:sp>
@@ -775,38 +785,37 @@
           <a:p>
             <a:pPr lvl="0"/>
             <a:r>
-              <a:rPr lang="en-US" smtClean="0"/>
+              <a:rPr lang="en-US"/>
               <a:t>Click to edit Master text styles</a:t>
             </a:r>
           </a:p>
           <a:p>
             <a:pPr lvl="1"/>
             <a:r>
-              <a:rPr lang="en-US" smtClean="0"/>
+              <a:rPr lang="en-US"/>
               <a:t>Second level</a:t>
             </a:r>
           </a:p>
           <a:p>
             <a:pPr lvl="2"/>
             <a:r>
-              <a:rPr lang="en-US" smtClean="0"/>
+              <a:rPr lang="en-US"/>
               <a:t>Third level</a:t>
             </a:r>
           </a:p>
           <a:p>
             <a:pPr lvl="3"/>
             <a:r>
-              <a:rPr lang="en-US" smtClean="0"/>
+              <a:rPr lang="en-US"/>
               <a:t>Fourth level</a:t>
             </a:r>
           </a:p>
           <a:p>
             <a:pPr lvl="4"/>
             <a:r>
-              <a:rPr lang="en-US" smtClean="0"/>
+              <a:rPr lang="en-US"/>
               <a:t>Fifth level</a:t>
             </a:r>
-            <a:endParaRPr lang="en-US"/>
           </a:p>
         </p:txBody>
       </p:sp>
@@ -827,7 +836,7 @@
           <a:p>
             <a:fld id="{5BCAD085-E8A6-8845-BD4E-CB4CCA059FC4}" type="datetimeFigureOut">
               <a:rPr lang="en-US" smtClean="0"/>
-              <a:t>1/27/13</a:t>
+              <a:t>7/19/2026</a:t>
             </a:fld>
             <a:endParaRPr lang="en-US"/>
           </a:p>
@@ -930,10 +939,9 @@
           </a:lstStyle>
           <a:p>
             <a:r>
-              <a:rPr lang="en-US" smtClean="0"/>
+              <a:rPr lang="en-US"/>
               <a:t>Click to edit Master title style</a:t>
             </a:r>
-            <a:endParaRPr lang="en-US"/>
           </a:p>
         </p:txBody>
       </p:sp>
@@ -1050,7 +1058,7 @@
           <a:p>
             <a:pPr lvl="0"/>
             <a:r>
-              <a:rPr lang="en-US" smtClean="0"/>
+              <a:rPr lang="en-US"/>
               <a:t>Click to edit Master text styles</a:t>
             </a:r>
           </a:p>
@@ -1073,7 +1081,7 @@
           <a:p>
             <a:fld id="{5BCAD085-E8A6-8845-BD4E-CB4CCA059FC4}" type="datetimeFigureOut">
               <a:rPr lang="en-US" smtClean="0"/>
-              <a:t>1/27/13</a:t>
+              <a:t>7/19/2026</a:t>
             </a:fld>
             <a:endParaRPr lang="en-US"/>
           </a:p>
@@ -1167,10 +1175,9 @@
           <a:lstStyle/>
           <a:p>
             <a:r>
-              <a:rPr lang="en-US" smtClean="0"/>
+              <a:rPr lang="en-US"/>
               <a:t>Click to edit Master title style</a:t>
             </a:r>
-            <a:endParaRPr lang="en-US"/>
           </a:p>
         </p:txBody>
       </p:sp>
@@ -1224,38 +1231,37 @@
           <a:p>
             <a:pPr lvl="0"/>
             <a:r>
-              <a:rPr lang="en-US" smtClean="0"/>
+              <a:rPr lang="en-US"/>
               <a:t>Click to edit Master text styles</a:t>
             </a:r>
           </a:p>
           <a:p>
             <a:pPr lvl="1"/>
             <a:r>
-              <a:rPr lang="en-US" smtClean="0"/>
+              <a:rPr lang="en-US"/>
               <a:t>Second level</a:t>
             </a:r>
           </a:p>
           <a:p>
             <a:pPr lvl="2"/>
             <a:r>
-              <a:rPr lang="en-US" smtClean="0"/>
+              <a:rPr lang="en-US"/>
               <a:t>Third level</a:t>
             </a:r>
           </a:p>
           <a:p>
             <a:pPr lvl="3"/>
             <a:r>
-              <a:rPr lang="en-US" smtClean="0"/>
+              <a:rPr lang="en-US"/>
               <a:t>Fourth level</a:t>
             </a:r>
           </a:p>
           <a:p>
             <a:pPr lvl="4"/>
             <a:r>
-              <a:rPr lang="en-US" smtClean="0"/>
+              <a:rPr lang="en-US"/>
               <a:t>Fifth level</a:t>
             </a:r>
-            <a:endParaRPr lang="en-US"/>
           </a:p>
         </p:txBody>
       </p:sp>
@@ -1309,38 +1315,37 @@
           <a:p>
             <a:pPr lvl="0"/>
             <a:r>
-              <a:rPr lang="en-US" smtClean="0"/>
+              <a:rPr lang="en-US"/>
               <a:t>Click to edit Master text styles</a:t>
             </a:r>
           </a:p>
           <a:p>
             <a:pPr lvl="1"/>
             <a:r>
-              <a:rPr lang="en-US" smtClean="0"/>
+              <a:rPr lang="en-US"/>
               <a:t>Second level</a:t>
             </a:r>
           </a:p>
           <a:p>
             <a:pPr lvl="2"/>
             <a:r>
-              <a:rPr lang="en-US" smtClean="0"/>
+              <a:rPr lang="en-US"/>
               <a:t>Third level</a:t>
             </a:r>
           </a:p>
           <a:p>
             <a:pPr lvl="3"/>
             <a:r>
-              <a:rPr lang="en-US" smtClean="0"/>
+              <a:rPr lang="en-US"/>
               <a:t>Fourth level</a:t>
             </a:r>
           </a:p>
           <a:p>
             <a:pPr lvl="4"/>
             <a:r>
-              <a:rPr lang="en-US" smtClean="0"/>
+              <a:rPr lang="en-US"/>
               <a:t>Fifth level</a:t>
             </a:r>
-            <a:endParaRPr lang="en-US"/>
           </a:p>
         </p:txBody>
       </p:sp>
@@ -1361,7 +1366,7 @@
           <a:p>
             <a:fld id="{5BCAD085-E8A6-8845-BD4E-CB4CCA059FC4}" type="datetimeFigureOut">
               <a:rPr lang="en-US" smtClean="0"/>
-              <a:t>1/27/13</a:t>
+              <a:t>7/19/2026</a:t>
             </a:fld>
             <a:endParaRPr lang="en-US"/>
           </a:p>
@@ -1459,10 +1464,9 @@
           </a:lstStyle>
           <a:p>
             <a:r>
-              <a:rPr lang="en-US" smtClean="0"/>
+              <a:rPr lang="en-US"/>
               <a:t>Click to edit Master title style</a:t>
             </a:r>
-            <a:endParaRPr lang="en-US"/>
           </a:p>
         </p:txBody>
       </p:sp>
@@ -1525,7 +1529,7 @@
           <a:p>
             <a:pPr lvl="0"/>
             <a:r>
-              <a:rPr lang="en-US" smtClean="0"/>
+              <a:rPr lang="en-US"/>
               <a:t>Click to edit Master text styles</a:t>
             </a:r>
           </a:p>
@@ -1581,38 +1585,37 @@
           <a:p>
             <a:pPr lvl="0"/>
             <a:r>
-              <a:rPr lang="en-US" smtClean="0"/>
+              <a:rPr lang="en-US"/>
               <a:t>Click to edit Master text styles</a:t>
             </a:r>
           </a:p>
           <a:p>
             <a:pPr lvl="1"/>
             <a:r>
-              <a:rPr lang="en-US" smtClean="0"/>
+              <a:rPr lang="en-US"/>
               <a:t>Second level</a:t>
             </a:r>
           </a:p>
           <a:p>
             <a:pPr lvl="2"/>
             <a:r>
-              <a:rPr lang="en-US" smtClean="0"/>
+              <a:rPr lang="en-US"/>
               <a:t>Third level</a:t>
             </a:r>
           </a:p>
           <a:p>
             <a:pPr lvl="3"/>
             <a:r>
-              <a:rPr lang="en-US" smtClean="0"/>
+              <a:rPr lang="en-US"/>
               <a:t>Fourth level</a:t>
             </a:r>
           </a:p>
           <a:p>
             <a:pPr lvl="4"/>
             <a:r>
-              <a:rPr lang="en-US" smtClean="0"/>
+              <a:rPr lang="en-US"/>
               <a:t>Fifth level</a:t>
             </a:r>
-            <a:endParaRPr lang="en-US"/>
           </a:p>
         </p:txBody>
       </p:sp>
@@ -1675,7 +1678,7 @@
           <a:p>
             <a:pPr lvl="0"/>
             <a:r>
-              <a:rPr lang="en-US" smtClean="0"/>
+              <a:rPr lang="en-US"/>
               <a:t>Click to edit Master text styles</a:t>
             </a:r>
           </a:p>
@@ -1731,38 +1734,37 @@
           <a:p>
             <a:pPr lvl="0"/>
             <a:r>
-              <a:rPr lang="en-US" smtClean="0"/>
+              <a:rPr lang="en-US"/>
               <a:t>Click to edit Master text styles</a:t>
             </a:r>
           </a:p>
           <a:p>
             <a:pPr lvl="1"/>
             <a:r>
-              <a:rPr lang="en-US" smtClean="0"/>
+              <a:rPr lang="en-US"/>
               <a:t>Second level</a:t>
             </a:r>
           </a:p>
           <a:p>
             <a:pPr lvl="2"/>
             <a:r>
-              <a:rPr lang="en-US" smtClean="0"/>
+              <a:rPr lang="en-US"/>
               <a:t>Third level</a:t>
             </a:r>
           </a:p>
           <a:p>
             <a:pPr lvl="3"/>
             <a:r>
-              <a:rPr lang="en-US" smtClean="0"/>
+              <a:rPr lang="en-US"/>
               <a:t>Fourth level</a:t>
             </a:r>
           </a:p>
           <a:p>
             <a:pPr lvl="4"/>
             <a:r>
-              <a:rPr lang="en-US" smtClean="0"/>
+              <a:rPr lang="en-US"/>
               <a:t>Fifth level</a:t>
             </a:r>
-            <a:endParaRPr lang="en-US"/>
           </a:p>
         </p:txBody>
       </p:sp>
@@ -1783,7 +1785,7 @@
           <a:p>
             <a:fld id="{5BCAD085-E8A6-8845-BD4E-CB4CCA059FC4}" type="datetimeFigureOut">
               <a:rPr lang="en-US" smtClean="0"/>
-              <a:t>1/27/13</a:t>
+              <a:t>7/19/2026</a:t>
             </a:fld>
             <a:endParaRPr lang="en-US"/>
           </a:p>
@@ -1877,10 +1879,9 @@
           <a:lstStyle/>
           <a:p>
             <a:r>
-              <a:rPr lang="en-US" smtClean="0"/>
+              <a:rPr lang="en-US"/>
               <a:t>Click to edit Master title style</a:t>
             </a:r>
-            <a:endParaRPr lang="en-US"/>
           </a:p>
         </p:txBody>
       </p:sp>
@@ -1901,7 +1902,7 @@
           <a:p>
             <a:fld id="{5BCAD085-E8A6-8845-BD4E-CB4CCA059FC4}" type="datetimeFigureOut">
               <a:rPr lang="en-US" smtClean="0"/>
-              <a:t>1/27/13</a:t>
+              <a:t>7/19/2026</a:t>
             </a:fld>
             <a:endParaRPr lang="en-US"/>
           </a:p>
@@ -1996,7 +1997,7 @@
           <a:p>
             <a:fld id="{5BCAD085-E8A6-8845-BD4E-CB4CCA059FC4}" type="datetimeFigureOut">
               <a:rPr lang="en-US" smtClean="0"/>
-              <a:t>1/27/13</a:t>
+              <a:t>7/19/2026</a:t>
             </a:fld>
             <a:endParaRPr lang="en-US"/>
           </a:p>
@@ -2099,10 +2100,9 @@
           </a:lstStyle>
           <a:p>
             <a:r>
-              <a:rPr lang="en-US" smtClean="0"/>
+              <a:rPr lang="en-US"/>
               <a:t>Click to edit Master title style</a:t>
             </a:r>
-            <a:endParaRPr lang="en-US"/>
           </a:p>
         </p:txBody>
       </p:sp>
@@ -2156,38 +2156,37 @@
           <a:p>
             <a:pPr lvl="0"/>
             <a:r>
-              <a:rPr lang="en-US" smtClean="0"/>
+              <a:rPr lang="en-US"/>
               <a:t>Click to edit Master text styles</a:t>
             </a:r>
           </a:p>
           <a:p>
             <a:pPr lvl="1"/>
             <a:r>
-              <a:rPr lang="en-US" smtClean="0"/>
+              <a:rPr lang="en-US"/>
               <a:t>Second level</a:t>
             </a:r>
           </a:p>
           <a:p>
             <a:pPr lvl="2"/>
             <a:r>
-              <a:rPr lang="en-US" smtClean="0"/>
+              <a:rPr lang="en-US"/>
               <a:t>Third level</a:t>
             </a:r>
           </a:p>
           <a:p>
             <a:pPr lvl="3"/>
             <a:r>
-              <a:rPr lang="en-US" smtClean="0"/>
+              <a:rPr lang="en-US"/>
               <a:t>Fourth level</a:t>
             </a:r>
           </a:p>
           <a:p>
             <a:pPr lvl="4"/>
             <a:r>
-              <a:rPr lang="en-US" smtClean="0"/>
+              <a:rPr lang="en-US"/>
               <a:t>Fifth level</a:t>
             </a:r>
-            <a:endParaRPr lang="en-US"/>
           </a:p>
         </p:txBody>
       </p:sp>
@@ -2250,7 +2249,7 @@
           <a:p>
             <a:pPr lvl="0"/>
             <a:r>
-              <a:rPr lang="en-US" smtClean="0"/>
+              <a:rPr lang="en-US"/>
               <a:t>Click to edit Master text styles</a:t>
             </a:r>
           </a:p>
@@ -2273,7 +2272,7 @@
           <a:p>
             <a:fld id="{5BCAD085-E8A6-8845-BD4E-CB4CCA059FC4}" type="datetimeFigureOut">
               <a:rPr lang="en-US" smtClean="0"/>
-              <a:t>1/27/13</a:t>
+              <a:t>7/19/2026</a:t>
             </a:fld>
             <a:endParaRPr lang="en-US"/>
           </a:p>
@@ -2376,10 +2375,9 @@
           </a:lstStyle>
           <a:p>
             <a:r>
-              <a:rPr lang="en-US" smtClean="0"/>
+              <a:rPr lang="en-US"/>
               <a:t>Click to edit Master title style</a:t>
             </a:r>
-            <a:endParaRPr lang="en-US"/>
           </a:p>
         </p:txBody>
       </p:sp>
@@ -2503,7 +2501,7 @@
           <a:p>
             <a:pPr lvl="0"/>
             <a:r>
-              <a:rPr lang="en-US" smtClean="0"/>
+              <a:rPr lang="en-US"/>
               <a:t>Click to edit Master text styles</a:t>
             </a:r>
           </a:p>
@@ -2526,7 +2524,7 @@
           <a:p>
             <a:fld id="{5BCAD085-E8A6-8845-BD4E-CB4CCA059FC4}" type="datetimeFigureOut">
               <a:rPr lang="en-US" smtClean="0"/>
-              <a:t>1/27/13</a:t>
+              <a:t>7/19/2026</a:t>
             </a:fld>
             <a:endParaRPr lang="en-US"/>
           </a:p>
@@ -2635,10 +2633,9 @@
           <a:lstStyle/>
           <a:p>
             <a:r>
-              <a:rPr lang="en-US" smtClean="0"/>
+              <a:rPr lang="en-US"/>
               <a:t>Click to edit Master title style</a:t>
             </a:r>
-            <a:endParaRPr lang="en-US"/>
           </a:p>
         </p:txBody>
       </p:sp>
@@ -2669,38 +2666,37 @@
           <a:p>
             <a:pPr lvl="0"/>
             <a:r>
-              <a:rPr lang="en-US" smtClean="0"/>
+              <a:rPr lang="en-US"/>
               <a:t>Click to edit Master text styles</a:t>
             </a:r>
           </a:p>
           <a:p>
             <a:pPr lvl="1"/>
             <a:r>
-              <a:rPr lang="en-US" smtClean="0"/>
+              <a:rPr lang="en-US"/>
               <a:t>Second level</a:t>
             </a:r>
           </a:p>
           <a:p>
             <a:pPr lvl="2"/>
             <a:r>
-              <a:rPr lang="en-US" smtClean="0"/>
+              <a:rPr lang="en-US"/>
               <a:t>Third level</a:t>
             </a:r>
           </a:p>
           <a:p>
             <a:pPr lvl="3"/>
             <a:r>
-              <a:rPr lang="en-US" smtClean="0"/>
+              <a:rPr lang="en-US"/>
               <a:t>Fourth level</a:t>
             </a:r>
           </a:p>
           <a:p>
             <a:pPr lvl="4"/>
             <a:r>
-              <a:rPr lang="en-US" smtClean="0"/>
+              <a:rPr lang="en-US"/>
               <a:t>Fifth level</a:t>
             </a:r>
-            <a:endParaRPr lang="en-US"/>
           </a:p>
         </p:txBody>
       </p:sp>
@@ -2739,7 +2735,7 @@
           <a:p>
             <a:fld id="{5BCAD085-E8A6-8845-BD4E-CB4CCA059FC4}" type="datetimeFigureOut">
               <a:rPr lang="en-US" smtClean="0"/>
-              <a:t>1/27/13</a:t>
+              <a:t>7/19/2026</a:t>
             </a:fld>
             <a:endParaRPr lang="en-US"/>
           </a:p>
@@ -3098,7 +3094,7 @@
 </file>
 
 <file path=ppt/slides/slide1.xml><?xml version="1.0" encoding="utf-8"?>
-<p:sld xmlns:a="http://schemas.openxmlformats.org/drawingml/2006/main" xmlns:p="http://schemas.openxmlformats.org/presentationml/2006/main" xmlns:r="http://schemas.openxmlformats.org/officeDocument/2006/relationships">
+<p:sld xmlns:a="http://schemas.openxmlformats.org/drawingml/2006/main" xmlns:r="http://schemas.openxmlformats.org/officeDocument/2006/relationships" xmlns:p="http://schemas.openxmlformats.org/presentationml/2006/main">
   <p:cSld>
     <p:spTree>
       <p:nvGrpSpPr>
@@ -3106,7 +3102,14 @@
         <p:cNvGrpSpPr/>
         <p:nvPr/>
       </p:nvGrpSpPr>
-      <p:grpSpPr/>
+      <p:grpSpPr>
+        <a:xfrm>
+          <a:off x="0" y="0"/>
+          <a:ext cx="0" cy="0"/>
+          <a:chOff x="0" y="0"/>
+          <a:chExt cx="0" cy="0"/>
+        </a:xfrm>
+      </p:grpSpPr>
       <p:sp>
         <p:nvSpPr>
           <p:cNvPr id="2" name="Rectangle 1"/>
@@ -3148,6 +3151,7 @@
           <a:lstStyle/>
           <a:p>
             <a:pPr algn="ctr"/>
+            <a:endParaRPr/>
           </a:p>
         </p:txBody>
       </p:sp>
@@ -3192,6 +3196,7 @@
           <a:lstStyle/>
           <a:p>
             <a:pPr algn="ctr"/>
+            <a:endParaRPr/>
           </a:p>
         </p:txBody>
       </p:sp>
@@ -3264,7 +3269,7 @@
                 </a:solidFill>
                 <a:latin typeface="Calibri"/>
               </a:rPr>
-              <a:t>Online Day 2 — Calibration &amp; Scenario Hands-On, then Reserve Requirements: Method &amp; Implementation</a:t>
+              <a:t>Online Day 2 — Calibration &amp; Scenario Hands-On, then Toy Model SOE MC: Crisis, Growth, and Joint Policy Search</a:t>
             </a:r>
           </a:p>
         </p:txBody>
@@ -3310,6 +3315,7 @@
           <a:lstStyle/>
           <a:p>
             <a:pPr algn="ctr"/>
+            <a:endParaRPr/>
           </a:p>
         </p:txBody>
       </p:sp>
@@ -3347,7 +3353,7 @@
                 </a:solidFill>
                 <a:latin typeface="Calibri"/>
               </a:rPr>
-              <a:t>Thursday 23 July 2026 · Morning + Afternoon · 2 × 180 minutes</a:t>
+              <a:t>Thursday 23 July 2026 · Morning + Afternoon · 150 min + 240 min</a:t>
             </a:r>
           </a:p>
           <a:p>
@@ -3425,6 +3431,7 @@
           <a:lstStyle/>
           <a:p>
             <a:pPr algn="ctr"/>
+            <a:endParaRPr/>
           </a:p>
         </p:txBody>
       </p:sp>
@@ -3437,7 +3444,7 @@
 </file>
 
 <file path=ppt/slides/slide10.xml><?xml version="1.0" encoding="utf-8"?>
-<p:sld xmlns:a="http://schemas.openxmlformats.org/drawingml/2006/main" xmlns:p="http://schemas.openxmlformats.org/presentationml/2006/main" xmlns:r="http://schemas.openxmlformats.org/officeDocument/2006/relationships">
+<p:sld xmlns:a="http://schemas.openxmlformats.org/drawingml/2006/main" xmlns:r="http://schemas.openxmlformats.org/officeDocument/2006/relationships" xmlns:p="http://schemas.openxmlformats.org/presentationml/2006/main">
   <p:cSld>
     <p:spTree>
       <p:nvGrpSpPr>
@@ -3445,7 +3452,14 @@
         <p:cNvGrpSpPr/>
         <p:nvPr/>
       </p:nvGrpSpPr>
-      <p:grpSpPr/>
+      <p:grpSpPr>
+        <a:xfrm>
+          <a:off x="0" y="0"/>
+          <a:ext cx="0" cy="0"/>
+          <a:chOff x="0" y="0"/>
+          <a:chExt cx="0" cy="0"/>
+        </a:xfrm>
+      </p:grpSpPr>
       <p:sp>
         <p:nvSpPr>
           <p:cNvPr id="2" name="Rectangle 1"/>
@@ -3487,6 +3501,7 @@
           <a:lstStyle/>
           <a:p>
             <a:pPr algn="ctr"/>
+            <a:endParaRPr/>
           </a:p>
         </p:txBody>
       </p:sp>
@@ -3531,6 +3546,7 @@
           <a:lstStyle/>
           <a:p>
             <a:pPr algn="ctr"/>
+            <a:endParaRPr/>
           </a:p>
         </p:txBody>
       </p:sp>
@@ -3649,6 +3665,7 @@
           <a:lstStyle/>
           <a:p>
             <a:pPr algn="ctr"/>
+            <a:endParaRPr/>
           </a:p>
         </p:txBody>
       </p:sp>
@@ -3801,7 +3818,7 @@
 </file>
 
 <file path=ppt/slides/slide11.xml><?xml version="1.0" encoding="utf-8"?>
-<p:sld xmlns:a="http://schemas.openxmlformats.org/drawingml/2006/main" xmlns:p="http://schemas.openxmlformats.org/presentationml/2006/main" xmlns:r="http://schemas.openxmlformats.org/officeDocument/2006/relationships">
+<p:sld xmlns:a="http://schemas.openxmlformats.org/drawingml/2006/main" xmlns:r="http://schemas.openxmlformats.org/officeDocument/2006/relationships" xmlns:p="http://schemas.openxmlformats.org/presentationml/2006/main">
   <p:cSld>
     <p:spTree>
       <p:nvGrpSpPr>
@@ -3809,7 +3826,14 @@
         <p:cNvGrpSpPr/>
         <p:nvPr/>
       </p:nvGrpSpPr>
-      <p:grpSpPr/>
+      <p:grpSpPr>
+        <a:xfrm>
+          <a:off x="0" y="0"/>
+          <a:ext cx="0" cy="0"/>
+          <a:chOff x="0" y="0"/>
+          <a:chExt cx="0" cy="0"/>
+        </a:xfrm>
+      </p:grpSpPr>
       <p:sp>
         <p:nvSpPr>
           <p:cNvPr id="2" name="Rectangle 1"/>
@@ -3851,6 +3875,7 @@
           <a:lstStyle/>
           <a:p>
             <a:pPr algn="ctr"/>
+            <a:endParaRPr/>
           </a:p>
         </p:txBody>
       </p:sp>
@@ -3923,7 +3948,7 @@
                 </a:solidFill>
                 <a:latin typeface="Calibri"/>
               </a:rPr>
-              <a:t>Reserve Requirements — Method and Implementation</a:t>
+              <a:t>Toy Model SOE MC</a:t>
             </a:r>
           </a:p>
           <a:p>
@@ -3939,7 +3964,7 @@
                 </a:solidFill>
                 <a:latin typeface="Calibri"/>
               </a:rPr>
-              <a:t>180 minutes</a:t>
+              <a:t>Deterministic crisis demo, Vietnam growth, coal phase-down, joint policy search · 240 minutes</a:t>
             </a:r>
           </a:p>
         </p:txBody>
@@ -3953,7 +3978,7 @@
 </file>
 
 <file path=ppt/slides/slide12.xml><?xml version="1.0" encoding="utf-8"?>
-<p:sld xmlns:a="http://schemas.openxmlformats.org/drawingml/2006/main" xmlns:p="http://schemas.openxmlformats.org/presentationml/2006/main" xmlns:r="http://schemas.openxmlformats.org/officeDocument/2006/relationships">
+<p:sld xmlns:a="http://schemas.openxmlformats.org/drawingml/2006/main" xmlns:r="http://schemas.openxmlformats.org/officeDocument/2006/relationships" xmlns:p="http://schemas.openxmlformats.org/presentationml/2006/main">
   <p:cSld>
     <p:spTree>
       <p:nvGrpSpPr>
@@ -3961,7 +3986,14 @@
         <p:cNvGrpSpPr/>
         <p:nvPr/>
       </p:nvGrpSpPr>
-      <p:grpSpPr/>
+      <p:grpSpPr>
+        <a:xfrm>
+          <a:off x="0" y="0"/>
+          <a:ext cx="0" cy="0"/>
+          <a:chOff x="0" y="0"/>
+          <a:chExt cx="0" cy="0"/>
+        </a:xfrm>
+      </p:grpSpPr>
       <p:sp>
         <p:nvSpPr>
           <p:cNvPr id="2" name="Rectangle 1"/>
@@ -4003,6 +4035,7 @@
           <a:lstStyle/>
           <a:p>
             <a:pPr algn="ctr"/>
+            <a:endParaRPr/>
           </a:p>
         </p:txBody>
       </p:sp>
@@ -4047,6 +4080,7 @@
           <a:lstStyle/>
           <a:p>
             <a:pPr algn="ctr"/>
+            <a:endParaRPr/>
           </a:p>
         </p:txBody>
       </p:sp>
@@ -4079,7 +4113,7 @@
                 </a:solidFill>
                 <a:latin typeface="Calibri"/>
               </a:rPr>
-              <a:t>This Afternoon's Agenda — 7 Blocks, 180 Minutes</a:t>
+              <a:t>This Afternoon's Agenda — 4 Blocks + Break, 240 Minutes</a:t>
             </a:r>
           </a:p>
         </p:txBody>
@@ -4149,6 +4183,7 @@
           <a:lstStyle/>
           <a:p>
             <a:pPr algn="ctr"/>
+            <a:endParaRPr/>
           </a:p>
         </p:txBody>
       </p:sp>
@@ -4240,11 +4275,29 @@
                 <a:tableStyleId>{5C22544A-7EE6-4342-B048-85BDC9FD1C3A}</a:tableStyleId>
               </a:tblPr>
               <a:tblGrid>
-                <a:gridCol w="4238850"/>
-                <a:gridCol w="941966"/>
-                <a:gridCol w="6005037"/>
+                <a:gridCol w="4238850">
+                  <a:extLst>
+                    <a:ext uri="{9D8B030D-6E8A-4147-A177-3AD203B41FA5}">
+                      <a16:colId xmlns:a16="http://schemas.microsoft.com/office/drawing/2014/main" val="20000"/>
+                    </a:ext>
+                  </a:extLst>
+                </a:gridCol>
+                <a:gridCol w="941966">
+                  <a:extLst>
+                    <a:ext uri="{9D8B030D-6E8A-4147-A177-3AD203B41FA5}">
+                      <a16:colId xmlns:a16="http://schemas.microsoft.com/office/drawing/2014/main" val="20001"/>
+                    </a:ext>
+                  </a:extLst>
+                </a:gridCol>
+                <a:gridCol w="6005037">
+                  <a:extLst>
+                    <a:ext uri="{9D8B030D-6E8A-4147-A177-3AD203B41FA5}">
+                      <a16:colId xmlns:a16="http://schemas.microsoft.com/office/drawing/2014/main" val="20002"/>
+                    </a:ext>
+                  </a:extLst>
+                </a:gridCol>
               </a:tblGrid>
-              <a:tr h="543560">
+              <a:tr h="698862">
                 <a:tc>
                   <a:txBody>
                     <a:bodyPr/>
@@ -4261,7 +4314,7 @@
                       </a:r>
                     </a:p>
                   </a:txBody>
-                  <a:tcPr anchor="ctr" marT="50800" marB="50800">
+                  <a:tcPr marT="50800" marB="50800" anchor="ctr">
                     <a:solidFill>
                       <a:srgbClr val="CC071E"/>
                     </a:solidFill>
@@ -4283,7 +4336,7 @@
                       </a:r>
                     </a:p>
                   </a:txBody>
-                  <a:tcPr anchor="ctr" marT="50800" marB="50800">
+                  <a:tcPr marT="50800" marB="50800" anchor="ctr">
                     <a:solidFill>
                       <a:srgbClr val="CC071E"/>
                     </a:solidFill>
@@ -4305,17 +4358,22 @@
                       </a:r>
                     </a:p>
                   </a:txBody>
-                  <a:tcPr anchor="ctr" marT="50800" marB="50800">
+                  <a:tcPr marT="50800" marB="50800" anchor="ctr">
                     <a:solidFill>
                       <a:srgbClr val="CC071E"/>
                     </a:solidFill>
                   </a:tcPr>
                 </a:tc>
+                <a:extLst>
+                  <a:ext uri="{0D108BD9-81ED-4DB2-BD59-A6C34878D82A}">
+                    <a16:rowId xmlns:a16="http://schemas.microsoft.com/office/drawing/2014/main" val="10000"/>
+                  </a:ext>
+                </a:extLst>
               </a:tr>
-              <a:tr h="543560">
+              <a:tr h="698862">
                 <a:tc>
                   <a:txBody>
-                    <a:bodyPr wrap="square"/>
+                    <a:bodyPr/>
                     <a:lstStyle/>
                     <a:p>
                       <a:r>
@@ -4325,11 +4383,11 @@
                           </a:solidFill>
                           <a:latin typeface="Calibri"/>
                         </a:rPr>
-                        <a:t>1. Frame the question and the caveat</a:t>
+                        <a:t>1. Frame the toy model</a:t>
                       </a:r>
                     </a:p>
                   </a:txBody>
-                  <a:tcPr anchor="ctr" marT="38100" marB="38100">
+                  <a:tcPr marT="38100" marB="38100" anchor="ctr">
                     <a:solidFill>
                       <a:srgbClr val="FFFFFF"/>
                     </a:solidFill>
@@ -4337,7 +4395,299 @@
                 </a:tc>
                 <a:tc>
                   <a:txBody>
-                    <a:bodyPr wrap="square"/>
+                    <a:bodyPr/>
+                    <a:lstStyle/>
+                    <a:p>
+                      <a:r>
+                        <a:rPr sz="1300" b="0" i="0">
+                          <a:solidFill>
+                            <a:srgbClr val="232323"/>
+                          </a:solidFill>
+                          <a:latin typeface="Calibri"/>
+                        </a:rPr>
+                        <a:t>20</a:t>
+                      </a:r>
+                    </a:p>
+                  </a:txBody>
+                  <a:tcPr marT="38100" marB="38100" anchor="ctr">
+                    <a:solidFill>
+                      <a:srgbClr val="FFFFFF"/>
+                    </a:solidFill>
+                  </a:tcPr>
+                </a:tc>
+                <a:tc>
+                  <a:txBody>
+                    <a:bodyPr/>
+                    <a:lstStyle/>
+                    <a:p>
+                      <a:r>
+                        <a:rPr sz="1300" b="0" i="0">
+                          <a:solidFill>
+                            <a:srgbClr val="232323"/>
+                          </a:solidFill>
+                          <a:latin typeface="Calibri"/>
+                        </a:rPr>
+                        <a:t>Set up the multi-commodity SOE, reserves, and policy levers</a:t>
+                      </a:r>
+                    </a:p>
+                  </a:txBody>
+                  <a:tcPr marT="38100" marB="38100" anchor="ctr">
+                    <a:solidFill>
+                      <a:srgbClr val="FFFFFF"/>
+                    </a:solidFill>
+                  </a:tcPr>
+                </a:tc>
+                <a:extLst>
+                  <a:ext uri="{0D108BD9-81ED-4DB2-BD59-A6C34878D82A}">
+                    <a16:rowId xmlns:a16="http://schemas.microsoft.com/office/drawing/2014/main" val="10001"/>
+                  </a:ext>
+                </a:extLst>
+              </a:tr>
+              <a:tr h="698862">
+                <a:tc>
+                  <a:txBody>
+                    <a:bodyPr/>
+                    <a:lstStyle/>
+                    <a:p>
+                      <a:r>
+                        <a:rPr sz="1300" b="1" i="0">
+                          <a:solidFill>
+                            <a:srgbClr val="232323"/>
+                          </a:solidFill>
+                          <a:latin typeface="Calibri"/>
+                        </a:rPr>
+                        <a:t>2. Deterministic crisis demo</a:t>
+                      </a:r>
+                    </a:p>
+                  </a:txBody>
+                  <a:tcPr marT="38100" marB="38100" anchor="ctr">
+                    <a:solidFill>
+                      <a:srgbClr val="F5F5F5"/>
+                    </a:solidFill>
+                  </a:tcPr>
+                </a:tc>
+                <a:tc>
+                  <a:txBody>
+                    <a:bodyPr/>
+                    <a:lstStyle/>
+                    <a:p>
+                      <a:r>
+                        <a:rPr sz="1300" b="0" i="0">
+                          <a:solidFill>
+                            <a:srgbClr val="232323"/>
+                          </a:solidFill>
+                          <a:latin typeface="Calibri"/>
+                        </a:rPr>
+                        <a:t>40</a:t>
+                      </a:r>
+                    </a:p>
+                  </a:txBody>
+                  <a:tcPr marT="38100" marB="38100" anchor="ctr">
+                    <a:solidFill>
+                      <a:srgbClr val="F5F5F5"/>
+                    </a:solidFill>
+                  </a:tcPr>
+                </a:tc>
+                <a:tc>
+                  <a:txBody>
+                    <a:bodyPr/>
+                    <a:lstStyle/>
+                    <a:p>
+                      <a:r>
+                        <a:rPr sz="1300" b="0" i="0">
+                          <a:solidFill>
+                            <a:srgbClr val="232323"/>
+                          </a:solidFill>
+                          <a:latin typeface="Calibri"/>
+                        </a:rPr>
+                        <a:t>Supply disruption with phi_R=0 vs phi_R=1</a:t>
+                      </a:r>
+                    </a:p>
+                  </a:txBody>
+                  <a:tcPr marT="38100" marB="38100" anchor="ctr">
+                    <a:solidFill>
+                      <a:srgbClr val="F5F5F5"/>
+                    </a:solidFill>
+                  </a:tcPr>
+                </a:tc>
+                <a:extLst>
+                  <a:ext uri="{0D108BD9-81ED-4DB2-BD59-A6C34878D82A}">
+                    <a16:rowId xmlns:a16="http://schemas.microsoft.com/office/drawing/2014/main" val="10002"/>
+                  </a:ext>
+                </a:extLst>
+              </a:tr>
+              <a:tr h="698862">
+                <a:tc>
+                  <a:txBody>
+                    <a:bodyPr/>
+                    <a:lstStyle/>
+                    <a:p>
+                      <a:r>
+                        <a:rPr sz="1300" b="1" i="0">
+                          <a:solidFill>
+                            <a:srgbClr val="232323"/>
+                          </a:solidFill>
+                          <a:latin typeface="Calibri"/>
+                        </a:rPr>
+                        <a:t>3. Vietnam growth and coal transition</a:t>
+                      </a:r>
+                    </a:p>
+                  </a:txBody>
+                  <a:tcPr marT="38100" marB="38100" anchor="ctr">
+                    <a:solidFill>
+                      <a:srgbClr val="FFFFFF"/>
+                    </a:solidFill>
+                  </a:tcPr>
+                </a:tc>
+                <a:tc>
+                  <a:txBody>
+                    <a:bodyPr/>
+                    <a:lstStyle/>
+                    <a:p>
+                      <a:r>
+                        <a:rPr sz="1300" b="0" i="0">
+                          <a:solidFill>
+                            <a:srgbClr val="232323"/>
+                          </a:solidFill>
+                          <a:latin typeface="Calibri"/>
+                        </a:rPr>
+                        <a:t>55</a:t>
+                      </a:r>
+                    </a:p>
+                  </a:txBody>
+                  <a:tcPr marT="38100" marB="38100" anchor="ctr">
+                    <a:solidFill>
+                      <a:srgbClr val="FFFFFF"/>
+                    </a:solidFill>
+                  </a:tcPr>
+                </a:tc>
+                <a:tc>
+                  <a:txBody>
+                    <a:bodyPr/>
+                    <a:lstStyle/>
+                    <a:p>
+                      <a:r>
+                        <a:rPr sz="1300" b="0" i="0">
+                          <a:solidFill>
+                            <a:srgbClr val="232323"/>
+                          </a:solidFill>
+                          <a:latin typeface="Calibri"/>
+                        </a:rPr>
+                        <a:t>6.5% GDP growth, reserve coverage, and coal phase-down scenarios</a:t>
+                      </a:r>
+                    </a:p>
+                  </a:txBody>
+                  <a:tcPr marT="38100" marB="38100" anchor="ctr">
+                    <a:solidFill>
+                      <a:srgbClr val="FFFFFF"/>
+                    </a:solidFill>
+                  </a:tcPr>
+                </a:tc>
+                <a:extLst>
+                  <a:ext uri="{0D108BD9-81ED-4DB2-BD59-A6C34878D82A}">
+                    <a16:rowId xmlns:a16="http://schemas.microsoft.com/office/drawing/2014/main" val="10003"/>
+                  </a:ext>
+                </a:extLst>
+              </a:tr>
+              <a:tr h="698862">
+                <a:tc>
+                  <a:txBody>
+                    <a:bodyPr/>
+                    <a:lstStyle/>
+                    <a:p>
+                      <a:r>
+                        <a:rPr sz="1300" b="1" i="0">
+                          <a:solidFill>
+                            <a:srgbClr val="232323"/>
+                          </a:solidFill>
+                          <a:latin typeface="Calibri"/>
+                        </a:rPr>
+                        <a:t>4. Joint optimal policy search</a:t>
+                      </a:r>
+                    </a:p>
+                  </a:txBody>
+                  <a:tcPr marT="38100" marB="38100" anchor="ctr">
+                    <a:solidFill>
+                      <a:srgbClr val="F5F5F5"/>
+                    </a:solidFill>
+                  </a:tcPr>
+                </a:tc>
+                <a:tc>
+                  <a:txBody>
+                    <a:bodyPr/>
+                    <a:lstStyle/>
+                    <a:p>
+                      <a:r>
+                        <a:rPr sz="1300" b="0" i="0">
+                          <a:solidFill>
+                            <a:srgbClr val="232323"/>
+                          </a:solidFill>
+                          <a:latin typeface="Calibri"/>
+                        </a:rPr>
+                        <a:t>70</a:t>
+                      </a:r>
+                    </a:p>
+                  </a:txBody>
+                  <a:tcPr marT="38100" marB="38100" anchor="ctr">
+                    <a:solidFill>
+                      <a:srgbClr val="F5F5F5"/>
+                    </a:solidFill>
+                  </a:tcPr>
+                </a:tc>
+                <a:tc>
+                  <a:txBody>
+                    <a:bodyPr/>
+                    <a:lstStyle/>
+                    <a:p>
+                      <a:r>
+                        <a:rPr sz="1300" b="0" i="0">
+                          <a:solidFill>
+                            <a:srgbClr val="232323"/>
+                          </a:solidFill>
+                          <a:latin typeface="Calibri"/>
+                        </a:rPr>
+                        <a:t>3D Monte Carlo over phi_R × phi_IQ × d; find the joint optimum</a:t>
+                      </a:r>
+                    </a:p>
+                  </a:txBody>
+                  <a:tcPr marT="38100" marB="38100" anchor="ctr">
+                    <a:solidFill>
+                      <a:srgbClr val="F5F5F5"/>
+                    </a:solidFill>
+                  </a:tcPr>
+                </a:tc>
+                <a:extLst>
+                  <a:ext uri="{0D108BD9-81ED-4DB2-BD59-A6C34878D82A}">
+                    <a16:rowId xmlns:a16="http://schemas.microsoft.com/office/drawing/2014/main" val="10004"/>
+                  </a:ext>
+                </a:extLst>
+              </a:tr>
+              <a:tr h="698862">
+                <a:tc>
+                  <a:txBody>
+                    <a:bodyPr/>
+                    <a:lstStyle/>
+                    <a:p>
+                      <a:r>
+                        <a:rPr sz="1300" b="1" i="0">
+                          <a:solidFill>
+                            <a:srgbClr val="232323"/>
+                          </a:solidFill>
+                          <a:latin typeface="Calibri"/>
+                        </a:rPr>
+                        <a:t>— Break —</a:t>
+                      </a:r>
+                    </a:p>
+                  </a:txBody>
+                  <a:tcPr marT="38100" marB="38100" anchor="ctr">
+                    <a:solidFill>
+                      <a:srgbClr val="FFFFFF"/>
+                    </a:solidFill>
+                  </a:tcPr>
+                </a:tc>
+                <a:tc>
+                  <a:txBody>
+                    <a:bodyPr/>
                     <a:lstStyle/>
                     <a:p>
                       <a:r>
@@ -4351,7 +4701,7 @@
                       </a:r>
                     </a:p>
                   </a:txBody>
-                  <a:tcPr anchor="ctr" marT="38100" marB="38100">
+                  <a:tcPr marT="38100" marB="38100" anchor="ctr">
                     <a:solidFill>
                       <a:srgbClr val="FFFFFF"/>
                     </a:solidFill>
@@ -4359,7 +4709,50 @@
                 </a:tc>
                 <a:tc>
                   <a:txBody>
-                    <a:bodyPr wrap="square"/>
+                    <a:bodyPr/>
+                    <a:lstStyle/>
+                    <a:p>
+                      <a:endParaRPr/>
+                    </a:p>
+                  </a:txBody>
+                  <a:tcPr marT="38100" marB="38100" anchor="ctr">
+                    <a:solidFill>
+                      <a:srgbClr val="FFFFFF"/>
+                    </a:solidFill>
+                  </a:tcPr>
+                </a:tc>
+                <a:extLst>
+                  <a:ext uri="{0D108BD9-81ED-4DB2-BD59-A6C34878D82A}">
+                    <a16:rowId xmlns:a16="http://schemas.microsoft.com/office/drawing/2014/main" val="10005"/>
+                  </a:ext>
+                </a:extLst>
+              </a:tr>
+              <a:tr h="698868">
+                <a:tc>
+                  <a:txBody>
+                    <a:bodyPr/>
+                    <a:lstStyle/>
+                    <a:p>
+                      <a:r>
+                        <a:rPr sz="1300" b="1" i="0">
+                          <a:solidFill>
+                            <a:srgbClr val="232323"/>
+                          </a:solidFill>
+                          <a:latin typeface="Calibri"/>
+                        </a:rPr>
+                        <a:t>5. Interpretation and wrap</a:t>
+                      </a:r>
+                    </a:p>
+                  </a:txBody>
+                  <a:tcPr marT="38100" marB="38100" anchor="ctr">
+                    <a:solidFill>
+                      <a:srgbClr val="F5F5F5"/>
+                    </a:solidFill>
+                  </a:tcPr>
+                </a:tc>
+                <a:tc>
+                  <a:txBody>
+                    <a:bodyPr/>
                     <a:lstStyle/>
                     <a:p>
                       <a:r>
@@ -4369,35 +4762,11 @@
                           </a:solidFill>
                           <a:latin typeface="Calibri"/>
                         </a:rPr>
-                        <a:t>State the policy question; state the DGE-METRIC/toy-model distinction up front</a:t>
+                        <a:t>50</a:t>
                       </a:r>
                     </a:p>
                   </a:txBody>
-                  <a:tcPr anchor="ctr" marT="38100" marB="38100">
-                    <a:solidFill>
-                      <a:srgbClr val="FFFFFF"/>
-                    </a:solidFill>
-                  </a:tcPr>
-                </a:tc>
-              </a:tr>
-              <a:tr h="543560">
-                <a:tc>
-                  <a:txBody>
-                    <a:bodyPr wrap="square"/>
-                    <a:lstStyle/>
-                    <a:p>
-                      <a:r>
-                        <a:rPr sz="1300" b="1" i="0">
-                          <a:solidFill>
-                            <a:srgbClr val="232323"/>
-                          </a:solidFill>
-                          <a:latin typeface="Calibri"/>
-                        </a:rPr>
-                        <a:t>2. Inputs from Days 1–2</a:t>
-                      </a:r>
-                    </a:p>
-                  </a:txBody>
-                  <a:tcPr anchor="ctr" marT="38100" marB="38100">
+                  <a:tcPr marT="38100" marB="38100" anchor="ctr">
                     <a:solidFill>
                       <a:srgbClr val="F5F5F5"/>
                     </a:solidFill>
@@ -4405,7 +4774,7 @@
                 </a:tc>
                 <a:tc>
                   <a:txBody>
-                    <a:bodyPr wrap="square"/>
+                    <a:bodyPr/>
                     <a:lstStyle/>
                     <a:p>
                       <a:r>
@@ -4415,446 +4784,21 @@
                           </a:solidFill>
                           <a:latin typeface="Calibri"/>
                         </a:rPr>
-                        <a:t>15</a:t>
+                        <a:t>What the runs show about storage costs, complementarity, and policy trade-offs</a:t>
                       </a:r>
                     </a:p>
                   </a:txBody>
-                  <a:tcPr anchor="ctr" marT="38100" marB="38100">
+                  <a:tcPr marT="38100" marB="38100" anchor="ctr">
                     <a:solidFill>
                       <a:srgbClr val="F5F5F5"/>
                     </a:solidFill>
                   </a:tcPr>
                 </a:tc>
-                <a:tc>
-                  <a:txBody>
-                    <a:bodyPr wrap="square"/>
-                    <a:lstStyle/>
-                    <a:p>
-                      <a:r>
-                        <a:rPr sz="1300" b="0" i="0">
-                          <a:solidFill>
-                            <a:srgbClr val="232323"/>
-                          </a:solidFill>
-                          <a:latin typeface="Calibri"/>
-                        </a:rPr>
-                        <a:t>Map which finance- and efficiency-scenario outputs feed a reserve-adequacy analysis</a:t>
-                      </a:r>
-                    </a:p>
-                  </a:txBody>
-                  <a:tcPr anchor="ctr" marT="38100" marB="38100">
-                    <a:solidFill>
-                      <a:srgbClr val="F5F5F5"/>
-                    </a:solidFill>
-                  </a:tcPr>
-                </a:tc>
-              </a:tr>
-              <a:tr h="543560">
-                <a:tc>
-                  <a:txBody>
-                    <a:bodyPr wrap="square"/>
-                    <a:lstStyle/>
-                    <a:p>
-                      <a:r>
-                        <a:rPr sz="1300" b="1" i="0">
-                          <a:solidFill>
-                            <a:srgbClr val="232323"/>
-                          </a:solidFill>
-                          <a:latin typeface="Calibri"/>
-                        </a:rPr>
-                        <a:t>3. Step 1 — break-even screening</a:t>
-                      </a:r>
-                    </a:p>
-                  </a:txBody>
-                  <a:tcPr anchor="ctr" marT="38100" marB="38100">
-                    <a:solidFill>
-                      <a:srgbClr val="FFFFFF"/>
-                    </a:solidFill>
-                  </a:tcPr>
-                </a:tc>
-                <a:tc>
-                  <a:txBody>
-                    <a:bodyPr wrap="square"/>
-                    <a:lstStyle/>
-                    <a:p>
-                      <a:r>
-                        <a:rPr sz="1300" b="0" i="0">
-                          <a:solidFill>
-                            <a:srgbClr val="232323"/>
-                          </a:solidFill>
-                          <a:latin typeface="Calibri"/>
-                        </a:rPr>
-                        <a:t>25</a:t>
-                      </a:r>
-                    </a:p>
-                  </a:txBody>
-                  <a:tcPr anchor="ctr" marT="38100" marB="38100">
-                    <a:solidFill>
-                      <a:srgbClr val="FFFFFF"/>
-                    </a:solidFill>
-                  </a:tcPr>
-                </a:tc>
-                <a:tc>
-                  <a:txBody>
-                    <a:bodyPr wrap="square"/>
-                    <a:lstStyle/>
-                    <a:p>
-                      <a:r>
-                        <a:rPr sz="1300" b="0" i="0">
-                          <a:solidFill>
-                            <a:srgbClr val="232323"/>
-                          </a:solidFill>
-                          <a:latin typeface="Calibri"/>
-                        </a:rPr>
-                        <a:t>Break-even table; the MC = MB accounting logic</a:t>
-                      </a:r>
-                    </a:p>
-                  </a:txBody>
-                  <a:tcPr anchor="ctr" marT="38100" marB="38100">
-                    <a:solidFill>
-                      <a:srgbClr val="FFFFFF"/>
-                    </a:solidFill>
-                  </a:tcPr>
-                </a:tc>
-              </a:tr>
-              <a:tr h="543560">
-                <a:tc>
-                  <a:txBody>
-                    <a:bodyPr wrap="square"/>
-                    <a:lstStyle/>
-                    <a:p>
-                      <a:r>
-                        <a:rPr sz="1300" b="1" i="0">
-                          <a:solidFill>
-                            <a:srgbClr val="232323"/>
-                          </a:solidFill>
-                          <a:latin typeface="Calibri"/>
-                        </a:rPr>
-                        <a:t>4. Steps 2–3 — validate, optimize</a:t>
-                      </a:r>
-                    </a:p>
-                  </a:txBody>
-                  <a:tcPr anchor="ctr" marT="38100" marB="38100">
-                    <a:solidFill>
-                      <a:srgbClr val="F5F5F5"/>
-                    </a:solidFill>
-                  </a:tcPr>
-                </a:tc>
-                <a:tc>
-                  <a:txBody>
-                    <a:bodyPr wrap="square"/>
-                    <a:lstStyle/>
-                    <a:p>
-                      <a:r>
-                        <a:rPr sz="1300" b="0" i="0">
-                          <a:solidFill>
-                            <a:srgbClr val="232323"/>
-                          </a:solidFill>
-                          <a:latin typeface="Calibri"/>
-                        </a:rPr>
-                        <a:t>25</a:t>
-                      </a:r>
-                    </a:p>
-                  </a:txBody>
-                  <a:tcPr anchor="ctr" marT="38100" marB="38100">
-                    <a:solidFill>
-                      <a:srgbClr val="F5F5F5"/>
-                    </a:solidFill>
-                  </a:tcPr>
-                </a:tc>
-                <a:tc>
-                  <a:txBody>
-                    <a:bodyPr wrap="square"/>
-                    <a:lstStyle/>
-                    <a:p>
-                      <a:r>
-                        <a:rPr sz="1300" b="0" i="0">
-                          <a:solidFill>
-                            <a:srgbClr val="232323"/>
-                          </a:solidFill>
-                          <a:latin typeface="Calibri"/>
-                        </a:rPr>
-                        <a:t>"Not justified" verdicts; the Step-3 caveat</a:t>
-                      </a:r>
-                    </a:p>
-                  </a:txBody>
-                  <a:tcPr anchor="ctr" marT="38100" marB="38100">
-                    <a:solidFill>
-                      <a:srgbClr val="F5F5F5"/>
-                    </a:solidFill>
-                  </a:tcPr>
-                </a:tc>
-              </a:tr>
-              <a:tr h="543560">
-                <a:tc>
-                  <a:txBody>
-                    <a:bodyPr wrap="square"/>
-                    <a:lstStyle/>
-                    <a:p>
-                      <a:r>
-                        <a:rPr sz="1300" b="1" i="0">
-                          <a:solidFill>
-                            <a:srgbClr val="232323"/>
-                          </a:solidFill>
-                          <a:latin typeface="Calibri"/>
-                        </a:rPr>
-                        <a:t>— Break —</a:t>
-                      </a:r>
-                    </a:p>
-                  </a:txBody>
-                  <a:tcPr anchor="ctr" marT="38100" marB="38100">
-                    <a:solidFill>
-                      <a:srgbClr val="FFFFFF"/>
-                    </a:solidFill>
-                  </a:tcPr>
-                </a:tc>
-                <a:tc>
-                  <a:txBody>
-                    <a:bodyPr wrap="square"/>
-                    <a:lstStyle/>
-                    <a:p>
-                      <a:r>
-                        <a:rPr sz="1300" b="0" i="0">
-                          <a:solidFill>
-                            <a:srgbClr val="232323"/>
-                          </a:solidFill>
-                          <a:latin typeface="Calibri"/>
-                        </a:rPr>
-                        <a:t>15</a:t>
-                      </a:r>
-                    </a:p>
-                  </a:txBody>
-                  <a:tcPr anchor="ctr" marT="38100" marB="38100">
-                    <a:solidFill>
-                      <a:srgbClr val="FFFFFF"/>
-                    </a:solidFill>
-                  </a:tcPr>
-                </a:tc>
-                <a:tc>
-                  <a:txBody>
-                    <a:bodyPr wrap="square"/>
-                    <a:lstStyle/>
-                    <a:p>
-                      <a:r>
-                        <a:rPr sz="1300" b="0" i="0">
-                          <a:solidFill>
-                            <a:srgbClr val="232323"/>
-                          </a:solidFill>
-                          <a:latin typeface="Calibri"/>
-                        </a:rPr>
-                        <a:t/>
-                      </a:r>
-                    </a:p>
-                  </a:txBody>
-                  <a:tcPr anchor="ctr" marT="38100" marB="38100">
-                    <a:solidFill>
-                      <a:srgbClr val="FFFFFF"/>
-                    </a:solidFill>
-                  </a:tcPr>
-                </a:tc>
-              </a:tr>
-              <a:tr h="543560">
-                <a:tc>
-                  <a:txBody>
-                    <a:bodyPr wrap="square"/>
-                    <a:lstStyle/>
-                    <a:p>
-                      <a:r>
-                        <a:rPr sz="1300" b="1" i="0">
-                          <a:solidFill>
-                            <a:srgbClr val="232323"/>
-                          </a:solidFill>
-                          <a:latin typeface="Calibri"/>
-                        </a:rPr>
-                        <a:t>5. Implementation: where this lives in DGE-METRIC</a:t>
-                      </a:r>
-                    </a:p>
-                  </a:txBody>
-                  <a:tcPr anchor="ctr" marT="38100" marB="38100">
-                    <a:solidFill>
-                      <a:srgbClr val="F5F5F5"/>
-                    </a:solidFill>
-                  </a:tcPr>
-                </a:tc>
-                <a:tc>
-                  <a:txBody>
-                    <a:bodyPr wrap="square"/>
-                    <a:lstStyle/>
-                    <a:p>
-                      <a:r>
-                        <a:rPr sz="1300" b="0" i="0">
-                          <a:solidFill>
-                            <a:srgbClr val="232323"/>
-                          </a:solidFill>
-                          <a:latin typeface="Calibri"/>
-                        </a:rPr>
-                        <a:t>35</a:t>
-                      </a:r>
-                    </a:p>
-                  </a:txBody>
-                  <a:tcPr anchor="ctr" marT="38100" marB="38100">
-                    <a:solidFill>
-                      <a:srgbClr val="F5F5F5"/>
-                    </a:solidFill>
-                  </a:tcPr>
-                </a:tc>
-                <a:tc>
-                  <a:txBody>
-                    <a:bodyPr wrap="square"/>
-                    <a:lstStyle/>
-                    <a:p>
-                      <a:r>
-                        <a:rPr sz="1300" b="0" i="0">
-                          <a:solidFill>
-                            <a:srgbClr val="232323"/>
-                          </a:solidFill>
-                          <a:latin typeface="Calibri"/>
-                        </a:rPr>
-                        <a:t>Post-processing script vs. structural model change — the ModFiles/Functions pattern, applied to reserves</a:t>
-                      </a:r>
-                    </a:p>
-                  </a:txBody>
-                  <a:tcPr anchor="ctr" marT="38100" marB="38100">
-                    <a:solidFill>
-                      <a:srgbClr val="F5F5F5"/>
-                    </a:solidFill>
-                  </a:tcPr>
-                </a:tc>
-              </a:tr>
-              <a:tr h="543560">
-                <a:tc>
-                  <a:txBody>
-                    <a:bodyPr wrap="square"/>
-                    <a:lstStyle/>
-                    <a:p>
-                      <a:r>
-                        <a:rPr sz="1300" b="1" i="0">
-                          <a:solidFill>
-                            <a:srgbClr val="232323"/>
-                          </a:solidFill>
-                          <a:latin typeface="Calibri"/>
-                        </a:rPr>
-                        <a:t>6. Draft implementation plan</a:t>
-                      </a:r>
-                    </a:p>
-                  </a:txBody>
-                  <a:tcPr anchor="ctr" marT="38100" marB="38100">
-                    <a:solidFill>
-                      <a:srgbClr val="FFFFFF"/>
-                    </a:solidFill>
-                  </a:tcPr>
-                </a:tc>
-                <a:tc>
-                  <a:txBody>
-                    <a:bodyPr wrap="square"/>
-                    <a:lstStyle/>
-                    <a:p>
-                      <a:r>
-                        <a:rPr sz="1300" b="0" i="0">
-                          <a:solidFill>
-                            <a:srgbClr val="232323"/>
-                          </a:solidFill>
-                          <a:latin typeface="Calibri"/>
-                        </a:rPr>
-                        <a:t>35</a:t>
-                      </a:r>
-                    </a:p>
-                  </a:txBody>
-                  <a:tcPr anchor="ctr" marT="38100" marB="38100">
-                    <a:solidFill>
-                      <a:srgbClr val="FFFFFF"/>
-                    </a:solidFill>
-                  </a:tcPr>
-                </a:tc>
-                <a:tc>
-                  <a:txBody>
-                    <a:bodyPr wrap="square"/>
-                    <a:lstStyle/>
-                    <a:p>
-                      <a:r>
-                        <a:rPr sz="1300" b="0" i="0">
-                          <a:solidFill>
-                            <a:srgbClr val="232323"/>
-                          </a:solidFill>
-                          <a:latin typeface="Calibri"/>
-                        </a:rPr>
-                        <a:t>Choose a carrier; draft mechanism, DGE-METRIC outputs needed, codebase location, open items</a:t>
-                      </a:r>
-                    </a:p>
-                  </a:txBody>
-                  <a:tcPr anchor="ctr" marT="38100" marB="38100">
-                    <a:solidFill>
-                      <a:srgbClr val="FFFFFF"/>
-                    </a:solidFill>
-                  </a:tcPr>
-                </a:tc>
-              </a:tr>
-              <a:tr h="543560">
-                <a:tc>
-                  <a:txBody>
-                    <a:bodyPr wrap="square"/>
-                    <a:lstStyle/>
-                    <a:p>
-                      <a:r>
-                        <a:rPr sz="1300" b="1" i="0">
-                          <a:solidFill>
-                            <a:srgbClr val="232323"/>
-                          </a:solidFill>
-                          <a:latin typeface="Calibri"/>
-                        </a:rPr>
-                        <a:t>7. Wrap and preview</a:t>
-                      </a:r>
-                    </a:p>
-                  </a:txBody>
-                  <a:tcPr anchor="ctr" marT="38100" marB="38100">
-                    <a:solidFill>
-                      <a:srgbClr val="F5F5F5"/>
-                    </a:solidFill>
-                  </a:tcPr>
-                </a:tc>
-                <a:tc>
-                  <a:txBody>
-                    <a:bodyPr wrap="square"/>
-                    <a:lstStyle/>
-                    <a:p>
-                      <a:r>
-                        <a:rPr sz="1300" b="0" i="0">
-                          <a:solidFill>
-                            <a:srgbClr val="232323"/>
-                          </a:solidFill>
-                          <a:latin typeface="Calibri"/>
-                        </a:rPr>
-                        <a:t>15</a:t>
-                      </a:r>
-                    </a:p>
-                  </a:txBody>
-                  <a:tcPr anchor="ctr" marT="38100" marB="38100">
-                    <a:solidFill>
-                      <a:srgbClr val="F5F5F5"/>
-                    </a:solidFill>
-                  </a:tcPr>
-                </a:tc>
-                <a:tc>
-                  <a:txBody>
-                    <a:bodyPr wrap="square"/>
-                    <a:lstStyle/>
-                    <a:p>
-                      <a:r>
-                        <a:rPr sz="1300" b="0" i="0">
-                          <a:solidFill>
-                            <a:srgbClr val="232323"/>
-                          </a:solidFill>
-                          <a:latin typeface="Calibri"/>
-                        </a:rPr>
-                        <a:t>Confirm plan recorded; preview tomorrow's guided open lab</a:t>
-                      </a:r>
-                    </a:p>
-                  </a:txBody>
-                  <a:tcPr anchor="ctr" marT="38100" marB="38100">
-                    <a:solidFill>
-                      <a:srgbClr val="F5F5F5"/>
-                    </a:solidFill>
-                  </a:tcPr>
-                </a:tc>
+                <a:extLst>
+                  <a:ext uri="{0D108BD9-81ED-4DB2-BD59-A6C34878D82A}">
+                    <a16:rowId xmlns:a16="http://schemas.microsoft.com/office/drawing/2014/main" val="10006"/>
+                  </a:ext>
+                </a:extLst>
               </a:tr>
             </a:tbl>
           </a:graphicData>
@@ -4869,7 +4813,7 @@
 </file>
 
 <file path=ppt/slides/slide13.xml><?xml version="1.0" encoding="utf-8"?>
-<p:sld xmlns:a="http://schemas.openxmlformats.org/drawingml/2006/main" xmlns:p="http://schemas.openxmlformats.org/presentationml/2006/main" xmlns:r="http://schemas.openxmlformats.org/officeDocument/2006/relationships">
+<p:sld xmlns:a="http://schemas.openxmlformats.org/drawingml/2006/main" xmlns:r="http://schemas.openxmlformats.org/officeDocument/2006/relationships" xmlns:p="http://schemas.openxmlformats.org/presentationml/2006/main">
   <p:cSld>
     <p:spTree>
       <p:nvGrpSpPr>
@@ -4877,7 +4821,14 @@
         <p:cNvGrpSpPr/>
         <p:nvPr/>
       </p:nvGrpSpPr>
-      <p:grpSpPr/>
+      <p:grpSpPr>
+        <a:xfrm>
+          <a:off x="0" y="0"/>
+          <a:ext cx="0" cy="0"/>
+          <a:chOff x="0" y="0"/>
+          <a:chExt cx="0" cy="0"/>
+        </a:xfrm>
+      </p:grpSpPr>
       <p:sp>
         <p:nvSpPr>
           <p:cNvPr id="2" name="Rectangle 1"/>
@@ -4919,6 +4870,7 @@
           <a:lstStyle/>
           <a:p>
             <a:pPr algn="ctr"/>
+            <a:endParaRPr/>
           </a:p>
         </p:txBody>
       </p:sp>
@@ -4963,6 +4915,7 @@
           <a:lstStyle/>
           <a:p>
             <a:pPr algn="ctr"/>
+            <a:endParaRPr/>
           </a:p>
         </p:txBody>
       </p:sp>
@@ -5000,7 +4953,7 @@
                 </a:solidFill>
                 <a:latin typeface="Calibri"/>
               </a:rPr>
-              <a:t>BLOCK 1 · READ THIS FIRST</a:t>
+              <a:t>BLOCK 1 · 20 MIN · READ THIS FIRST</a:t>
             </a:r>
           </a:p>
           <a:p>
@@ -5081,6 +5034,7 @@
           <a:lstStyle/>
           <a:p>
             <a:pPr algn="ctr"/>
+            <a:endParaRPr/>
           </a:p>
         </p:txBody>
       </p:sp>
@@ -5192,7 +5146,7 @@
           </a:fontRef>
         </p:style>
         <p:txBody>
-          <a:bodyPr rtlCol="0" anchor="ctr" wrap="square" lIns="228600" rIns="228600"/>
+          <a:bodyPr wrap="square" lIns="228600" rIns="228600" rtlCol="0" anchor="ctr"/>
           <a:lstStyle/>
           <a:p>
             <a:pPr algn="ctr"/>
@@ -5203,7 +5157,7 @@
                 </a:solidFill>
                 <a:latin typeface="Calibri"/>
               </a:rPr>
-              <a:t>Today's numbers come from a separate illustrative toy model, not from DGE-METRIC.</a:t>
+              <a:t>This afternoon uses the ToyModelSOEMC_run.m model, not DGE-METRIC.</a:t>
             </a:r>
           </a:p>
         </p:txBody>
@@ -5236,13 +5190,13 @@
               </a:spcAft>
             </a:pPr>
             <a:r>
-              <a:rPr sz="1700" b="0" i="0">
+              <a:rPr sz="1700" b="0" i="0" dirty="0">
                 <a:solidFill>
                   <a:srgbClr val="232323"/>
                 </a:solidFill>
                 <a:latin typeface="Calibri"/>
               </a:rPr>
-              <a:t>•  DGE-METRIC's own reserve-requirement analysis has not yet been built</a:t>
+              <a:t>•  The outputs shown here are model results from the toy model and are used as training examples</a:t>
             </a:r>
           </a:p>
           <a:p>
@@ -5252,13 +5206,13 @@
               </a:spcAft>
             </a:pPr>
             <a:r>
-              <a:rPr sz="1700" b="0" i="0">
+              <a:rPr sz="1700" b="0" i="0" dirty="0">
                 <a:solidFill>
                   <a:srgbClr val="232323"/>
                 </a:solidFill>
                 <a:latin typeface="Calibri"/>
               </a:rPr>
-              <a:t>•  The formula, target indicator, and optimality criterion for DGE-METRIC specifically are still [SME REVIEW NEEDED]</a:t>
+              <a:t>•  The run will compare crisis-response policies, growth adequacy, coal transition scenarios, and the joint policy optimum</a:t>
             </a:r>
           </a:p>
           <a:p>
@@ -5268,13 +5222,13 @@
               </a:spcAft>
             </a:pPr>
             <a:r>
-              <a:rPr sz="1700" b="0" i="0">
+              <a:rPr sz="1700" b="0" i="0" dirty="0">
                 <a:solidFill>
                   <a:srgbClr val="232323"/>
                 </a:solidFill>
                 <a:latin typeface="Calibri"/>
               </a:rPr>
-              <a:t>•  Everything today illustrates the METHOD using a stylized small-open-economy model — treat it as training-stage, not as a Vietnam policy answer</a:t>
+              <a:t>•  Do not read any toy-model number as a DGE-METRIC output or a final Vietnam policy recommendation</a:t>
             </a:r>
           </a:p>
         </p:txBody>
@@ -5288,7 +5242,7 @@
 </file>
 
 <file path=ppt/slides/slide14.xml><?xml version="1.0" encoding="utf-8"?>
-<p:sld xmlns:a="http://schemas.openxmlformats.org/drawingml/2006/main" xmlns:p="http://schemas.openxmlformats.org/presentationml/2006/main" xmlns:r="http://schemas.openxmlformats.org/officeDocument/2006/relationships">
+<p:sld xmlns:a="http://schemas.openxmlformats.org/drawingml/2006/main" xmlns:r="http://schemas.openxmlformats.org/officeDocument/2006/relationships" xmlns:p="http://schemas.openxmlformats.org/presentationml/2006/main">
   <p:cSld>
     <p:spTree>
       <p:nvGrpSpPr>
@@ -5296,7 +5250,14 @@
         <p:cNvGrpSpPr/>
         <p:nvPr/>
       </p:nvGrpSpPr>
-      <p:grpSpPr/>
+      <p:grpSpPr>
+        <a:xfrm>
+          <a:off x="0" y="0"/>
+          <a:ext cx="0" cy="0"/>
+          <a:chOff x="0" y="0"/>
+          <a:chExt cx="0" cy="0"/>
+        </a:xfrm>
+      </p:grpSpPr>
       <p:sp>
         <p:nvSpPr>
           <p:cNvPr id="2" name="Rectangle 1"/>
@@ -5338,6 +5299,7 @@
           <a:lstStyle/>
           <a:p>
             <a:pPr algn="ctr"/>
+            <a:endParaRPr/>
           </a:p>
         </p:txBody>
       </p:sp>
@@ -5382,6 +5344,7 @@
           <a:lstStyle/>
           <a:p>
             <a:pPr algn="ctr"/>
+            <a:endParaRPr/>
           </a:p>
         </p:txBody>
       </p:sp>
@@ -5393,8 +5356,8 @@
         </p:nvSpPr>
         <p:spPr>
           <a:xfrm>
-            <a:off x="502920" y="91440"/>
-            <a:ext cx="8778240" cy="1097280"/>
+            <a:off x="502920" y="234841"/>
+            <a:ext cx="8778240" cy="810478"/>
           </a:xfrm>
           <a:prstGeom prst="rect">
             <a:avLst/>
@@ -5413,24 +5376,24 @@
               </a:spcAft>
             </a:pPr>
             <a:r>
-              <a:rPr sz="1100" b="1" i="0">
+              <a:rPr sz="1100" b="1" i="0" dirty="0">
                 <a:solidFill>
                   <a:srgbClr val="FFD2D2"/>
                 </a:solidFill>
                 <a:latin typeface="Calibri"/>
               </a:rPr>
-              <a:t>BLOCKS 1–2 · 30 MIN</a:t>
-            </a:r>
-          </a:p>
-          <a:p>
-            <a:r>
-              <a:rPr sz="2400" b="1" i="0">
+              <a:t>BLOCK 1 · 20 MIN</a:t>
+            </a:r>
+          </a:p>
+          <a:p>
+            <a:r>
+              <a:rPr sz="2400" b="1" i="0" dirty="0">
                 <a:solidFill>
                   <a:srgbClr val="FFFFFF"/>
                 </a:solidFill>
                 <a:latin typeface="Calibri"/>
               </a:rPr>
-              <a:t>The Policy Question &amp; Inputs Needed</a:t>
+              <a:t>Toy Model</a:t>
             </a:r>
           </a:p>
         </p:txBody>
@@ -5500,6 +5463,7 @@
           <a:lstStyle/>
           <a:p>
             <a:pPr algn="ctr"/>
+            <a:endParaRPr/>
           </a:p>
         </p:txBody>
       </p:sp>
@@ -5572,109 +5536,1485 @@
           </a:p>
         </p:txBody>
       </p:sp>
-      <p:sp>
-        <p:nvSpPr>
-          <p:cNvPr id="9" name="TextBox 8"/>
-          <p:cNvSpPr txBox="1"/>
-          <p:nvPr/>
-        </p:nvSpPr>
-        <p:spPr>
-          <a:xfrm>
-            <a:off x="502920" y="1554480"/>
-            <a:ext cx="11185855" cy="4892040"/>
-          </a:xfrm>
-          <a:prstGeom prst="rect">
-            <a:avLst/>
-          </a:prstGeom>
-          <a:noFill/>
-        </p:spPr>
-        <p:txBody>
-          <a:bodyPr wrap="square">
-            <a:spAutoFit/>
-          </a:bodyPr>
-          <a:lstStyle/>
-          <a:p>
-            <a:pPr marL="0" indent="0">
-              <a:spcAft>
-                <a:spcPts val="1000"/>
-              </a:spcAft>
-            </a:pPr>
-            <a:r>
-              <a:rPr sz="1700" b="0" i="0">
-                <a:solidFill>
-                  <a:srgbClr val="232323"/>
-                </a:solidFill>
-                <a:latin typeface="Calibri"/>
-              </a:rPr>
-              <a:t>•  A strategic reserve requirement: a target level of stockpiled/standby capacity held to buffer a supply disruption</a:t>
-            </a:r>
-          </a:p>
-          <a:p>
-            <a:pPr marL="0" indent="0">
-              <a:spcAft>
-                <a:spcPts val="1000"/>
-              </a:spcAft>
-            </a:pPr>
-            <a:r>
-              <a:rPr sz="1700" b="1" i="0">
-                <a:solidFill>
-                  <a:srgbClr val="232323"/>
-                </a:solidFill>
-                <a:latin typeface="Calibri"/>
-              </a:rPr>
-              <a:t>•  "Optimal" means MC = MB: marginal cost of one more unit of coverage equals the marginal benefit (avoided crisis losses)</a:t>
-            </a:r>
-          </a:p>
-          <a:p>
-            <a:pPr marL="0" indent="0">
-              <a:spcAft>
-                <a:spcPts val="1000"/>
-              </a:spcAft>
-            </a:pPr>
-            <a:r>
-              <a:rPr sz="1700" b="1" i="0">
-                <a:solidFill>
-                  <a:srgbClr val="232323"/>
-                </a:solidFill>
-                <a:latin typeface="Calibri"/>
-              </a:rPr>
-              <a:t>•  Inputs needed from Days 1–2:</a:t>
-            </a:r>
-          </a:p>
-          <a:p>
-            <a:pPr marL="320040" indent="0">
-              <a:spcAft>
-                <a:spcPts val="600"/>
-              </a:spcAft>
-            </a:pPr>
-            <a:r>
-              <a:rPr sz="1500" b="0" i="0">
-                <a:solidFill>
-                  <a:srgbClr val="232323"/>
-                </a:solidFill>
-                <a:latin typeface="Calibri"/>
-              </a:rPr>
-              <a:t>–  Energy-carrier demand and import dependence under the efficiency scenario vs. PDP8 baseline</a:t>
-            </a:r>
-          </a:p>
-          <a:p>
-            <a:pPr marL="320040" indent="0">
-              <a:spcAft>
-                <a:spcPts val="600"/>
-              </a:spcAft>
-            </a:pPr>
-            <a:r>
-              <a:rPr sz="1500" b="0" i="0">
-                <a:solidFill>
-                  <a:srgbClr val="232323"/>
-                </a:solidFill>
-                <a:latin typeface="Calibri"/>
-              </a:rPr>
-              <a:t>–  GDP, investment, and fiscal paths under the finance scenarios</a:t>
-            </a:r>
-          </a:p>
-        </p:txBody>
-      </p:sp>
+      <mc:AlternateContent xmlns:mc="http://schemas.openxmlformats.org/markup-compatibility/2006">
+        <mc:Choice xmlns:a14="http://schemas.microsoft.com/office/drawing/2010/main" Requires="a14">
+          <p:sp>
+            <p:nvSpPr>
+              <p:cNvPr id="9" name="TextBox 8"/>
+              <p:cNvSpPr txBox="1"/>
+              <p:nvPr/>
+            </p:nvSpPr>
+            <p:spPr>
+              <a:xfrm>
+                <a:off x="502920" y="1554480"/>
+                <a:ext cx="11185855" cy="3587521"/>
+              </a:xfrm>
+              <a:prstGeom prst="rect">
+                <a:avLst/>
+              </a:prstGeom>
+              <a:noFill/>
+            </p:spPr>
+            <p:txBody>
+              <a:bodyPr wrap="square">
+                <a:spAutoFit/>
+              </a:bodyPr>
+              <a:lstStyle/>
+              <a:p>
+                <a:pPr marL="0" indent="0">
+                  <a:spcAft>
+                    <a:spcPts val="1000"/>
+                  </a:spcAft>
+                </a:pPr>
+                <a:r>
+                  <a:rPr lang="en-US" sz="1700" b="0" i="0" dirty="0">
+                    <a:solidFill>
+                      <a:srgbClr val="232323"/>
+                    </a:solidFill>
+                    <a:latin typeface="Calibri"/>
+                  </a:rPr>
+                  <a:t>•  The model is a multi-commodity small-open economy with installed capacity and strategic reserves</a:t>
+                </a:r>
+              </a:p>
+              <a:p>
+                <a:pPr>
+                  <a:spcAft>
+                    <a:spcPts val="1000"/>
+                  </a:spcAft>
+                </a:pPr>
+                <a:r>
+                  <a:rPr lang="en-US" sz="1700" b="0" i="0" dirty="0">
+                    <a:solidFill>
+                      <a:srgbClr val="232323"/>
+                    </a:solidFill>
+                    <a:latin typeface="Calibri"/>
+                  </a:rPr>
+                  <a:t>•  Key policy levers: </a:t>
+                </a:r>
+                <a14:m>
+                  <m:oMath xmlns:m="http://schemas.openxmlformats.org/officeDocument/2006/math">
+                    <m:sSub>
+                      <m:sSubPr>
+                        <m:ctrlPr>
+                          <a:rPr lang="en-US" sz="1700" b="0" i="1" smtClean="0">
+                            <a:solidFill>
+                              <a:srgbClr val="232323"/>
+                            </a:solidFill>
+                            <a:latin typeface="Cambria Math" panose="02040503050406030204" pitchFamily="18" charset="0"/>
+                          </a:rPr>
+                        </m:ctrlPr>
+                      </m:sSubPr>
+                      <m:e>
+                        <m:r>
+                          <a:rPr lang="en-US" sz="1700" b="0" i="1" smtClean="0">
+                            <a:solidFill>
+                              <a:srgbClr val="232323"/>
+                            </a:solidFill>
+                            <a:latin typeface="Cambria Math" panose="02040503050406030204" pitchFamily="18" charset="0"/>
+                          </a:rPr>
+                          <m:t>𝜙</m:t>
+                        </m:r>
+                      </m:e>
+                      <m:sub>
+                        <m:r>
+                          <a:rPr lang="en-US" sz="1700" b="0" i="1" smtClean="0">
+                            <a:solidFill>
+                              <a:srgbClr val="232323"/>
+                            </a:solidFill>
+                            <a:latin typeface="Cambria Math" panose="02040503050406030204" pitchFamily="18" charset="0"/>
+                          </a:rPr>
+                          <m:t>𝑅</m:t>
+                        </m:r>
+                      </m:sub>
+                    </m:sSub>
+                  </m:oMath>
+                </a14:m>
+                <a:r>
+                  <a:rPr lang="en-US" sz="1700" b="0" i="0" dirty="0">
+                    <a:solidFill>
+                      <a:srgbClr val="232323"/>
+                    </a:solidFill>
+                    <a:latin typeface="Calibri"/>
+                  </a:rPr>
+                  <a:t> (drawdown response), </a:t>
+                </a:r>
+                <a14:m>
+                  <m:oMath xmlns:m="http://schemas.openxmlformats.org/officeDocument/2006/math">
+                    <m:sSub>
+                      <m:sSubPr>
+                        <m:ctrlPr>
+                          <a:rPr lang="en-US" sz="1700" i="1">
+                            <a:solidFill>
+                              <a:srgbClr val="232323"/>
+                            </a:solidFill>
+                            <a:latin typeface="Cambria Math" panose="02040503050406030204" pitchFamily="18" charset="0"/>
+                          </a:rPr>
+                        </m:ctrlPr>
+                      </m:sSubPr>
+                      <m:e>
+                        <m:r>
+                          <a:rPr lang="en-US" sz="1700" i="1">
+                            <a:solidFill>
+                              <a:srgbClr val="232323"/>
+                            </a:solidFill>
+                            <a:latin typeface="Cambria Math" panose="02040503050406030204" pitchFamily="18" charset="0"/>
+                          </a:rPr>
+                          <m:t>𝜙</m:t>
+                        </m:r>
+                      </m:e>
+                      <m:sub>
+                        <m:r>
+                          <a:rPr lang="en-US" sz="1700" b="0" i="1" smtClean="0">
+                            <a:solidFill>
+                              <a:srgbClr val="232323"/>
+                            </a:solidFill>
+                            <a:latin typeface="Cambria Math" panose="02040503050406030204" pitchFamily="18" charset="0"/>
+                          </a:rPr>
+                          <m:t>𝐼𝑄</m:t>
+                        </m:r>
+                      </m:sub>
+                    </m:sSub>
+                    <m:r>
+                      <a:rPr lang="en-US" sz="1700" i="1">
+                        <a:solidFill>
+                          <a:srgbClr val="232323"/>
+                        </a:solidFill>
+                        <a:latin typeface="Cambria Math" panose="02040503050406030204" pitchFamily="18" charset="0"/>
+                      </a:rPr>
+                      <m:t> </m:t>
+                    </m:r>
+                  </m:oMath>
+                </a14:m>
+                <a:r>
+                  <a:rPr lang="en-US" sz="1700" b="0" i="0" dirty="0">
+                    <a:solidFill>
+                      <a:srgbClr val="232323"/>
+                    </a:solidFill>
+                    <a:latin typeface="Calibri"/>
+                  </a:rPr>
+                  <a:t>(capacity/investment policy), and </a:t>
+                </a:r>
+                <a14:m>
+                  <m:oMath xmlns:m="http://schemas.openxmlformats.org/officeDocument/2006/math">
+                    <m:r>
+                      <a:rPr lang="en-US" sz="1700" b="0" i="1" smtClean="0">
+                        <a:solidFill>
+                          <a:srgbClr val="232323"/>
+                        </a:solidFill>
+                        <a:latin typeface="Cambria Math" panose="02040503050406030204" pitchFamily="18" charset="0"/>
+                      </a:rPr>
+                      <m:t>𝑑</m:t>
+                    </m:r>
+                  </m:oMath>
+                </a14:m>
+                <a:r>
+                  <a:rPr lang="en-US" sz="1700" b="0" i="0" dirty="0">
+                    <a:solidFill>
+                      <a:srgbClr val="232323"/>
+                    </a:solidFill>
+                    <a:latin typeface="Calibri"/>
+                  </a:rPr>
+                  <a:t>(reserve size / coverage)</a:t>
+                </a:r>
+              </a:p>
+              <a:p>
+                <a:pPr>
+                  <a:spcAft>
+                    <a:spcPts val="1000"/>
+                  </a:spcAft>
+                </a:pPr>
+                <a14:m>
+                  <m:oMathPara xmlns:m="http://schemas.openxmlformats.org/officeDocument/2006/math">
+                    <m:oMathParaPr>
+                      <m:jc m:val="centerGroup"/>
+                    </m:oMathParaPr>
+                    <m:oMath xmlns:m="http://schemas.openxmlformats.org/officeDocument/2006/math">
+                      <m:sSub>
+                        <m:sSubPr>
+                          <m:ctrlPr>
+                            <a:rPr lang="en-US" sz="1700" b="0" i="1" smtClean="0">
+                              <a:solidFill>
+                                <a:srgbClr val="232323"/>
+                              </a:solidFill>
+                              <a:latin typeface="Cambria Math" panose="02040503050406030204" pitchFamily="18" charset="0"/>
+                            </a:rPr>
+                          </m:ctrlPr>
+                        </m:sSubPr>
+                        <m:e>
+                          <m:r>
+                            <a:rPr lang="en-US" sz="1700" b="0" i="1" smtClean="0">
+                              <a:solidFill>
+                                <a:srgbClr val="232323"/>
+                              </a:solidFill>
+                              <a:latin typeface="Cambria Math" panose="02040503050406030204" pitchFamily="18" charset="0"/>
+                            </a:rPr>
+                            <m:t>𝑅</m:t>
+                          </m:r>
+                        </m:e>
+                        <m:sub>
+                          <m:r>
+                            <a:rPr lang="en-US" sz="1700" b="0" i="1" smtClean="0">
+                              <a:solidFill>
+                                <a:srgbClr val="232323"/>
+                              </a:solidFill>
+                              <a:latin typeface="Cambria Math" panose="02040503050406030204" pitchFamily="18" charset="0"/>
+                            </a:rPr>
+                            <m:t>𝑐</m:t>
+                          </m:r>
+                          <m:r>
+                            <a:rPr lang="en-US" sz="1700" b="0" i="1" smtClean="0">
+                              <a:solidFill>
+                                <a:srgbClr val="232323"/>
+                              </a:solidFill>
+                              <a:latin typeface="Cambria Math" panose="02040503050406030204" pitchFamily="18" charset="0"/>
+                            </a:rPr>
+                            <m:t>,</m:t>
+                          </m:r>
+                          <m:r>
+                            <a:rPr lang="en-US" sz="1700" b="0" i="1" smtClean="0">
+                              <a:solidFill>
+                                <a:srgbClr val="232323"/>
+                              </a:solidFill>
+                              <a:latin typeface="Cambria Math" panose="02040503050406030204" pitchFamily="18" charset="0"/>
+                            </a:rPr>
+                            <m:t>𝑡</m:t>
+                          </m:r>
+                        </m:sub>
+                      </m:sSub>
+                      <m:r>
+                        <a:rPr lang="en-US" sz="1700" b="0" i="1" smtClean="0">
+                          <a:solidFill>
+                            <a:srgbClr val="232323"/>
+                          </a:solidFill>
+                          <a:latin typeface="Cambria Math" panose="02040503050406030204" pitchFamily="18" charset="0"/>
+                        </a:rPr>
+                        <m:t>=</m:t>
+                      </m:r>
+                      <m:d>
+                        <m:dPr>
+                          <m:ctrlPr>
+                            <a:rPr lang="en-US" sz="1700" b="0" i="1" smtClean="0">
+                              <a:solidFill>
+                                <a:srgbClr val="232323"/>
+                              </a:solidFill>
+                              <a:latin typeface="Cambria Math" panose="02040503050406030204" pitchFamily="18" charset="0"/>
+                            </a:rPr>
+                          </m:ctrlPr>
+                        </m:dPr>
+                        <m:e>
+                          <m:r>
+                            <a:rPr lang="en-US" sz="1700" b="0" i="1" smtClean="0">
+                              <a:solidFill>
+                                <a:srgbClr val="232323"/>
+                              </a:solidFill>
+                              <a:latin typeface="Cambria Math" panose="02040503050406030204" pitchFamily="18" charset="0"/>
+                            </a:rPr>
+                            <m:t>1−</m:t>
+                          </m:r>
+                          <m:sSub>
+                            <m:sSubPr>
+                              <m:ctrlPr>
+                                <a:rPr lang="en-US" sz="1700" b="0" i="1" smtClean="0">
+                                  <a:solidFill>
+                                    <a:srgbClr val="232323"/>
+                                  </a:solidFill>
+                                  <a:latin typeface="Cambria Math" panose="02040503050406030204" pitchFamily="18" charset="0"/>
+                                </a:rPr>
+                              </m:ctrlPr>
+                            </m:sSubPr>
+                            <m:e>
+                              <m:r>
+                                <a:rPr lang="en-US" sz="1700" b="0" i="1" smtClean="0">
+                                  <a:solidFill>
+                                    <a:srgbClr val="232323"/>
+                                  </a:solidFill>
+                                  <a:latin typeface="Cambria Math" panose="02040503050406030204" pitchFamily="18" charset="0"/>
+                                </a:rPr>
+                                <m:t>𝛿</m:t>
+                              </m:r>
+                            </m:e>
+                            <m:sub>
+                              <m:r>
+                                <a:rPr lang="en-US" sz="1700" b="0" i="1" smtClean="0">
+                                  <a:solidFill>
+                                    <a:srgbClr val="232323"/>
+                                  </a:solidFill>
+                                  <a:latin typeface="Cambria Math" panose="02040503050406030204" pitchFamily="18" charset="0"/>
+                                </a:rPr>
+                                <m:t>𝑅</m:t>
+                              </m:r>
+                            </m:sub>
+                          </m:sSub>
+                        </m:e>
+                      </m:d>
+                      <m:sSub>
+                        <m:sSubPr>
+                          <m:ctrlPr>
+                            <a:rPr lang="en-US" sz="1700" b="0" i="1" smtClean="0">
+                              <a:solidFill>
+                                <a:srgbClr val="232323"/>
+                              </a:solidFill>
+                              <a:latin typeface="Cambria Math" panose="02040503050406030204" pitchFamily="18" charset="0"/>
+                            </a:rPr>
+                          </m:ctrlPr>
+                        </m:sSubPr>
+                        <m:e>
+                          <m:r>
+                            <a:rPr lang="en-US" sz="1700" b="0" i="1" smtClean="0">
+                              <a:solidFill>
+                                <a:srgbClr val="232323"/>
+                              </a:solidFill>
+                              <a:latin typeface="Cambria Math" panose="02040503050406030204" pitchFamily="18" charset="0"/>
+                            </a:rPr>
+                            <m:t>𝑅</m:t>
+                          </m:r>
+                        </m:e>
+                        <m:sub>
+                          <m:r>
+                            <a:rPr lang="en-US" sz="1700" b="0" i="1" smtClean="0">
+                              <a:solidFill>
+                                <a:srgbClr val="232323"/>
+                              </a:solidFill>
+                              <a:latin typeface="Cambria Math" panose="02040503050406030204" pitchFamily="18" charset="0"/>
+                            </a:rPr>
+                            <m:t>𝑐</m:t>
+                          </m:r>
+                          <m:r>
+                            <a:rPr lang="en-US" sz="1700" b="0" i="1" smtClean="0">
+                              <a:solidFill>
+                                <a:srgbClr val="232323"/>
+                              </a:solidFill>
+                              <a:latin typeface="Cambria Math" panose="02040503050406030204" pitchFamily="18" charset="0"/>
+                            </a:rPr>
+                            <m:t>,</m:t>
+                          </m:r>
+                          <m:r>
+                            <a:rPr lang="en-US" sz="1700" b="0" i="1" smtClean="0">
+                              <a:solidFill>
+                                <a:srgbClr val="232323"/>
+                              </a:solidFill>
+                              <a:latin typeface="Cambria Math" panose="02040503050406030204" pitchFamily="18" charset="0"/>
+                            </a:rPr>
+                            <m:t>𝑡</m:t>
+                          </m:r>
+                          <m:r>
+                            <a:rPr lang="en-US" sz="1700" b="0" i="1" smtClean="0">
+                              <a:solidFill>
+                                <a:srgbClr val="232323"/>
+                              </a:solidFill>
+                              <a:latin typeface="Cambria Math" panose="02040503050406030204" pitchFamily="18" charset="0"/>
+                            </a:rPr>
+                            <m:t>−1</m:t>
+                          </m:r>
+                        </m:sub>
+                      </m:sSub>
+                      <m:r>
+                        <a:rPr lang="en-US" sz="1700" b="0" i="1" smtClean="0">
+                          <a:solidFill>
+                            <a:srgbClr val="232323"/>
+                          </a:solidFill>
+                          <a:latin typeface="Cambria Math" panose="02040503050406030204" pitchFamily="18" charset="0"/>
+                        </a:rPr>
+                        <m:t>−</m:t>
+                      </m:r>
+                      <m:sSub>
+                        <m:sSubPr>
+                          <m:ctrlPr>
+                            <a:rPr lang="en-US" sz="1700" b="0" i="1" smtClean="0">
+                              <a:solidFill>
+                                <a:srgbClr val="232323"/>
+                              </a:solidFill>
+                              <a:latin typeface="Cambria Math" panose="02040503050406030204" pitchFamily="18" charset="0"/>
+                            </a:rPr>
+                          </m:ctrlPr>
+                        </m:sSubPr>
+                        <m:e>
+                          <m:r>
+                            <a:rPr lang="en-US" sz="1700" b="0" i="1" smtClean="0">
+                              <a:solidFill>
+                                <a:srgbClr val="232323"/>
+                              </a:solidFill>
+                              <a:latin typeface="Cambria Math" panose="02040503050406030204" pitchFamily="18" charset="0"/>
+                            </a:rPr>
+                            <m:t>𝑅</m:t>
+                          </m:r>
+                        </m:e>
+                        <m:sub>
+                          <m:r>
+                            <a:rPr lang="en-US" sz="1700" b="0" i="1" smtClean="0">
+                              <a:solidFill>
+                                <a:srgbClr val="232323"/>
+                              </a:solidFill>
+                              <a:latin typeface="Cambria Math" panose="02040503050406030204" pitchFamily="18" charset="0"/>
+                            </a:rPr>
+                            <m:t>𝑐</m:t>
+                          </m:r>
+                          <m:r>
+                            <a:rPr lang="en-US" sz="1700" b="0" i="1" smtClean="0">
+                              <a:solidFill>
+                                <a:srgbClr val="232323"/>
+                              </a:solidFill>
+                              <a:latin typeface="Cambria Math" panose="02040503050406030204" pitchFamily="18" charset="0"/>
+                            </a:rPr>
+                            <m:t>,</m:t>
+                          </m:r>
+                          <m:r>
+                            <a:rPr lang="en-US" sz="1700" b="0" i="1" smtClean="0">
+                              <a:solidFill>
+                                <a:srgbClr val="232323"/>
+                              </a:solidFill>
+                              <a:latin typeface="Cambria Math" panose="02040503050406030204" pitchFamily="18" charset="0"/>
+                            </a:rPr>
+                            <m:t>𝑑𝑟𝑎𝑤</m:t>
+                          </m:r>
+                          <m:r>
+                            <a:rPr lang="en-US" sz="1700" b="0" i="1" smtClean="0">
+                              <a:solidFill>
+                                <a:srgbClr val="232323"/>
+                              </a:solidFill>
+                              <a:latin typeface="Cambria Math" panose="02040503050406030204" pitchFamily="18" charset="0"/>
+                            </a:rPr>
+                            <m:t>,</m:t>
+                          </m:r>
+                          <m:r>
+                            <a:rPr lang="en-US" sz="1700" b="0" i="1" smtClean="0">
+                              <a:solidFill>
+                                <a:srgbClr val="232323"/>
+                              </a:solidFill>
+                              <a:latin typeface="Cambria Math" panose="02040503050406030204" pitchFamily="18" charset="0"/>
+                            </a:rPr>
+                            <m:t>𝑡</m:t>
+                          </m:r>
+                        </m:sub>
+                      </m:sSub>
+                      <m:r>
+                        <a:rPr lang="en-US" sz="1700" b="0" i="1" smtClean="0">
+                          <a:solidFill>
+                            <a:srgbClr val="232323"/>
+                          </a:solidFill>
+                          <a:latin typeface="Cambria Math" panose="02040503050406030204" pitchFamily="18" charset="0"/>
+                        </a:rPr>
+                        <m:t>+</m:t>
+                      </m:r>
+                      <m:sSub>
+                        <m:sSubPr>
+                          <m:ctrlPr>
+                            <a:rPr lang="en-US" sz="1700" i="1">
+                              <a:solidFill>
+                                <a:srgbClr val="232323"/>
+                              </a:solidFill>
+                              <a:latin typeface="Cambria Math" panose="02040503050406030204" pitchFamily="18" charset="0"/>
+                            </a:rPr>
+                          </m:ctrlPr>
+                        </m:sSubPr>
+                        <m:e>
+                          <m:r>
+                            <a:rPr lang="en-US" sz="1700" i="1">
+                              <a:solidFill>
+                                <a:srgbClr val="232323"/>
+                              </a:solidFill>
+                              <a:latin typeface="Cambria Math" panose="02040503050406030204" pitchFamily="18" charset="0"/>
+                            </a:rPr>
+                            <m:t>𝛿</m:t>
+                          </m:r>
+                        </m:e>
+                        <m:sub>
+                          <m:r>
+                            <a:rPr lang="en-US" sz="1700" i="1">
+                              <a:solidFill>
+                                <a:srgbClr val="232323"/>
+                              </a:solidFill>
+                              <a:latin typeface="Cambria Math" panose="02040503050406030204" pitchFamily="18" charset="0"/>
+                            </a:rPr>
+                            <m:t>𝑅</m:t>
+                          </m:r>
+                        </m:sub>
+                      </m:sSub>
+                      <m:r>
+                        <a:rPr lang="en-US" sz="1700" b="0" i="1" smtClean="0">
+                          <a:solidFill>
+                            <a:srgbClr val="232323"/>
+                          </a:solidFill>
+                          <a:latin typeface="Cambria Math" panose="02040503050406030204" pitchFamily="18" charset="0"/>
+                        </a:rPr>
+                        <m:t> </m:t>
+                      </m:r>
+                      <m:sSub>
+                        <m:sSubPr>
+                          <m:ctrlPr>
+                            <a:rPr lang="en-US" sz="1700" b="0" i="1" smtClean="0">
+                              <a:solidFill>
+                                <a:srgbClr val="232323"/>
+                              </a:solidFill>
+                              <a:latin typeface="Cambria Math" panose="02040503050406030204" pitchFamily="18" charset="0"/>
+                            </a:rPr>
+                          </m:ctrlPr>
+                        </m:sSubPr>
+                        <m:e>
+                          <m:acc>
+                            <m:accPr>
+                              <m:chr m:val="̅"/>
+                              <m:ctrlPr>
+                                <a:rPr lang="en-US" sz="1700" b="0" i="1" dirty="0" smtClean="0">
+                                  <a:solidFill>
+                                    <a:srgbClr val="232323"/>
+                                  </a:solidFill>
+                                  <a:latin typeface="Cambria Math" panose="02040503050406030204" pitchFamily="18" charset="0"/>
+                                </a:rPr>
+                              </m:ctrlPr>
+                            </m:accPr>
+                            <m:e>
+                              <m:r>
+                                <a:rPr lang="en-US" sz="1700" i="1">
+                                  <a:solidFill>
+                                    <a:srgbClr val="232323"/>
+                                  </a:solidFill>
+                                  <a:latin typeface="Cambria Math" panose="02040503050406030204" pitchFamily="18" charset="0"/>
+                                </a:rPr>
+                                <m:t>𝑅</m:t>
+                              </m:r>
+                            </m:e>
+                          </m:acc>
+                        </m:e>
+                        <m:sub>
+                          <m:r>
+                            <a:rPr lang="en-US" sz="1700" b="0" i="1" smtClean="0">
+                              <a:solidFill>
+                                <a:srgbClr val="232323"/>
+                              </a:solidFill>
+                              <a:latin typeface="Cambria Math" panose="02040503050406030204" pitchFamily="18" charset="0"/>
+                            </a:rPr>
+                            <m:t>𝑐</m:t>
+                          </m:r>
+                          <m:r>
+                            <a:rPr lang="en-US" sz="1700" b="0" i="1" smtClean="0">
+                              <a:solidFill>
+                                <a:srgbClr val="232323"/>
+                              </a:solidFill>
+                              <a:latin typeface="Cambria Math" panose="02040503050406030204" pitchFamily="18" charset="0"/>
+                            </a:rPr>
+                            <m:t>,</m:t>
+                          </m:r>
+                          <m:r>
+                            <a:rPr lang="en-US" sz="1700" b="0" i="1" smtClean="0">
+                              <a:solidFill>
+                                <a:srgbClr val="232323"/>
+                              </a:solidFill>
+                              <a:latin typeface="Cambria Math" panose="02040503050406030204" pitchFamily="18" charset="0"/>
+                            </a:rPr>
+                            <m:t>𝑡</m:t>
+                          </m:r>
+                        </m:sub>
+                      </m:sSub>
+                      <m:r>
+                        <a:rPr lang="en-US" sz="1700" b="0" i="1" smtClean="0">
+                          <a:solidFill>
+                            <a:srgbClr val="232323"/>
+                          </a:solidFill>
+                          <a:latin typeface="Cambria Math" panose="02040503050406030204" pitchFamily="18" charset="0"/>
+                        </a:rPr>
+                        <m:t>+</m:t>
+                      </m:r>
+                      <m:sSub>
+                        <m:sSubPr>
+                          <m:ctrlPr>
+                            <a:rPr lang="en-US" sz="1700" b="0" i="1" smtClean="0">
+                              <a:solidFill>
+                                <a:srgbClr val="232323"/>
+                              </a:solidFill>
+                              <a:latin typeface="Cambria Math" panose="02040503050406030204" pitchFamily="18" charset="0"/>
+                            </a:rPr>
+                          </m:ctrlPr>
+                        </m:sSubPr>
+                        <m:e>
+                          <m:r>
+                            <a:rPr lang="en-US" sz="1700" b="0" i="1" smtClean="0">
+                              <a:solidFill>
+                                <a:srgbClr val="232323"/>
+                              </a:solidFill>
+                              <a:latin typeface="Cambria Math" panose="02040503050406030204" pitchFamily="18" charset="0"/>
+                            </a:rPr>
+                            <m:t>𝛾</m:t>
+                          </m:r>
+                        </m:e>
+                        <m:sub>
+                          <m:r>
+                            <a:rPr lang="en-US" sz="1700" b="0" i="1" smtClean="0">
+                              <a:solidFill>
+                                <a:srgbClr val="232323"/>
+                              </a:solidFill>
+                              <a:latin typeface="Cambria Math" panose="02040503050406030204" pitchFamily="18" charset="0"/>
+                            </a:rPr>
+                            <m:t>𝑅</m:t>
+                          </m:r>
+                        </m:sub>
+                      </m:sSub>
+                      <m:r>
+                        <m:rPr>
+                          <m:sty m:val="p"/>
+                        </m:rPr>
+                        <a:rPr lang="en-US" sz="1700" b="0" i="1" smtClean="0">
+                          <a:solidFill>
+                            <a:srgbClr val="232323"/>
+                          </a:solidFill>
+                          <a:latin typeface="Cambria Math" panose="02040503050406030204" pitchFamily="18" charset="0"/>
+                        </a:rPr>
+                        <m:t>max</m:t>
+                      </m:r>
+                      <m:r>
+                        <a:rPr lang="en-US" sz="1700" b="0" i="1" smtClean="0">
+                          <a:solidFill>
+                            <a:srgbClr val="232323"/>
+                          </a:solidFill>
+                          <a:latin typeface="Cambria Math" panose="02040503050406030204" pitchFamily="18" charset="0"/>
+                        </a:rPr>
+                        <m:t> (0,</m:t>
+                      </m:r>
+                      <m:sSub>
+                        <m:sSubPr>
+                          <m:ctrlPr>
+                            <a:rPr lang="en-US" sz="1700" i="1">
+                              <a:solidFill>
+                                <a:srgbClr val="232323"/>
+                              </a:solidFill>
+                              <a:latin typeface="Cambria Math" panose="02040503050406030204" pitchFamily="18" charset="0"/>
+                            </a:rPr>
+                          </m:ctrlPr>
+                        </m:sSubPr>
+                        <m:e>
+                          <m:acc>
+                            <m:accPr>
+                              <m:chr m:val="̅"/>
+                              <m:ctrlPr>
+                                <a:rPr lang="en-US" sz="1700" i="1" dirty="0">
+                                  <a:solidFill>
+                                    <a:srgbClr val="232323"/>
+                                  </a:solidFill>
+                                  <a:latin typeface="Cambria Math" panose="02040503050406030204" pitchFamily="18" charset="0"/>
+                                </a:rPr>
+                              </m:ctrlPr>
+                            </m:accPr>
+                            <m:e>
+                              <m:r>
+                                <a:rPr lang="en-US" sz="1700" i="1">
+                                  <a:solidFill>
+                                    <a:srgbClr val="232323"/>
+                                  </a:solidFill>
+                                  <a:latin typeface="Cambria Math" panose="02040503050406030204" pitchFamily="18" charset="0"/>
+                                </a:rPr>
+                                <m:t>𝑅</m:t>
+                              </m:r>
+                            </m:e>
+                          </m:acc>
+                        </m:e>
+                        <m:sub>
+                          <m:r>
+                            <a:rPr lang="en-US" sz="1700" i="1">
+                              <a:solidFill>
+                                <a:srgbClr val="232323"/>
+                              </a:solidFill>
+                              <a:latin typeface="Cambria Math" panose="02040503050406030204" pitchFamily="18" charset="0"/>
+                            </a:rPr>
+                            <m:t>𝑐</m:t>
+                          </m:r>
+                          <m:r>
+                            <a:rPr lang="en-US" sz="1700" i="1">
+                              <a:solidFill>
+                                <a:srgbClr val="232323"/>
+                              </a:solidFill>
+                              <a:latin typeface="Cambria Math" panose="02040503050406030204" pitchFamily="18" charset="0"/>
+                            </a:rPr>
+                            <m:t>,</m:t>
+                          </m:r>
+                          <m:r>
+                            <a:rPr lang="en-US" sz="1700" i="1">
+                              <a:solidFill>
+                                <a:srgbClr val="232323"/>
+                              </a:solidFill>
+                              <a:latin typeface="Cambria Math" panose="02040503050406030204" pitchFamily="18" charset="0"/>
+                            </a:rPr>
+                            <m:t>𝑡</m:t>
+                          </m:r>
+                        </m:sub>
+                      </m:sSub>
+                      <m:r>
+                        <a:rPr lang="en-US" sz="1700" b="0" i="1" smtClean="0">
+                          <a:solidFill>
+                            <a:srgbClr val="232323"/>
+                          </a:solidFill>
+                          <a:latin typeface="Cambria Math" panose="02040503050406030204" pitchFamily="18" charset="0"/>
+                        </a:rPr>
+                        <m:t>−</m:t>
+                      </m:r>
+                      <m:sSub>
+                        <m:sSubPr>
+                          <m:ctrlPr>
+                            <a:rPr lang="en-US" sz="1700" i="1">
+                              <a:solidFill>
+                                <a:srgbClr val="232323"/>
+                              </a:solidFill>
+                              <a:latin typeface="Cambria Math" panose="02040503050406030204" pitchFamily="18" charset="0"/>
+                            </a:rPr>
+                          </m:ctrlPr>
+                        </m:sSubPr>
+                        <m:e>
+                          <m:r>
+                            <a:rPr lang="en-US" sz="1700" b="0" i="1" smtClean="0">
+                              <a:solidFill>
+                                <a:srgbClr val="232323"/>
+                              </a:solidFill>
+                              <a:latin typeface="Cambria Math" panose="02040503050406030204" pitchFamily="18" charset="0"/>
+                            </a:rPr>
+                            <m:t>𝑅</m:t>
+                          </m:r>
+                        </m:e>
+                        <m:sub>
+                          <m:r>
+                            <a:rPr lang="en-US" sz="1700" i="1">
+                              <a:solidFill>
+                                <a:srgbClr val="232323"/>
+                              </a:solidFill>
+                              <a:latin typeface="Cambria Math" panose="02040503050406030204" pitchFamily="18" charset="0"/>
+                            </a:rPr>
+                            <m:t>𝑐</m:t>
+                          </m:r>
+                          <m:r>
+                            <a:rPr lang="en-US" sz="1700" i="1">
+                              <a:solidFill>
+                                <a:srgbClr val="232323"/>
+                              </a:solidFill>
+                              <a:latin typeface="Cambria Math" panose="02040503050406030204" pitchFamily="18" charset="0"/>
+                            </a:rPr>
+                            <m:t>,</m:t>
+                          </m:r>
+                          <m:r>
+                            <a:rPr lang="en-US" sz="1700" i="1">
+                              <a:solidFill>
+                                <a:srgbClr val="232323"/>
+                              </a:solidFill>
+                              <a:latin typeface="Cambria Math" panose="02040503050406030204" pitchFamily="18" charset="0"/>
+                            </a:rPr>
+                            <m:t>𝑡</m:t>
+                          </m:r>
+                          <m:r>
+                            <a:rPr lang="en-US" sz="1700" b="0" i="1" smtClean="0">
+                              <a:solidFill>
+                                <a:srgbClr val="232323"/>
+                              </a:solidFill>
+                              <a:latin typeface="Cambria Math" panose="02040503050406030204" pitchFamily="18" charset="0"/>
+                            </a:rPr>
+                            <m:t>−1</m:t>
+                          </m:r>
+                        </m:sub>
+                      </m:sSub>
+                      <m:r>
+                        <a:rPr lang="en-US" sz="1700" b="0" i="1" smtClean="0">
+                          <a:solidFill>
+                            <a:srgbClr val="232323"/>
+                          </a:solidFill>
+                          <a:latin typeface="Cambria Math" panose="02040503050406030204" pitchFamily="18" charset="0"/>
+                        </a:rPr>
+                        <m:t>)</m:t>
+                      </m:r>
+                    </m:oMath>
+                  </m:oMathPara>
+                </a14:m>
+                <a:endParaRPr lang="en-US" sz="1700" b="0" i="0" dirty="0">
+                  <a:solidFill>
+                    <a:srgbClr val="232323"/>
+                  </a:solidFill>
+                  <a:latin typeface="Calibri"/>
+                </a:endParaRPr>
+              </a:p>
+              <a:p>
+                <a:pPr marL="0" indent="0">
+                  <a:spcAft>
+                    <a:spcPts val="1000"/>
+                  </a:spcAft>
+                </a:pPr>
+                <a14:m>
+                  <m:oMathPara xmlns:m="http://schemas.openxmlformats.org/officeDocument/2006/math">
+                    <m:oMathParaPr>
+                      <m:jc m:val="centerGroup"/>
+                    </m:oMathParaPr>
+                    <m:oMath xmlns:m="http://schemas.openxmlformats.org/officeDocument/2006/math">
+                      <m:sSub>
+                        <m:sSubPr>
+                          <m:ctrlPr>
+                            <a:rPr lang="en-US" sz="1700" b="1" i="1" smtClean="0">
+                              <a:solidFill>
+                                <a:srgbClr val="232323"/>
+                              </a:solidFill>
+                              <a:latin typeface="Cambria Math" panose="02040503050406030204" pitchFamily="18" charset="0"/>
+                            </a:rPr>
+                          </m:ctrlPr>
+                        </m:sSubPr>
+                        <m:e>
+                          <m:r>
+                            <a:rPr lang="en-US" sz="1700" b="1" i="1" smtClean="0">
+                              <a:solidFill>
+                                <a:srgbClr val="232323"/>
+                              </a:solidFill>
+                              <a:latin typeface="Cambria Math" panose="02040503050406030204" pitchFamily="18" charset="0"/>
+                            </a:rPr>
+                            <m:t>𝑹</m:t>
+                          </m:r>
+                        </m:e>
+                        <m:sub>
+                          <m:r>
+                            <a:rPr lang="en-US" sz="1700" b="1" i="1" smtClean="0">
+                              <a:solidFill>
+                                <a:srgbClr val="232323"/>
+                              </a:solidFill>
+                              <a:latin typeface="Cambria Math" panose="02040503050406030204" pitchFamily="18" charset="0"/>
+                            </a:rPr>
+                            <m:t>𝒄</m:t>
+                          </m:r>
+                          <m:r>
+                            <a:rPr lang="en-US" sz="1700" b="1" i="1" smtClean="0">
+                              <a:solidFill>
+                                <a:srgbClr val="232323"/>
+                              </a:solidFill>
+                              <a:latin typeface="Cambria Math" panose="02040503050406030204" pitchFamily="18" charset="0"/>
+                            </a:rPr>
+                            <m:t>,</m:t>
+                          </m:r>
+                          <m:r>
+                            <a:rPr lang="en-US" sz="1700" b="1" i="1" smtClean="0">
+                              <a:solidFill>
+                                <a:srgbClr val="232323"/>
+                              </a:solidFill>
+                              <a:latin typeface="Cambria Math" panose="02040503050406030204" pitchFamily="18" charset="0"/>
+                            </a:rPr>
+                            <m:t>𝒅𝒓𝒂𝒘</m:t>
+                          </m:r>
+                          <m:r>
+                            <a:rPr lang="en-US" sz="1700" b="1" i="1" smtClean="0">
+                              <a:solidFill>
+                                <a:srgbClr val="232323"/>
+                              </a:solidFill>
+                              <a:latin typeface="Cambria Math" panose="02040503050406030204" pitchFamily="18" charset="0"/>
+                            </a:rPr>
+                            <m:t>,</m:t>
+                          </m:r>
+                          <m:r>
+                            <a:rPr lang="en-US" sz="1700" b="1" i="1" smtClean="0">
+                              <a:solidFill>
+                                <a:srgbClr val="232323"/>
+                              </a:solidFill>
+                              <a:latin typeface="Cambria Math" panose="02040503050406030204" pitchFamily="18" charset="0"/>
+                            </a:rPr>
+                            <m:t>𝒕</m:t>
+                          </m:r>
+                        </m:sub>
+                      </m:sSub>
+                      <m:r>
+                        <a:rPr lang="en-US" sz="1700" b="1" i="1" smtClean="0">
+                          <a:solidFill>
+                            <a:srgbClr val="232323"/>
+                          </a:solidFill>
+                          <a:latin typeface="Cambria Math" panose="02040503050406030204" pitchFamily="18" charset="0"/>
+                        </a:rPr>
+                        <m:t> =</m:t>
+                      </m:r>
+                      <m:r>
+                        <a:rPr lang="en-US" sz="1700" b="1" i="1" smtClean="0">
+                          <a:solidFill>
+                            <a:srgbClr val="232323"/>
+                          </a:solidFill>
+                          <a:latin typeface="Cambria Math" panose="02040503050406030204" pitchFamily="18" charset="0"/>
+                        </a:rPr>
+                        <m:t>𝒎𝒊𝒏</m:t>
+                      </m:r>
+                      <m:r>
+                        <a:rPr lang="en-US" sz="1700" b="1" i="1" smtClean="0">
+                          <a:solidFill>
+                            <a:srgbClr val="232323"/>
+                          </a:solidFill>
+                          <a:latin typeface="Cambria Math" panose="02040503050406030204" pitchFamily="18" charset="0"/>
+                        </a:rPr>
+                        <m:t>(</m:t>
+                      </m:r>
+                      <m:sSub>
+                        <m:sSubPr>
+                          <m:ctrlPr>
+                            <a:rPr lang="en-US" sz="1700" b="1" i="1" smtClean="0">
+                              <a:solidFill>
+                                <a:srgbClr val="232323"/>
+                              </a:solidFill>
+                              <a:latin typeface="Cambria Math" panose="02040503050406030204" pitchFamily="18" charset="0"/>
+                            </a:rPr>
+                          </m:ctrlPr>
+                        </m:sSubPr>
+                        <m:e>
+                          <m:r>
+                            <a:rPr lang="en-US" sz="1700" b="1" i="1" smtClean="0">
+                              <a:solidFill>
+                                <a:srgbClr val="232323"/>
+                              </a:solidFill>
+                              <a:latin typeface="Cambria Math" panose="02040503050406030204" pitchFamily="18" charset="0"/>
+                            </a:rPr>
+                            <m:t>𝝓</m:t>
+                          </m:r>
+                        </m:e>
+                        <m:sub>
+                          <m:r>
+                            <a:rPr lang="en-US" sz="1700" b="1" i="1" smtClean="0">
+                              <a:solidFill>
+                                <a:srgbClr val="232323"/>
+                              </a:solidFill>
+                              <a:latin typeface="Cambria Math" panose="02040503050406030204" pitchFamily="18" charset="0"/>
+                            </a:rPr>
+                            <m:t>𝑹</m:t>
+                          </m:r>
+                        </m:sub>
+                      </m:sSub>
+                      <m:r>
+                        <a:rPr lang="en-US" sz="1700" b="1" i="1" smtClean="0">
+                          <a:solidFill>
+                            <a:srgbClr val="232323"/>
+                          </a:solidFill>
+                          <a:latin typeface="Cambria Math" panose="02040503050406030204" pitchFamily="18" charset="0"/>
+                        </a:rPr>
+                        <m:t> </m:t>
+                      </m:r>
+                      <m:r>
+                        <a:rPr lang="en-US" sz="1700" b="1" i="1" smtClean="0">
+                          <a:solidFill>
+                            <a:srgbClr val="232323"/>
+                          </a:solidFill>
+                          <a:latin typeface="Cambria Math" panose="02040503050406030204" pitchFamily="18" charset="0"/>
+                        </a:rPr>
+                        <m:t>𝒎𝒂𝒙</m:t>
+                      </m:r>
+                      <m:d>
+                        <m:dPr>
+                          <m:ctrlPr>
+                            <a:rPr lang="en-US" sz="1700" b="1" i="1" smtClean="0">
+                              <a:solidFill>
+                                <a:srgbClr val="232323"/>
+                              </a:solidFill>
+                              <a:latin typeface="Cambria Math" panose="02040503050406030204" pitchFamily="18" charset="0"/>
+                            </a:rPr>
+                          </m:ctrlPr>
+                        </m:dPr>
+                        <m:e>
+                          <m:r>
+                            <a:rPr lang="en-US" sz="1700" b="1" i="1" smtClean="0">
+                              <a:solidFill>
+                                <a:srgbClr val="232323"/>
+                              </a:solidFill>
+                              <a:latin typeface="Cambria Math" panose="02040503050406030204" pitchFamily="18" charset="0"/>
+                            </a:rPr>
+                            <m:t>𝟎</m:t>
+                          </m:r>
+                          <m:r>
+                            <a:rPr lang="en-US" sz="1700" b="1" i="1" smtClean="0">
+                              <a:solidFill>
+                                <a:srgbClr val="232323"/>
+                              </a:solidFill>
+                              <a:latin typeface="Cambria Math" panose="02040503050406030204" pitchFamily="18" charset="0"/>
+                            </a:rPr>
+                            <m:t>, −</m:t>
+                          </m:r>
+                          <m:sSub>
+                            <m:sSubPr>
+                              <m:ctrlPr>
+                                <a:rPr lang="en-US" sz="1700" b="1" i="1" smtClean="0">
+                                  <a:solidFill>
+                                    <a:srgbClr val="232323"/>
+                                  </a:solidFill>
+                                  <a:latin typeface="Cambria Math" panose="02040503050406030204" pitchFamily="18" charset="0"/>
+                                </a:rPr>
+                              </m:ctrlPr>
+                            </m:sSubPr>
+                            <m:e>
+                              <m:r>
+                                <a:rPr lang="en-US" sz="1700" b="1" i="1" smtClean="0">
+                                  <a:solidFill>
+                                    <a:srgbClr val="232323"/>
+                                  </a:solidFill>
+                                  <a:latin typeface="Cambria Math" panose="02040503050406030204" pitchFamily="18" charset="0"/>
+                                </a:rPr>
+                                <m:t>𝒆</m:t>
+                              </m:r>
+                            </m:e>
+                            <m:sub>
+                              <m:r>
+                                <a:rPr lang="en-US" sz="1700" b="1" i="1" smtClean="0">
+                                  <a:solidFill>
+                                    <a:srgbClr val="232323"/>
+                                  </a:solidFill>
+                                  <a:latin typeface="Cambria Math" panose="02040503050406030204" pitchFamily="18" charset="0"/>
+                                </a:rPr>
+                                <m:t>𝒄</m:t>
+                              </m:r>
+                              <m:r>
+                                <a:rPr lang="en-US" sz="1700" b="1" i="1" smtClean="0">
+                                  <a:solidFill>
+                                    <a:srgbClr val="232323"/>
+                                  </a:solidFill>
+                                  <a:latin typeface="Cambria Math" panose="02040503050406030204" pitchFamily="18" charset="0"/>
+                                </a:rPr>
+                                <m:t>,</m:t>
+                              </m:r>
+                              <m:r>
+                                <a:rPr lang="en-US" sz="1700" b="1" i="1" smtClean="0">
+                                  <a:solidFill>
+                                    <a:srgbClr val="232323"/>
+                                  </a:solidFill>
+                                  <a:latin typeface="Cambria Math" panose="02040503050406030204" pitchFamily="18" charset="0"/>
+                                </a:rPr>
+                                <m:t>𝒕</m:t>
+                              </m:r>
+                            </m:sub>
+                          </m:sSub>
+                        </m:e>
+                      </m:d>
+                      <m:r>
+                        <a:rPr lang="en-US" sz="1700" b="1" i="1" smtClean="0">
+                          <a:solidFill>
+                            <a:srgbClr val="232323"/>
+                          </a:solidFill>
+                          <a:latin typeface="Cambria Math" panose="02040503050406030204" pitchFamily="18" charset="0"/>
+                        </a:rPr>
+                        <m:t>, </m:t>
+                      </m:r>
+                      <m:sSub>
+                        <m:sSubPr>
+                          <m:ctrlPr>
+                            <a:rPr lang="en-US" sz="1700" b="1" i="1" smtClean="0">
+                              <a:solidFill>
+                                <a:srgbClr val="232323"/>
+                              </a:solidFill>
+                              <a:latin typeface="Cambria Math" panose="02040503050406030204" pitchFamily="18" charset="0"/>
+                            </a:rPr>
+                          </m:ctrlPr>
+                        </m:sSubPr>
+                        <m:e>
+                          <m:r>
+                            <a:rPr lang="en-US" sz="1700" b="1" i="1" smtClean="0">
+                              <a:solidFill>
+                                <a:srgbClr val="232323"/>
+                              </a:solidFill>
+                              <a:latin typeface="Cambria Math" panose="02040503050406030204" pitchFamily="18" charset="0"/>
+                            </a:rPr>
+                            <m:t>𝑹</m:t>
+                          </m:r>
+                        </m:e>
+                        <m:sub>
+                          <m:r>
+                            <a:rPr lang="en-US" sz="1700" b="1" i="1" smtClean="0">
+                              <a:solidFill>
+                                <a:srgbClr val="232323"/>
+                              </a:solidFill>
+                              <a:latin typeface="Cambria Math" panose="02040503050406030204" pitchFamily="18" charset="0"/>
+                            </a:rPr>
+                            <m:t>𝒄</m:t>
+                          </m:r>
+                          <m:r>
+                            <a:rPr lang="en-US" sz="1700" b="1" i="1" smtClean="0">
+                              <a:solidFill>
+                                <a:srgbClr val="232323"/>
+                              </a:solidFill>
+                              <a:latin typeface="Cambria Math" panose="02040503050406030204" pitchFamily="18" charset="0"/>
+                            </a:rPr>
+                            <m:t>,</m:t>
+                          </m:r>
+                          <m:r>
+                            <a:rPr lang="en-US" sz="1700" b="1" i="1" smtClean="0">
+                              <a:solidFill>
+                                <a:srgbClr val="232323"/>
+                              </a:solidFill>
+                              <a:latin typeface="Cambria Math" panose="02040503050406030204" pitchFamily="18" charset="0"/>
+                            </a:rPr>
+                            <m:t>𝒕</m:t>
+                          </m:r>
+                          <m:r>
+                            <a:rPr lang="en-US" sz="1700" b="1" i="1" smtClean="0">
+                              <a:solidFill>
+                                <a:srgbClr val="232323"/>
+                              </a:solidFill>
+                              <a:latin typeface="Cambria Math" panose="02040503050406030204" pitchFamily="18" charset="0"/>
+                            </a:rPr>
+                            <m:t>−</m:t>
+                          </m:r>
+                          <m:r>
+                            <a:rPr lang="en-US" sz="1700" b="1" i="1" smtClean="0">
+                              <a:solidFill>
+                                <a:srgbClr val="232323"/>
+                              </a:solidFill>
+                              <a:latin typeface="Cambria Math" panose="02040503050406030204" pitchFamily="18" charset="0"/>
+                            </a:rPr>
+                            <m:t>𝟏</m:t>
+                          </m:r>
+                        </m:sub>
+                      </m:sSub>
+                      <m:r>
+                        <a:rPr lang="en-US" sz="1700" b="1" i="1" smtClean="0">
+                          <a:solidFill>
+                            <a:srgbClr val="232323"/>
+                          </a:solidFill>
+                          <a:latin typeface="Cambria Math" panose="02040503050406030204" pitchFamily="18" charset="0"/>
+                        </a:rPr>
+                        <m:t> )</m:t>
+                      </m:r>
+                    </m:oMath>
+                  </m:oMathPara>
+                </a14:m>
+                <a:endParaRPr lang="en-US" sz="1700" b="1" i="0" dirty="0">
+                  <a:solidFill>
+                    <a:srgbClr val="232323"/>
+                  </a:solidFill>
+                  <a:latin typeface="Calibri"/>
+                </a:endParaRPr>
+              </a:p>
+              <a:p>
+                <a:pPr marL="0" indent="0">
+                  <a:spcAft>
+                    <a:spcPts val="1000"/>
+                  </a:spcAft>
+                </a:pPr>
+                <a:r>
+                  <a:rPr lang="en-US" sz="1700" b="1" i="0" dirty="0">
+                    <a:solidFill>
+                      <a:srgbClr val="232323"/>
+                    </a:solidFill>
+                    <a:latin typeface="Calibri"/>
+                  </a:rPr>
+                  <a:t>•  Storage cost enters the resource constraint as </a:t>
+                </a:r>
+                <a14:m>
+                  <m:oMath xmlns:m="http://schemas.openxmlformats.org/officeDocument/2006/math">
+                    <m:sSub>
+                      <m:sSubPr>
+                        <m:ctrlPr>
+                          <a:rPr lang="en-US" sz="1700" b="1" i="1" smtClean="0">
+                            <a:solidFill>
+                              <a:srgbClr val="232323"/>
+                            </a:solidFill>
+                            <a:latin typeface="Cambria Math" panose="02040503050406030204" pitchFamily="18" charset="0"/>
+                          </a:rPr>
+                        </m:ctrlPr>
+                      </m:sSubPr>
+                      <m:e>
+                        <m:r>
+                          <a:rPr lang="en-US" sz="1700" b="1" i="1" smtClean="0">
+                            <a:solidFill>
+                              <a:srgbClr val="232323"/>
+                            </a:solidFill>
+                            <a:latin typeface="Cambria Math" panose="02040503050406030204" pitchFamily="18" charset="0"/>
+                          </a:rPr>
+                          <m:t>𝜿</m:t>
+                        </m:r>
+                      </m:e>
+                      <m:sub>
+                        <m:r>
+                          <a:rPr lang="en-US" sz="1700" b="1" i="1" smtClean="0">
+                            <a:solidFill>
+                              <a:srgbClr val="232323"/>
+                            </a:solidFill>
+                            <a:latin typeface="Cambria Math" panose="02040503050406030204" pitchFamily="18" charset="0"/>
+                          </a:rPr>
+                          <m:t>𝟏</m:t>
+                        </m:r>
+                      </m:sub>
+                    </m:sSub>
+                    <m:r>
+                      <a:rPr lang="en-US" sz="1700" b="1" i="1" smtClean="0">
+                        <a:solidFill>
+                          <a:srgbClr val="232323"/>
+                        </a:solidFill>
+                        <a:latin typeface="Cambria Math" panose="02040503050406030204" pitchFamily="18" charset="0"/>
+                      </a:rPr>
+                      <m:t>∗</m:t>
+                    </m:r>
+                    <m:r>
+                      <a:rPr lang="en-US" sz="1700" b="1" i="1" smtClean="0">
+                        <a:solidFill>
+                          <a:srgbClr val="232323"/>
+                        </a:solidFill>
+                        <a:latin typeface="Cambria Math" panose="02040503050406030204" pitchFamily="18" charset="0"/>
+                      </a:rPr>
+                      <m:t>𝑹</m:t>
+                    </m:r>
+                    <m:r>
+                      <a:rPr lang="en-US" sz="1700" b="1" i="1" smtClean="0">
+                        <a:solidFill>
+                          <a:srgbClr val="232323"/>
+                        </a:solidFill>
+                        <a:latin typeface="Cambria Math" panose="02040503050406030204" pitchFamily="18" charset="0"/>
+                      </a:rPr>
+                      <m:t> +</m:t>
+                    </m:r>
+                    <m:sSub>
+                      <m:sSubPr>
+                        <m:ctrlPr>
+                          <a:rPr lang="en-US" sz="1700" b="1" i="1" smtClean="0">
+                            <a:solidFill>
+                              <a:srgbClr val="232323"/>
+                            </a:solidFill>
+                            <a:latin typeface="Cambria Math" panose="02040503050406030204" pitchFamily="18" charset="0"/>
+                          </a:rPr>
+                        </m:ctrlPr>
+                      </m:sSubPr>
+                      <m:e>
+                        <m:r>
+                          <a:rPr lang="en-US" sz="1700" b="1" i="1" smtClean="0">
+                            <a:solidFill>
+                              <a:srgbClr val="232323"/>
+                            </a:solidFill>
+                            <a:latin typeface="Cambria Math" panose="02040503050406030204" pitchFamily="18" charset="0"/>
+                          </a:rPr>
+                          <m:t>𝜿</m:t>
+                        </m:r>
+                      </m:e>
+                      <m:sub>
+                        <m:r>
+                          <a:rPr lang="en-US" sz="1700" b="1" i="1" smtClean="0">
+                            <a:solidFill>
+                              <a:srgbClr val="232323"/>
+                            </a:solidFill>
+                            <a:latin typeface="Cambria Math" panose="02040503050406030204" pitchFamily="18" charset="0"/>
+                          </a:rPr>
+                          <m:t>𝟐</m:t>
+                        </m:r>
+                      </m:sub>
+                    </m:sSub>
+                    <m:r>
+                      <a:rPr lang="en-US" sz="1700" b="1" i="1" smtClean="0">
+                        <a:solidFill>
+                          <a:srgbClr val="232323"/>
+                        </a:solidFill>
+                        <a:latin typeface="Cambria Math" panose="02040503050406030204" pitchFamily="18" charset="0"/>
+                      </a:rPr>
+                      <m:t>∗</m:t>
+                    </m:r>
+                    <m:sSup>
+                      <m:sSupPr>
+                        <m:ctrlPr>
+                          <a:rPr lang="en-US" sz="1700" b="1" i="1" smtClean="0">
+                            <a:solidFill>
+                              <a:srgbClr val="232323"/>
+                            </a:solidFill>
+                            <a:latin typeface="Cambria Math" panose="02040503050406030204" pitchFamily="18" charset="0"/>
+                          </a:rPr>
+                        </m:ctrlPr>
+                      </m:sSupPr>
+                      <m:e>
+                        <m:r>
+                          <a:rPr lang="en-US" sz="1700" b="1" i="1" smtClean="0">
+                            <a:solidFill>
+                              <a:srgbClr val="232323"/>
+                            </a:solidFill>
+                            <a:latin typeface="Cambria Math" panose="02040503050406030204" pitchFamily="18" charset="0"/>
+                          </a:rPr>
+                          <m:t>𝑹</m:t>
+                        </m:r>
+                      </m:e>
+                      <m:sup>
+                        <m:r>
+                          <a:rPr lang="en-US" sz="1700" b="1" i="1" smtClean="0">
+                            <a:solidFill>
+                              <a:srgbClr val="232323"/>
+                            </a:solidFill>
+                            <a:latin typeface="Cambria Math" panose="02040503050406030204" pitchFamily="18" charset="0"/>
+                          </a:rPr>
+                          <m:t>𝟐</m:t>
+                        </m:r>
+                      </m:sup>
+                    </m:sSup>
+                  </m:oMath>
+                </a14:m>
+                <a:r>
+                  <a:rPr lang="en-US" sz="1700" b="1" i="0" dirty="0">
+                    <a:solidFill>
+                      <a:srgbClr val="232323"/>
+                    </a:solidFill>
+                    <a:latin typeface="Calibri"/>
+                  </a:rPr>
+                  <a:t>, so welfare already nets out holding costs</a:t>
+                </a:r>
+              </a:p>
+              <a:p>
+                <a:pPr>
+                  <a:spcAft>
+                    <a:spcPts val="1000"/>
+                  </a:spcAft>
+                </a:pPr>
+                <a:r>
+                  <a:rPr lang="en-US" sz="1700" b="1" i="0" dirty="0">
+                    <a:solidFill>
+                      <a:srgbClr val="232323"/>
+                    </a:solidFill>
+                    <a:latin typeface="Calibri"/>
+                  </a:rPr>
+                  <a:t>•  The joint policy question: choose </a:t>
+                </a:r>
+                <a14:m>
+                  <m:oMath xmlns:m="http://schemas.openxmlformats.org/officeDocument/2006/math">
+                    <m:sSub>
+                      <m:sSubPr>
+                        <m:ctrlPr>
+                          <a:rPr lang="en-US" sz="1700" b="1" i="1" smtClean="0">
+                            <a:solidFill>
+                              <a:srgbClr val="232323"/>
+                            </a:solidFill>
+                            <a:latin typeface="Cambria Math" panose="02040503050406030204" pitchFamily="18" charset="0"/>
+                          </a:rPr>
+                        </m:ctrlPr>
+                      </m:sSubPr>
+                      <m:e>
+                        <m:r>
+                          <a:rPr lang="en-US" sz="1700" b="1" i="1">
+                            <a:solidFill>
+                              <a:srgbClr val="232323"/>
+                            </a:solidFill>
+                            <a:latin typeface="Cambria Math" panose="02040503050406030204" pitchFamily="18" charset="0"/>
+                          </a:rPr>
+                          <m:t>𝝓</m:t>
+                        </m:r>
+                      </m:e>
+                      <m:sub>
+                        <m:r>
+                          <a:rPr lang="en-US" sz="1700" b="1" i="1">
+                            <a:solidFill>
+                              <a:srgbClr val="232323"/>
+                            </a:solidFill>
+                            <a:latin typeface="Cambria Math" panose="02040503050406030204" pitchFamily="18" charset="0"/>
+                          </a:rPr>
+                          <m:t>𝑹</m:t>
+                        </m:r>
+                      </m:sub>
+                    </m:sSub>
+                  </m:oMath>
+                </a14:m>
+                <a:r>
+                  <a:rPr lang="en-US" sz="1700" b="1" i="0" dirty="0">
+                    <a:solidFill>
+                      <a:srgbClr val="232323"/>
+                    </a:solidFill>
+                    <a:latin typeface="Calibri"/>
+                  </a:rPr>
+                  <a:t>, </a:t>
+                </a:r>
+                <a14:m>
+                  <m:oMath xmlns:m="http://schemas.openxmlformats.org/officeDocument/2006/math">
+                    <m:sSub>
+                      <m:sSubPr>
+                        <m:ctrlPr>
+                          <a:rPr lang="en-US" sz="1700" b="1" i="1">
+                            <a:solidFill>
+                              <a:srgbClr val="232323"/>
+                            </a:solidFill>
+                            <a:latin typeface="Cambria Math" panose="02040503050406030204" pitchFamily="18" charset="0"/>
+                          </a:rPr>
+                        </m:ctrlPr>
+                      </m:sSubPr>
+                      <m:e>
+                        <m:r>
+                          <a:rPr lang="en-US" sz="1700" b="1" i="1">
+                            <a:solidFill>
+                              <a:srgbClr val="232323"/>
+                            </a:solidFill>
+                            <a:latin typeface="Cambria Math" panose="02040503050406030204" pitchFamily="18" charset="0"/>
+                          </a:rPr>
+                          <m:t>𝝓</m:t>
+                        </m:r>
+                      </m:e>
+                      <m:sub>
+                        <m:r>
+                          <a:rPr lang="en-US" sz="1700" b="1" i="1" smtClean="0">
+                            <a:solidFill>
+                              <a:srgbClr val="232323"/>
+                            </a:solidFill>
+                            <a:latin typeface="Cambria Math" panose="02040503050406030204" pitchFamily="18" charset="0"/>
+                          </a:rPr>
+                          <m:t>𝑰𝑸</m:t>
+                        </m:r>
+                      </m:sub>
+                    </m:sSub>
+                  </m:oMath>
+                </a14:m>
+                <a:r>
+                  <a:rPr lang="en-US" sz="1700" b="1" i="0" dirty="0">
+                    <a:solidFill>
+                      <a:srgbClr val="232323"/>
+                    </a:solidFill>
+                    <a:latin typeface="Calibri"/>
+                  </a:rPr>
+                  <a:t> and d together, not sequentially</a:t>
+                </a:r>
+              </a:p>
+              <a:p>
+                <a:r>
+                  <a:rPr lang="en-US" sz="1700" b="0" i="0" dirty="0">
+                    <a:solidFill>
+                      <a:srgbClr val="232323"/>
+                    </a:solidFill>
+                    <a:latin typeface="Calibri"/>
+                  </a:rPr>
+                  <a:t>•  Why joint? The policy levers are strategic complements — the best drawdown rule depends on reserve size, and reserve size depends on the policy rule</a:t>
+                </a:r>
+                <a:br>
+                  <a:rPr lang="en-DE" dirty="0"/>
+                </a:br>
+                <a:endParaRPr lang="en-DE" dirty="0"/>
+              </a:p>
+              <a:p>
+                <a:pPr marL="0" indent="0">
+                  <a:spcAft>
+                    <a:spcPts val="1000"/>
+                  </a:spcAft>
+                </a:pPr>
+                <a:endParaRPr sz="1700" b="0" i="0" dirty="0">
+                  <a:solidFill>
+                    <a:srgbClr val="232323"/>
+                  </a:solidFill>
+                  <a:latin typeface="Calibri"/>
+                </a:endParaRPr>
+              </a:p>
+            </p:txBody>
+          </p:sp>
+        </mc:Choice>
+        <mc:Fallback>
+          <p:sp>
+            <p:nvSpPr>
+              <p:cNvPr id="9" name="TextBox 8"/>
+              <p:cNvSpPr txBox="1">
+                <a:spLocks noRot="1" noChangeAspect="1" noMove="1" noResize="1" noEditPoints="1" noAdjustHandles="1" noChangeArrowheads="1" noChangeShapeType="1" noTextEdit="1"/>
+              </p:cNvSpPr>
+              <p:nvPr/>
+            </p:nvSpPr>
+            <p:spPr>
+              <a:xfrm>
+                <a:off x="502920" y="1554480"/>
+                <a:ext cx="11185855" cy="3587521"/>
+              </a:xfrm>
+              <a:prstGeom prst="rect">
+                <a:avLst/>
+              </a:prstGeom>
+              <a:blipFill>
+                <a:blip r:embed="rId3"/>
+                <a:stretch>
+                  <a:fillRect l="-382" t="-509"/>
+                </a:stretch>
+              </a:blipFill>
+            </p:spPr>
+            <p:txBody>
+              <a:bodyPr/>
+              <a:lstStyle/>
+              <a:p>
+                <a:r>
+                  <a:rPr lang="en-DE">
+                    <a:noFill/>
+                  </a:rPr>
+                  <a:t> </a:t>
+                </a:r>
+              </a:p>
+            </p:txBody>
+          </p:sp>
+        </mc:Fallback>
+      </mc:AlternateContent>
     </p:spTree>
   </p:cSld>
   <p:clrMapOvr>
@@ -5684,7 +7024,7 @@
 </file>
 
 <file path=ppt/slides/slide15.xml><?xml version="1.0" encoding="utf-8"?>
-<p:sld xmlns:a="http://schemas.openxmlformats.org/drawingml/2006/main" xmlns:p="http://schemas.openxmlformats.org/presentationml/2006/main" xmlns:r="http://schemas.openxmlformats.org/officeDocument/2006/relationships">
+<p:sld xmlns:a="http://schemas.openxmlformats.org/drawingml/2006/main" xmlns:r="http://schemas.openxmlformats.org/officeDocument/2006/relationships" xmlns:p="http://schemas.openxmlformats.org/presentationml/2006/main">
   <p:cSld>
     <p:spTree>
       <p:nvGrpSpPr>
@@ -5692,7 +7032,14 @@
         <p:cNvGrpSpPr/>
         <p:nvPr/>
       </p:nvGrpSpPr>
-      <p:grpSpPr/>
+      <p:grpSpPr>
+        <a:xfrm>
+          <a:off x="0" y="0"/>
+          <a:ext cx="0" cy="0"/>
+          <a:chOff x="0" y="0"/>
+          <a:chExt cx="0" cy="0"/>
+        </a:xfrm>
+      </p:grpSpPr>
       <p:sp>
         <p:nvSpPr>
           <p:cNvPr id="2" name="Rectangle 1"/>
@@ -5734,6 +7081,7 @@
           <a:lstStyle/>
           <a:p>
             <a:pPr algn="ctr"/>
+            <a:endParaRPr/>
           </a:p>
         </p:txBody>
       </p:sp>
@@ -5778,6 +7126,7 @@
           <a:lstStyle/>
           <a:p>
             <a:pPr algn="ctr"/>
+            <a:endParaRPr/>
           </a:p>
         </p:txBody>
       </p:sp>
@@ -5815,7 +7164,7 @@
                 </a:solidFill>
                 <a:latin typeface="Calibri"/>
               </a:rPr>
-              <a:t>BLOCK 3 · 25 MIN</a:t>
+              <a:t>BLOCK 2 · 40 MIN</a:t>
             </a:r>
           </a:p>
           <a:p>
@@ -5826,7 +7175,7 @@
                 </a:solidFill>
                 <a:latin typeface="Calibri"/>
               </a:rPr>
-              <a:t>Step 1 — Screen: Break-Even Accounting</a:t>
+              <a:t>Deterministic Crisis Demo</a:t>
             </a:r>
           </a:p>
         </p:txBody>
@@ -5896,6 +7245,7 @@
           <a:lstStyle/>
           <a:p>
             <a:pPr algn="ctr"/>
+            <a:endParaRPr/>
           </a:p>
         </p:txBody>
       </p:sp>
@@ -5968,109 +7318,260 @@
           </a:p>
         </p:txBody>
       </p:sp>
-      <p:sp>
-        <p:nvSpPr>
-          <p:cNvPr id="9" name="TextBox 8"/>
-          <p:cNvSpPr txBox="1"/>
-          <p:nvPr/>
-        </p:nvSpPr>
-        <p:spPr>
-          <a:xfrm>
-            <a:off x="502920" y="1554480"/>
-            <a:ext cx="11185855" cy="4389120"/>
-          </a:xfrm>
-          <a:prstGeom prst="rect">
-            <a:avLst/>
-          </a:prstGeom>
-          <a:noFill/>
-        </p:spPr>
-        <p:txBody>
-          <a:bodyPr wrap="square">
-            <a:spAutoFit/>
-          </a:bodyPr>
-          <a:lstStyle/>
-          <a:p>
-            <a:pPr marL="0" indent="0">
-              <a:spcAft>
-                <a:spcPts val="1000"/>
-              </a:spcAft>
-            </a:pPr>
-            <a:r>
-              <a:rPr sz="1700" b="0" i="0">
-                <a:solidFill>
-                  <a:srgbClr val="232323"/>
-                </a:solidFill>
-                <a:latin typeface="Calibri"/>
-              </a:rPr>
-              <a:t>•  Compute the annualized cost of holding the reserve, then back out the minimum crisis GDP loss (%) that would make it pay for itself</a:t>
-            </a:r>
-          </a:p>
-          <a:p>
-            <a:pPr marL="0" indent="0">
-              <a:spcAft>
-                <a:spcPts val="1000"/>
-              </a:spcAft>
-            </a:pPr>
-            <a:r>
-              <a:rPr sz="1700" b="0" i="0">
-                <a:solidFill>
-                  <a:srgbClr val="232323"/>
-                </a:solidFill>
-                <a:latin typeface="Calibri"/>
-              </a:rPr>
-              <a:t>•  Baseline GDP (2024): USD 430,000m · crisis probability p: 0.04/yr · break-even divisor: USD 172.0m</a:t>
-            </a:r>
-          </a:p>
-          <a:p>
-            <a:pPr marL="0" indent="0">
-              <a:spcAft>
-                <a:spcPts val="1000"/>
-              </a:spcAft>
-            </a:pPr>
-            <a:r>
-              <a:rPr sz="1700" b="1" i="0">
-                <a:solidFill>
-                  <a:srgbClr val="232323"/>
-                </a:solidFill>
-                <a:latin typeface="Calibri"/>
-              </a:rPr>
-              <a:t>•  Illustrative ranking (lowest to highest break-even bar):</a:t>
-            </a:r>
-          </a:p>
-          <a:p>
-            <a:pPr marL="320040" indent="0">
-              <a:spcAft>
-                <a:spcPts val="600"/>
-              </a:spcAft>
-            </a:pPr>
-            <a:r>
-              <a:rPr sz="1500" b="0" i="0">
-                <a:solidFill>
-                  <a:srgbClr val="232323"/>
-                </a:solidFill>
-                <a:latin typeface="Calibri"/>
-              </a:rPr>
-              <a:t>–  Refined-product tanks (8-day cover) and distributed BESS clear the lowest bar (≈0.16–0.18% of GDP)</a:t>
-            </a:r>
-          </a:p>
-          <a:p>
-            <a:pPr marL="320040" indent="0">
-              <a:spcAft>
-                <a:spcPts val="600"/>
-              </a:spcAft>
-            </a:pPr>
-            <a:r>
-              <a:rPr sz="1500" b="0" i="0">
-                <a:solidFill>
-                  <a:srgbClr val="232323"/>
-                </a:solidFill>
-                <a:latin typeface="Calibri"/>
-              </a:rPr>
-              <a:t>–  90-day imported coal and 6-MTA LNG need the largest crises (≈1.9–2.0% of GDP)</a:t>
-            </a:r>
-          </a:p>
-        </p:txBody>
-      </p:sp>
+      <mc:AlternateContent xmlns:mc="http://schemas.openxmlformats.org/markup-compatibility/2006">
+        <mc:Choice xmlns:a14="http://schemas.microsoft.com/office/drawing/2010/main" Requires="a14">
+          <p:sp>
+            <p:nvSpPr>
+              <p:cNvPr id="9" name="TextBox 8"/>
+              <p:cNvSpPr txBox="1"/>
+              <p:nvPr/>
+            </p:nvSpPr>
+            <p:spPr>
+              <a:xfrm>
+                <a:off x="502920" y="1554480"/>
+                <a:ext cx="11185855" cy="1937453"/>
+              </a:xfrm>
+              <a:prstGeom prst="rect">
+                <a:avLst/>
+              </a:prstGeom>
+              <a:noFill/>
+            </p:spPr>
+            <p:txBody>
+              <a:bodyPr wrap="square">
+                <a:spAutoFit/>
+              </a:bodyPr>
+              <a:lstStyle/>
+              <a:p>
+                <a:pPr marL="0" indent="0">
+                  <a:spcAft>
+                    <a:spcPts val="1000"/>
+                  </a:spcAft>
+                </a:pPr>
+                <a:r>
+                  <a:rPr lang="pt-PT" sz="1700" b="0" i="0" dirty="0">
+                    <a:solidFill>
+                      <a:srgbClr val="232323"/>
+                    </a:solidFill>
+                    <a:latin typeface="Calibri"/>
+                  </a:rPr>
+                  <a:t>•  Supply disruption demo: 30% disruption, applied to both commodities</a:t>
+                </a:r>
+              </a:p>
+              <a:p>
+                <a:pPr marL="0" indent="0">
+                  <a:spcAft>
+                    <a:spcPts val="1000"/>
+                  </a:spcAft>
+                </a:pPr>
+                <a:r>
+                  <a:rPr lang="pt-PT" sz="1700" b="0" i="0" dirty="0">
+                    <a:solidFill>
+                      <a:srgbClr val="232323"/>
+                    </a:solidFill>
+                    <a:latin typeface="Calibri"/>
+                  </a:rPr>
+                  <a:t>•  Compare no drawdown against full drawdown — or the baseline </a:t>
+                </a:r>
+                <a14:m>
+                  <m:oMath xmlns:m="http://schemas.openxmlformats.org/officeDocument/2006/math">
+                    <m:sSub>
+                      <m:sSubPr>
+                        <m:ctrlPr>
+                          <a:rPr lang="en-US" sz="1700" b="0" i="1" smtClean="0">
+                            <a:solidFill>
+                              <a:srgbClr val="232323"/>
+                            </a:solidFill>
+                            <a:latin typeface="Cambria Math" panose="02040503050406030204" pitchFamily="18" charset="0"/>
+                          </a:rPr>
+                        </m:ctrlPr>
+                      </m:sSubPr>
+                      <m:e>
+                        <m:r>
+                          <a:rPr lang="en-US" sz="1700" b="0" i="1" smtClean="0">
+                            <a:solidFill>
+                              <a:srgbClr val="232323"/>
+                            </a:solidFill>
+                            <a:latin typeface="Cambria Math" panose="02040503050406030204" pitchFamily="18" charset="0"/>
+                          </a:rPr>
+                          <m:t>𝜙</m:t>
+                        </m:r>
+                      </m:e>
+                      <m:sub>
+                        <m:r>
+                          <a:rPr lang="en-US" sz="1700" b="0" i="1" smtClean="0">
+                            <a:solidFill>
+                              <a:srgbClr val="232323"/>
+                            </a:solidFill>
+                            <a:latin typeface="Cambria Math" panose="02040503050406030204" pitchFamily="18" charset="0"/>
+                          </a:rPr>
+                          <m:t>𝑅</m:t>
+                        </m:r>
+                      </m:sub>
+                    </m:sSub>
+                    <m:r>
+                      <a:rPr lang="en-US" sz="1700" b="0" i="1" smtClean="0">
+                        <a:solidFill>
+                          <a:srgbClr val="232323"/>
+                        </a:solidFill>
+                        <a:latin typeface="Cambria Math" panose="02040503050406030204" pitchFamily="18" charset="0"/>
+                      </a:rPr>
+                      <m:t>=0.5 </m:t>
+                    </m:r>
+                  </m:oMath>
+                </a14:m>
+                <a:r>
+                  <a:rPr lang="pt-PT" sz="1700" b="0" i="0" dirty="0">
+                    <a:solidFill>
+                      <a:srgbClr val="232323"/>
+                    </a:solidFill>
+                    <a:latin typeface="Calibri"/>
+                  </a:rPr>
+                  <a:t>in minimal mode</a:t>
+                </a:r>
+              </a:p>
+              <a:p>
+                <a:pPr>
+                  <a:spcAft>
+                    <a:spcPts val="1000"/>
+                  </a:spcAft>
+                </a:pPr>
+                <a:r>
+                  <a:rPr lang="pt-PT" sz="1700" b="0" i="0" dirty="0">
+                    <a:solidFill>
+                      <a:srgbClr val="232323"/>
+                    </a:solidFill>
+                    <a:latin typeface="Calibri"/>
+                  </a:rPr>
+                  <a:t>•  Read the paths for consumption C, energy services </a:t>
+                </a:r>
+                <a14:m>
+                  <m:oMath xmlns:m="http://schemas.openxmlformats.org/officeDocument/2006/math">
+                    <m:sSub>
+                      <m:sSubPr>
+                        <m:ctrlPr>
+                          <a:rPr lang="en-US" sz="1700" i="1">
+                            <a:solidFill>
+                              <a:srgbClr val="232323"/>
+                            </a:solidFill>
+                            <a:latin typeface="Cambria Math" panose="02040503050406030204" pitchFamily="18" charset="0"/>
+                          </a:rPr>
+                        </m:ctrlPr>
+                      </m:sSubPr>
+                      <m:e>
+                        <m:r>
+                          <a:rPr lang="en-US" sz="1700" i="1">
+                            <a:solidFill>
+                              <a:srgbClr val="232323"/>
+                            </a:solidFill>
+                            <a:latin typeface="Cambria Math" panose="02040503050406030204" pitchFamily="18" charset="0"/>
+                          </a:rPr>
+                          <m:t>𝐸</m:t>
+                        </m:r>
+                      </m:e>
+                      <m:sub>
+                        <m:r>
+                          <a:rPr lang="en-US" sz="1700" i="1">
+                            <a:solidFill>
+                              <a:srgbClr val="232323"/>
+                            </a:solidFill>
+                            <a:latin typeface="Cambria Math" panose="02040503050406030204" pitchFamily="18" charset="0"/>
+                          </a:rPr>
+                          <m:t>𝐷</m:t>
+                        </m:r>
+                      </m:sub>
+                    </m:sSub>
+                  </m:oMath>
+                </a14:m>
+                <a:r>
+                  <a:rPr lang="pt-PT" sz="1700" b="0" i="0" dirty="0">
+                    <a:solidFill>
+                      <a:srgbClr val="232323"/>
+                    </a:solidFill>
+                    <a:latin typeface="Calibri"/>
+                  </a:rPr>
+                  <a:t>, reserves, and welfare W</a:t>
+                </a:r>
+              </a:p>
+              <a:p>
+                <a:pPr marL="0" indent="0">
+                  <a:spcAft>
+                    <a:spcPts val="1000"/>
+                  </a:spcAft>
+                </a:pPr>
+                <a:r>
+                  <a:rPr lang="pt-PT" sz="1700" b="0" i="0" dirty="0">
+                    <a:solidFill>
+                      <a:srgbClr val="232323"/>
+                    </a:solidFill>
+                    <a:latin typeface="Calibri"/>
+                  </a:rPr>
+                  <a:t>•  Question: how much does the drawdown rule soften the consumption and energy-services drop during the crisis window?</a:t>
+                </a:r>
+              </a:p>
+              <a:p>
+                <a:pPr marL="0" indent="0">
+                  <a:spcAft>
+                    <a:spcPts val="1000"/>
+                  </a:spcAft>
+                </a:pPr>
+                <a:r>
+                  <a:rPr lang="pt-PT" sz="1700" b="1" i="0" dirty="0">
+                    <a:solidFill>
+                      <a:srgbClr val="232323"/>
+                    </a:solidFill>
+                    <a:latin typeface="Calibri"/>
+                  </a:rPr>
+                  <a:t>•  Interpretation: the demo is about the policy response path, not a reserve-rule screening exercise</a:t>
+                </a:r>
+                <a:endParaRPr sz="1700" b="1" i="0" dirty="0">
+                  <a:solidFill>
+                    <a:srgbClr val="232323"/>
+                  </a:solidFill>
+                  <a:latin typeface="Calibri"/>
+                </a:endParaRPr>
+              </a:p>
+            </p:txBody>
+          </p:sp>
+        </mc:Choice>
+        <mc:Fallback>
+          <p:sp>
+            <p:nvSpPr>
+              <p:cNvPr id="9" name="TextBox 8"/>
+              <p:cNvSpPr txBox="1">
+                <a:spLocks noRot="1" noChangeAspect="1" noMove="1" noResize="1" noEditPoints="1" noAdjustHandles="1" noChangeArrowheads="1" noChangeShapeType="1" noTextEdit="1"/>
+              </p:cNvSpPr>
+              <p:nvPr/>
+            </p:nvSpPr>
+            <p:spPr>
+              <a:xfrm>
+                <a:off x="502920" y="1554480"/>
+                <a:ext cx="11185855" cy="1937453"/>
+              </a:xfrm>
+              <a:prstGeom prst="rect">
+                <a:avLst/>
+              </a:prstGeom>
+              <a:blipFill>
+                <a:blip r:embed="rId3"/>
+                <a:stretch>
+                  <a:fillRect l="-382" t="-943" b="-1887"/>
+                </a:stretch>
+              </a:blipFill>
+            </p:spPr>
+            <p:txBody>
+              <a:bodyPr/>
+              <a:lstStyle/>
+              <a:p>
+                <a:r>
+                  <a:rPr lang="en-DE">
+                    <a:noFill/>
+                  </a:rPr>
+                  <a:t> </a:t>
+                </a:r>
+              </a:p>
+            </p:txBody>
+          </p:sp>
+        </mc:Fallback>
+      </mc:AlternateContent>
       <p:sp>
         <p:nvSpPr>
           <p:cNvPr id="10" name="Rounded Rectangle 9"/>
@@ -6110,7 +7611,7 @@
           </a:fontRef>
         </p:style>
         <p:txBody>
-          <a:bodyPr rtlCol="0" anchor="ctr" wrap="square" lIns="137160" rIns="137160" tIns="54864" bIns="54864"/>
+          <a:bodyPr wrap="square" lIns="137160" tIns="54864" rIns="137160" bIns="54864" rtlCol="0" anchor="ctr"/>
           <a:lstStyle/>
           <a:p>
             <a:pPr algn="ctr"/>
@@ -6121,7 +7622,7 @@
                 </a:solidFill>
                 <a:latin typeface="Calibri"/>
               </a:rPr>
-              <a:t>Illustrative toy-model numbers — not DGE-METRIC outputs.</a:t>
+              <a:t>This is an exact deterministic path in the toy model, not a DGE-METRIC reserve analysis.</a:t>
             </a:r>
           </a:p>
         </p:txBody>
@@ -6135,7 +7636,7 @@
 </file>
 
 <file path=ppt/slides/slide16.xml><?xml version="1.0" encoding="utf-8"?>
-<p:sld xmlns:a="http://schemas.openxmlformats.org/drawingml/2006/main" xmlns:p="http://schemas.openxmlformats.org/presentationml/2006/main" xmlns:r="http://schemas.openxmlformats.org/officeDocument/2006/relationships">
+<p:sld xmlns:a="http://schemas.openxmlformats.org/drawingml/2006/main" xmlns:r="http://schemas.openxmlformats.org/officeDocument/2006/relationships" xmlns:p="http://schemas.openxmlformats.org/presentationml/2006/main">
   <p:cSld>
     <p:spTree>
       <p:nvGrpSpPr>
@@ -6143,7 +7644,14 @@
         <p:cNvGrpSpPr/>
         <p:nvPr/>
       </p:nvGrpSpPr>
-      <p:grpSpPr/>
+      <p:grpSpPr>
+        <a:xfrm>
+          <a:off x="0" y="0"/>
+          <a:ext cx="0" cy="0"/>
+          <a:chOff x="0" y="0"/>
+          <a:chExt cx="0" cy="0"/>
+        </a:xfrm>
+      </p:grpSpPr>
       <p:sp>
         <p:nvSpPr>
           <p:cNvPr id="2" name="Rectangle 1"/>
@@ -6185,6 +7693,7 @@
           <a:lstStyle/>
           <a:p>
             <a:pPr algn="ctr"/>
+            <a:endParaRPr/>
           </a:p>
         </p:txBody>
       </p:sp>
@@ -6229,6 +7738,7 @@
           <a:lstStyle/>
           <a:p>
             <a:pPr algn="ctr"/>
+            <a:endParaRPr/>
           </a:p>
         </p:txBody>
       </p:sp>
@@ -6266,7 +7776,7 @@
                 </a:solidFill>
                 <a:latin typeface="Calibri"/>
               </a:rPr>
-              <a:t>BLOCK 4 · 25 MIN</a:t>
+              <a:t>BLOCK 3 · 55 MIN</a:t>
             </a:r>
           </a:p>
           <a:p>
@@ -6277,7 +7787,7 @@
                 </a:solidFill>
                 <a:latin typeface="Calibri"/>
               </a:rPr>
-              <a:t>Steps 2–3 — Validate &amp; Optimize</a:t>
+              <a:t>Vietnam Growth Adequacy</a:t>
             </a:r>
           </a:p>
         </p:txBody>
@@ -6347,6 +7857,7 @@
           <a:lstStyle/>
           <a:p>
             <a:pPr algn="ctr"/>
+            <a:endParaRPr/>
           </a:p>
         </p:txBody>
       </p:sp>
@@ -6419,93 +7930,213 @@
           </a:p>
         </p:txBody>
       </p:sp>
-      <p:sp>
-        <p:nvSpPr>
-          <p:cNvPr id="9" name="TextBox 8"/>
-          <p:cNvSpPr txBox="1"/>
-          <p:nvPr/>
-        </p:nvSpPr>
-        <p:spPr>
-          <a:xfrm>
-            <a:off x="502920" y="1554480"/>
-            <a:ext cx="11185855" cy="4892040"/>
-          </a:xfrm>
-          <a:prstGeom prst="rect">
-            <a:avLst/>
-          </a:prstGeom>
-          <a:noFill/>
-        </p:spPr>
-        <p:txBody>
-          <a:bodyPr wrap="square">
-            <a:spAutoFit/>
-          </a:bodyPr>
-          <a:lstStyle/>
-          <a:p>
-            <a:pPr marL="0" indent="0">
-              <a:spcAft>
-                <a:spcPts val="1000"/>
-              </a:spcAft>
-            </a:pPr>
-            <a:r>
-              <a:rPr sz="1700" b="0" i="0">
-                <a:solidFill>
-                  <a:srgbClr val="232323"/>
-                </a:solidFill>
-                <a:latin typeface="Calibri"/>
-              </a:rPr>
-              <a:t>•  Step 2 — Validate: feed a 20% and 50% disruption through the toy model's CES production function; read off avoided GDP loss vs. the Step-1 threshold</a:t>
-            </a:r>
-          </a:p>
-          <a:p>
-            <a:pPr marL="320040" indent="0">
-              <a:spcAft>
-                <a:spcPts val="600"/>
-              </a:spcAft>
-            </a:pPr>
-            <a:r>
-              <a:rPr sz="1500" b="0" i="0">
-                <a:solidFill>
-                  <a:srgbClr val="232323"/>
-                </a:solidFill>
-                <a:latin typeface="Calibri"/>
-              </a:rPr>
-              <a:t>–  Illustrative result: every carrier tested comes back "not justified" at both shock sizes under the current calibration</a:t>
-            </a:r>
-          </a:p>
-          <a:p>
-            <a:pPr marL="0" indent="0">
-              <a:spcAft>
-                <a:spcPts val="1000"/>
-              </a:spcAft>
-            </a:pPr>
-            <a:r>
-              <a:rPr sz="1700" b="0" i="0">
-                <a:solidFill>
-                  <a:srgbClr val="232323"/>
-                </a:solidFill>
-                <a:latin typeface="Calibri"/>
-              </a:rPr>
-              <a:t>•  Step 3 — Optimize: search over coverage days for the level maximizing Net Reserve Value (insurance benefit − storage cost)</a:t>
-            </a:r>
-          </a:p>
-          <a:p>
-            <a:pPr marL="320040" indent="0">
-              <a:spcAft>
-                <a:spcPts val="600"/>
-              </a:spcAft>
-            </a:pPr>
-            <a:r>
-              <a:rPr sz="1500" b="1" i="0">
-                <a:solidFill>
-                  <a:srgbClr val="232323"/>
-                </a:solidFill>
-                <a:latin typeface="Calibri"/>
-              </a:rPr>
-              <a:t>–  Caveat: the latest run hit the edge of the search grid with a mis-scaled storage-cost figure — treat as provisional</a:t>
-            </a:r>
-          </a:p>
-        </p:txBody>
-      </p:sp>
+      <mc:AlternateContent xmlns:mc="http://schemas.openxmlformats.org/markup-compatibility/2006">
+        <mc:Choice xmlns:a14="http://schemas.microsoft.com/office/drawing/2010/main" Requires="a14">
+          <p:sp>
+            <p:nvSpPr>
+              <p:cNvPr id="9" name="TextBox 8"/>
+              <p:cNvSpPr txBox="1"/>
+              <p:nvPr/>
+            </p:nvSpPr>
+            <p:spPr>
+              <a:xfrm>
+                <a:off x="502920" y="1554480"/>
+                <a:ext cx="11185855" cy="1913344"/>
+              </a:xfrm>
+              <a:prstGeom prst="rect">
+                <a:avLst/>
+              </a:prstGeom>
+              <a:noFill/>
+            </p:spPr>
+            <p:txBody>
+              <a:bodyPr wrap="square">
+                <a:spAutoFit/>
+              </a:bodyPr>
+              <a:lstStyle/>
+              <a:p>
+                <a:pPr>
+                  <a:spcAft>
+                    <a:spcPts val="1000"/>
+                  </a:spcAft>
+                </a:pPr>
+                <a:r>
+                  <a:rPr lang="pt-PT" sz="1700" b="0" i="0" dirty="0">
+                    <a:solidFill>
+                      <a:srgbClr val="232323"/>
+                    </a:solidFill>
+                    <a:latin typeface="Calibri"/>
+                  </a:rPr>
+                  <a:t>•  Vietnam target growth rate: </a:t>
+                </a:r>
+                <a14:m>
+                  <m:oMath xmlns:m="http://schemas.openxmlformats.org/officeDocument/2006/math">
+                    <m:sSub>
+                      <m:sSubPr>
+                        <m:ctrlPr>
+                          <a:rPr lang="ar-AE" sz="1700" i="1">
+                            <a:solidFill>
+                              <a:srgbClr val="232323"/>
+                            </a:solidFill>
+                            <a:latin typeface="Cambria Math" panose="02040503050406030204" pitchFamily="18" charset="0"/>
+                          </a:rPr>
+                        </m:ctrlPr>
+                      </m:sSubPr>
+                      <m:e>
+                        <m:r>
+                          <a:rPr lang="en-US" sz="1700" b="0" i="1" smtClean="0">
+                            <a:solidFill>
+                              <a:srgbClr val="232323"/>
+                            </a:solidFill>
+                            <a:latin typeface="Cambria Math" panose="02040503050406030204" pitchFamily="18" charset="0"/>
+                          </a:rPr>
+                          <m:t>𝑔</m:t>
+                        </m:r>
+                      </m:e>
+                      <m:sub>
+                        <m:r>
+                          <a:rPr lang="en-US" sz="1700" b="0" i="1" smtClean="0">
+                            <a:solidFill>
+                              <a:srgbClr val="232323"/>
+                            </a:solidFill>
+                            <a:latin typeface="Cambria Math" panose="02040503050406030204" pitchFamily="18" charset="0"/>
+                          </a:rPr>
+                          <m:t>𝑌</m:t>
+                        </m:r>
+                      </m:sub>
+                    </m:sSub>
+                    <m:r>
+                      <a:rPr lang="ar-AE" sz="1700" i="1">
+                        <a:solidFill>
+                          <a:srgbClr val="232323"/>
+                        </a:solidFill>
+                        <a:latin typeface="Cambria Math" panose="02040503050406030204" pitchFamily="18" charset="0"/>
+                      </a:rPr>
+                      <m:t> </m:t>
+                    </m:r>
+                  </m:oMath>
+                </a14:m>
+                <a:r>
+                  <a:rPr lang="pt-PT" sz="1700" b="0" i="0" dirty="0">
+                    <a:solidFill>
+                      <a:srgbClr val="232323"/>
+                    </a:solidFill>
+                    <a:latin typeface="Calibri"/>
+                  </a:rPr>
+                  <a:t>= 10% p.a. through 2030</a:t>
+                </a:r>
+              </a:p>
+              <a:p>
+                <a:pPr marL="0" indent="0">
+                  <a:spcAft>
+                    <a:spcPts val="1000"/>
+                  </a:spcAft>
+                </a:pPr>
+                <a:r>
+                  <a:rPr lang="pt-PT" sz="1700" b="0" i="0" dirty="0">
+                    <a:solidFill>
+                      <a:srgbClr val="232323"/>
+                    </a:solidFill>
+                    <a:latin typeface="Calibri"/>
+                  </a:rPr>
+                  <a:t>•  If reserves are held fixed while GDP and energy demand grow, coverage falls over time</a:t>
+                </a:r>
+              </a:p>
+              <a:p>
+                <a:pPr marL="0" indent="0">
+                  <a:spcAft>
+                    <a:spcPts val="1000"/>
+                  </a:spcAft>
+                </a:pPr>
+                <a:r>
+                  <a:rPr lang="pt-PT" sz="1700" b="1" i="0" dirty="0">
+                    <a:solidFill>
+                      <a:srgbClr val="232323"/>
+                    </a:solidFill>
+                    <a:latin typeface="Calibri"/>
+                  </a:rPr>
+                  <a:t>•  Oil SPR coverage today: about 30 days in the calibration; without scaling, coverage falls to about half in roughly 11 years</a:t>
+                </a:r>
+              </a:p>
+              <a:p>
+                <a:pPr marL="0" indent="0">
+                  <a:spcAft>
+                    <a:spcPts val="1000"/>
+                  </a:spcAft>
+                </a:pPr>
+                <a:r>
+                  <a:rPr lang="pt-PT" sz="1700" b="0" i="0" dirty="0">
+                    <a:solidFill>
+                      <a:srgbClr val="232323"/>
+                    </a:solidFill>
+                    <a:latin typeface="Calibri"/>
+                  </a:rPr>
+                  <a:t>•  Coal coverage follows the same logic: demand grows with GDP unless the stock scales up</a:t>
+                </a:r>
+              </a:p>
+              <a:p>
+                <a:pPr marL="0" indent="0">
+                  <a:spcAft>
+                    <a:spcPts val="1000"/>
+                  </a:spcAft>
+                </a:pPr>
+                <a:r>
+                  <a:rPr lang="pt-PT" sz="1700" b="1" i="0" dirty="0">
+                    <a:solidFill>
+                      <a:srgbClr val="232323"/>
+                    </a:solidFill>
+                    <a:latin typeface="Calibri"/>
+                  </a:rPr>
+                  <a:t>•  Policy lesson: reserve adequacy is a moving target, not a one-time stock number</a:t>
+                </a:r>
+                <a:endParaRPr sz="1700" b="1" i="0" dirty="0">
+                  <a:solidFill>
+                    <a:srgbClr val="232323"/>
+                  </a:solidFill>
+                  <a:latin typeface="Calibri"/>
+                </a:endParaRPr>
+              </a:p>
+            </p:txBody>
+          </p:sp>
+        </mc:Choice>
+        <mc:Fallback>
+          <p:sp>
+            <p:nvSpPr>
+              <p:cNvPr id="9" name="TextBox 8"/>
+              <p:cNvSpPr txBox="1">
+                <a:spLocks noRot="1" noChangeAspect="1" noMove="1" noResize="1" noEditPoints="1" noAdjustHandles="1" noChangeArrowheads="1" noChangeShapeType="1" noTextEdit="1"/>
+              </p:cNvSpPr>
+              <p:nvPr/>
+            </p:nvSpPr>
+            <p:spPr>
+              <a:xfrm>
+                <a:off x="502920" y="1554480"/>
+                <a:ext cx="11185855" cy="1913344"/>
+              </a:xfrm>
+              <a:prstGeom prst="rect">
+                <a:avLst/>
+              </a:prstGeom>
+              <a:blipFill>
+                <a:blip r:embed="rId3"/>
+                <a:stretch>
+                  <a:fillRect l="-382" t="-955" b="-3185"/>
+                </a:stretch>
+              </a:blipFill>
+            </p:spPr>
+            <p:txBody>
+              <a:bodyPr/>
+              <a:lstStyle/>
+              <a:p>
+                <a:r>
+                  <a:rPr lang="en-DE">
+                    <a:noFill/>
+                  </a:rPr>
+                  <a:t> </a:t>
+                </a:r>
+              </a:p>
+            </p:txBody>
+          </p:sp>
+        </mc:Fallback>
+      </mc:AlternateContent>
     </p:spTree>
   </p:cSld>
   <p:clrMapOvr>
@@ -6515,7 +8146,7 @@
 </file>
 
 <file path=ppt/slides/slide17.xml><?xml version="1.0" encoding="utf-8"?>
-<p:sld xmlns:a="http://schemas.openxmlformats.org/drawingml/2006/main" xmlns:p="http://schemas.openxmlformats.org/presentationml/2006/main" xmlns:r="http://schemas.openxmlformats.org/officeDocument/2006/relationships">
+<p:sld xmlns:a="http://schemas.openxmlformats.org/drawingml/2006/main" xmlns:r="http://schemas.openxmlformats.org/officeDocument/2006/relationships" xmlns:p="http://schemas.openxmlformats.org/presentationml/2006/main">
   <p:cSld>
     <p:spTree>
       <p:nvGrpSpPr>
@@ -6523,7 +8154,14 @@
         <p:cNvGrpSpPr/>
         <p:nvPr/>
       </p:nvGrpSpPr>
-      <p:grpSpPr/>
+      <p:grpSpPr>
+        <a:xfrm>
+          <a:off x="0" y="0"/>
+          <a:ext cx="0" cy="0"/>
+          <a:chOff x="0" y="0"/>
+          <a:chExt cx="0" cy="0"/>
+        </a:xfrm>
+      </p:grpSpPr>
       <p:sp>
         <p:nvSpPr>
           <p:cNvPr id="2" name="Rectangle 1"/>
@@ -6534,6 +8172,51 @@
           <a:xfrm>
             <a:off x="0" y="0"/>
             <a:ext cx="12191695" cy="6858000"/>
+          </a:xfrm>
+          <a:prstGeom prst="rect">
+            <a:avLst/>
+          </a:prstGeom>
+          <a:solidFill>
+            <a:srgbClr val="FFFFFF"/>
+          </a:solidFill>
+          <a:ln>
+            <a:noFill/>
+          </a:ln>
+          <a:effectLst/>
+        </p:spPr>
+        <p:style>
+          <a:lnRef idx="1">
+            <a:schemeClr val="accent1"/>
+          </a:lnRef>
+          <a:fillRef idx="3">
+            <a:schemeClr val="accent1"/>
+          </a:fillRef>
+          <a:effectRef idx="2">
+            <a:schemeClr val="accent1"/>
+          </a:effectRef>
+          <a:fontRef idx="minor">
+            <a:schemeClr val="lt1"/>
+          </a:fontRef>
+        </p:style>
+        <p:txBody>
+          <a:bodyPr rtlCol="0" anchor="ctr"/>
+          <a:lstStyle/>
+          <a:p>
+            <a:pPr algn="ctr"/>
+            <a:endParaRPr/>
+          </a:p>
+        </p:txBody>
+      </p:sp>
+      <p:sp>
+        <p:nvSpPr>
+          <p:cNvPr id="3" name="Rectangle 2"/>
+          <p:cNvSpPr/>
+          <p:nvPr/>
+        </p:nvSpPr>
+        <p:spPr>
+          <a:xfrm>
+            <a:off x="0" y="0"/>
+            <a:ext cx="12191695" cy="1280160"/>
           </a:xfrm>
           <a:prstGeom prst="rect">
             <a:avLst/>
@@ -6565,6 +8248,519 @@
           <a:lstStyle/>
           <a:p>
             <a:pPr algn="ctr"/>
+            <a:endParaRPr/>
+          </a:p>
+        </p:txBody>
+      </p:sp>
+      <p:sp>
+        <p:nvSpPr>
+          <p:cNvPr id="4" name="TextBox 3"/>
+          <p:cNvSpPr txBox="1"/>
+          <p:nvPr/>
+        </p:nvSpPr>
+        <p:spPr>
+          <a:xfrm>
+            <a:off x="502920" y="91440"/>
+            <a:ext cx="8778240" cy="1097280"/>
+          </a:xfrm>
+          <a:prstGeom prst="rect">
+            <a:avLst/>
+          </a:prstGeom>
+          <a:noFill/>
+        </p:spPr>
+        <p:txBody>
+          <a:bodyPr wrap="square" anchor="ctr">
+            <a:spAutoFit/>
+          </a:bodyPr>
+          <a:lstStyle/>
+          <a:p>
+            <a:pPr>
+              <a:spcAft>
+                <a:spcPts val="1400"/>
+              </a:spcAft>
+            </a:pPr>
+            <a:r>
+              <a:rPr sz="1100" b="1" i="0">
+                <a:solidFill>
+                  <a:srgbClr val="FFD2D2"/>
+                </a:solidFill>
+                <a:latin typeface="Calibri"/>
+              </a:rPr>
+              <a:t>BLOCK 3 · 55 MIN</a:t>
+            </a:r>
+          </a:p>
+          <a:p>
+            <a:r>
+              <a:rPr sz="2400" b="1" i="0">
+                <a:solidFill>
+                  <a:srgbClr val="FFFFFF"/>
+                </a:solidFill>
+                <a:latin typeface="Calibri"/>
+              </a:rPr>
+              <a:t>Energy Master Plan VIII — Coal Phase-Down</a:t>
+            </a:r>
+          </a:p>
+        </p:txBody>
+      </p:sp>
+      <p:pic>
+        <p:nvPicPr>
+          <p:cNvPr id="5" name="Picture 4" descr="GIZ_Logo.png"/>
+          <p:cNvPicPr>
+            <a:picLocks noChangeAspect="1"/>
+          </p:cNvPicPr>
+          <p:nvPr/>
+        </p:nvPicPr>
+        <p:blipFill>
+          <a:blip r:embed="rId2"/>
+          <a:stretch>
+            <a:fillRect/>
+          </a:stretch>
+        </p:blipFill>
+        <p:spPr>
+          <a:xfrm>
+            <a:off x="10454335" y="420624"/>
+            <a:ext cx="1590261" cy="438912"/>
+          </a:xfrm>
+          <a:prstGeom prst="rect">
+            <a:avLst/>
+          </a:prstGeom>
+        </p:spPr>
+      </p:pic>
+      <p:sp>
+        <p:nvSpPr>
+          <p:cNvPr id="6" name="Rectangle 5"/>
+          <p:cNvSpPr/>
+          <p:nvPr/>
+        </p:nvSpPr>
+        <p:spPr>
+          <a:xfrm>
+            <a:off x="0" y="6565392"/>
+            <a:ext cx="12191695" cy="292608"/>
+          </a:xfrm>
+          <a:prstGeom prst="rect">
+            <a:avLst/>
+          </a:prstGeom>
+          <a:solidFill>
+            <a:srgbClr val="FFFFFF"/>
+          </a:solidFill>
+          <a:ln>
+            <a:noFill/>
+          </a:ln>
+          <a:effectLst/>
+        </p:spPr>
+        <p:style>
+          <a:lnRef idx="1">
+            <a:schemeClr val="accent1"/>
+          </a:lnRef>
+          <a:fillRef idx="3">
+            <a:schemeClr val="accent1"/>
+          </a:fillRef>
+          <a:effectRef idx="2">
+            <a:schemeClr val="accent1"/>
+          </a:effectRef>
+          <a:fontRef idx="minor">
+            <a:schemeClr val="lt1"/>
+          </a:fontRef>
+        </p:style>
+        <p:txBody>
+          <a:bodyPr rtlCol="0" anchor="ctr"/>
+          <a:lstStyle/>
+          <a:p>
+            <a:pPr algn="ctr"/>
+            <a:endParaRPr/>
+          </a:p>
+        </p:txBody>
+      </p:sp>
+      <p:sp>
+        <p:nvSpPr>
+          <p:cNvPr id="7" name="TextBox 6"/>
+          <p:cNvSpPr txBox="1"/>
+          <p:nvPr/>
+        </p:nvSpPr>
+        <p:spPr>
+          <a:xfrm>
+            <a:off x="457200" y="6547104"/>
+            <a:ext cx="7315200" cy="274320"/>
+          </a:xfrm>
+          <a:prstGeom prst="rect">
+            <a:avLst/>
+          </a:prstGeom>
+          <a:noFill/>
+        </p:spPr>
+        <p:txBody>
+          <a:bodyPr wrap="none" tIns="0" bIns="0">
+            <a:spAutoFit/>
+          </a:bodyPr>
+          <a:lstStyle/>
+          <a:p>
+            <a:r>
+              <a:rPr sz="1000" b="0" i="0">
+                <a:solidFill>
+                  <a:srgbClr val="787878"/>
+                </a:solidFill>
+                <a:latin typeface="Calibri"/>
+              </a:rPr>
+              <a:t>DGE-METRIC Online Training — Online Day 2 — Thu 23 Jul 2026</a:t>
+            </a:r>
+          </a:p>
+        </p:txBody>
+      </p:sp>
+      <p:sp>
+        <p:nvSpPr>
+          <p:cNvPr id="8" name="TextBox 7"/>
+          <p:cNvSpPr txBox="1"/>
+          <p:nvPr/>
+        </p:nvSpPr>
+        <p:spPr>
+          <a:xfrm>
+            <a:off x="11002975" y="6547104"/>
+            <a:ext cx="822960" cy="274320"/>
+          </a:xfrm>
+          <a:prstGeom prst="rect">
+            <a:avLst/>
+          </a:prstGeom>
+          <a:noFill/>
+        </p:spPr>
+        <p:txBody>
+          <a:bodyPr wrap="none" tIns="0">
+            <a:spAutoFit/>
+          </a:bodyPr>
+          <a:lstStyle/>
+          <a:p>
+            <a:pPr algn="r"/>
+            <a:r>
+              <a:rPr sz="1000" b="0" i="0">
+                <a:solidFill>
+                  <a:srgbClr val="787878"/>
+                </a:solidFill>
+                <a:latin typeface="Calibri"/>
+              </a:rPr>
+              <a:t>14</a:t>
+            </a:r>
+          </a:p>
+        </p:txBody>
+      </p:sp>
+      <mc:AlternateContent xmlns:mc="http://schemas.openxmlformats.org/markup-compatibility/2006">
+        <mc:Choice xmlns:a14="http://schemas.microsoft.com/office/drawing/2010/main" Requires="a14">
+          <p:sp>
+            <p:nvSpPr>
+              <p:cNvPr id="9" name="TextBox 8"/>
+              <p:cNvSpPr txBox="1"/>
+              <p:nvPr/>
+            </p:nvSpPr>
+            <p:spPr>
+              <a:xfrm>
+                <a:off x="502920" y="1554480"/>
+                <a:ext cx="11185855" cy="1950277"/>
+              </a:xfrm>
+              <a:prstGeom prst="rect">
+                <a:avLst/>
+              </a:prstGeom>
+              <a:noFill/>
+            </p:spPr>
+            <p:txBody>
+              <a:bodyPr wrap="square">
+                <a:spAutoFit/>
+              </a:bodyPr>
+              <a:lstStyle/>
+              <a:p>
+                <a:pPr marL="0" indent="0">
+                  <a:spcAft>
+                    <a:spcPts val="1000"/>
+                  </a:spcAft>
+                </a:pPr>
+                <a:r>
+                  <a:rPr lang="en-US" sz="1700" b="0" i="0" dirty="0">
+                    <a:solidFill>
+                      <a:srgbClr val="232323"/>
+                    </a:solidFill>
+                    <a:latin typeface="Calibri"/>
+                  </a:rPr>
+                  <a:t>•  Coal imports decline by about 40% over the phase-down horizon; the model runs three variants</a:t>
+                </a:r>
+              </a:p>
+              <a:p>
+                <a:pPr marL="0" indent="0">
+                  <a:spcAft>
+                    <a:spcPts val="1000"/>
+                  </a:spcAft>
+                </a:pPr>
+                <a:r>
+                  <a:rPr lang="en-US" sz="1700" b="0" i="0" dirty="0">
+                    <a:solidFill>
+                      <a:srgbClr val="232323"/>
+                    </a:solidFill>
+                    <a:latin typeface="Calibri"/>
+                  </a:rPr>
+                  <a:t>•  A. Phase-down only: no policy response; energy services fall and GDP loses more</a:t>
+                </a:r>
+              </a:p>
+              <a:p>
+                <a:pPr marL="0" indent="0">
+                  <a:spcAft>
+                    <a:spcPts val="1000"/>
+                  </a:spcAft>
+                </a:pPr>
+                <a:r>
+                  <a:rPr lang="en-US" sz="1700" b="0" i="0" dirty="0">
+                    <a:solidFill>
+                      <a:srgbClr val="232323"/>
+                    </a:solidFill>
+                    <a:latin typeface="Calibri"/>
+                  </a:rPr>
+                  <a:t>•  B. Phase-down + high investment (</a:t>
+                </a:r>
+                <a14:m>
+                  <m:oMath xmlns:m="http://schemas.openxmlformats.org/officeDocument/2006/math">
+                    <m:sSub>
+                      <m:sSubPr>
+                        <m:ctrlPr>
+                          <a:rPr lang="en-US" sz="1700" b="0" i="1" smtClean="0">
+                            <a:solidFill>
+                              <a:srgbClr val="232323"/>
+                            </a:solidFill>
+                            <a:latin typeface="Cambria Math" panose="02040503050406030204" pitchFamily="18" charset="0"/>
+                          </a:rPr>
+                        </m:ctrlPr>
+                      </m:sSubPr>
+                      <m:e>
+                        <m:r>
+                          <a:rPr lang="en-US" sz="1700" b="0" i="1" smtClean="0">
+                            <a:solidFill>
+                              <a:srgbClr val="232323"/>
+                            </a:solidFill>
+                            <a:latin typeface="Cambria Math" panose="02040503050406030204" pitchFamily="18" charset="0"/>
+                          </a:rPr>
+                          <m:t>𝜙</m:t>
+                        </m:r>
+                      </m:e>
+                      <m:sub>
+                        <m:r>
+                          <a:rPr lang="en-US" sz="1700" b="0" i="1" smtClean="0">
+                            <a:solidFill>
+                              <a:srgbClr val="232323"/>
+                            </a:solidFill>
+                            <a:latin typeface="Cambria Math" panose="02040503050406030204" pitchFamily="18" charset="0"/>
+                          </a:rPr>
+                          <m:t>𝐼𝑄</m:t>
+                        </m:r>
+                      </m:sub>
+                    </m:sSub>
+                  </m:oMath>
+                </a14:m>
+                <a:r>
+                  <a:rPr lang="en-US" sz="1700" b="0" i="0" dirty="0">
+                    <a:solidFill>
+                      <a:srgbClr val="232323"/>
+                    </a:solidFill>
+                    <a:latin typeface="Calibri"/>
+                  </a:rPr>
+                  <a:t> = 0.08): clean-capacity build-out offsets some losses</a:t>
+                </a:r>
+              </a:p>
+              <a:p>
+                <a:pPr>
+                  <a:spcAft>
+                    <a:spcPts val="1000"/>
+                  </a:spcAft>
+                </a:pPr>
+                <a:r>
+                  <a:rPr lang="en-US" sz="1700" b="0" i="0" dirty="0">
+                    <a:solidFill>
+                      <a:srgbClr val="232323"/>
+                    </a:solidFill>
+                    <a:latin typeface="Calibri"/>
+                  </a:rPr>
+                  <a:t>•  C. Phase-down + reserve buffer (</a:t>
+                </a:r>
+                <a14:m>
+                  <m:oMath xmlns:m="http://schemas.openxmlformats.org/officeDocument/2006/math">
+                    <m:sSub>
+                      <m:sSubPr>
+                        <m:ctrlPr>
+                          <a:rPr lang="en-US" sz="1700" i="1">
+                            <a:solidFill>
+                              <a:srgbClr val="232323"/>
+                            </a:solidFill>
+                            <a:latin typeface="Cambria Math" panose="02040503050406030204" pitchFamily="18" charset="0"/>
+                          </a:rPr>
+                        </m:ctrlPr>
+                      </m:sSubPr>
+                      <m:e>
+                        <m:r>
+                          <a:rPr lang="en-US" sz="1700" i="1">
+                            <a:solidFill>
+                              <a:srgbClr val="232323"/>
+                            </a:solidFill>
+                            <a:latin typeface="Cambria Math" panose="02040503050406030204" pitchFamily="18" charset="0"/>
+                          </a:rPr>
+                          <m:t>𝜙</m:t>
+                        </m:r>
+                      </m:e>
+                      <m:sub>
+                        <m:r>
+                          <a:rPr lang="en-US" sz="1700" b="0" i="1" smtClean="0">
+                            <a:solidFill>
+                              <a:srgbClr val="232323"/>
+                            </a:solidFill>
+                            <a:latin typeface="Cambria Math" panose="02040503050406030204" pitchFamily="18" charset="0"/>
+                          </a:rPr>
+                          <m:t>𝑅</m:t>
+                        </m:r>
+                      </m:sub>
+                    </m:sSub>
+                    <m:r>
+                      <a:rPr lang="en-US" sz="1700" i="1">
+                        <a:solidFill>
+                          <a:srgbClr val="232323"/>
+                        </a:solidFill>
+                        <a:latin typeface="Cambria Math" panose="02040503050406030204" pitchFamily="18" charset="0"/>
+                      </a:rPr>
+                      <m:t> </m:t>
+                    </m:r>
+                  </m:oMath>
+                </a14:m>
+                <a:r>
+                  <a:rPr lang="en-US" sz="1700" b="0" i="0" dirty="0">
+                    <a:solidFill>
+                      <a:srgbClr val="232323"/>
+                    </a:solidFill>
+                    <a:latin typeface="Calibri"/>
+                  </a:rPr>
+                  <a:t>= 1.0): coal reserves smooth the supply gap</a:t>
+                </a:r>
+              </a:p>
+              <a:p>
+                <a:pPr marL="0" indent="0">
+                  <a:spcAft>
+                    <a:spcPts val="1000"/>
+                  </a:spcAft>
+                </a:pPr>
+                <a:r>
+                  <a:rPr lang="en-US" sz="1700" b="1" i="0" dirty="0">
+                    <a:solidFill>
+                      <a:srgbClr val="232323"/>
+                    </a:solidFill>
+                    <a:latin typeface="Calibri"/>
+                  </a:rPr>
+                  <a:t>•  Interpretation: reserves, investment, and the transition path are all part of the adjustment package</a:t>
+                </a:r>
+                <a:endParaRPr sz="1700" b="1" i="0" dirty="0">
+                  <a:solidFill>
+                    <a:srgbClr val="232323"/>
+                  </a:solidFill>
+                  <a:latin typeface="Calibri"/>
+                </a:endParaRPr>
+              </a:p>
+            </p:txBody>
+          </p:sp>
+        </mc:Choice>
+        <mc:Fallback>
+          <p:sp>
+            <p:nvSpPr>
+              <p:cNvPr id="9" name="TextBox 8"/>
+              <p:cNvSpPr txBox="1">
+                <a:spLocks noRot="1" noChangeAspect="1" noMove="1" noResize="1" noEditPoints="1" noAdjustHandles="1" noChangeArrowheads="1" noChangeShapeType="1" noTextEdit="1"/>
+              </p:cNvSpPr>
+              <p:nvPr/>
+            </p:nvSpPr>
+            <p:spPr>
+              <a:xfrm>
+                <a:off x="502920" y="1554480"/>
+                <a:ext cx="11185855" cy="1950277"/>
+              </a:xfrm>
+              <a:prstGeom prst="rect">
+                <a:avLst/>
+              </a:prstGeom>
+              <a:blipFill>
+                <a:blip r:embed="rId3"/>
+                <a:stretch>
+                  <a:fillRect l="-382" t="-938" b="-2188"/>
+                </a:stretch>
+              </a:blipFill>
+            </p:spPr>
+            <p:txBody>
+              <a:bodyPr/>
+              <a:lstStyle/>
+              <a:p>
+                <a:r>
+                  <a:rPr lang="en-DE">
+                    <a:noFill/>
+                  </a:rPr>
+                  <a:t> </a:t>
+                </a:r>
+              </a:p>
+            </p:txBody>
+          </p:sp>
+        </mc:Fallback>
+      </mc:AlternateContent>
+    </p:spTree>
+  </p:cSld>
+  <p:clrMapOvr>
+    <a:masterClrMapping/>
+  </p:clrMapOvr>
+</p:sld>
+</file>
+
+<file path=ppt/slides/slide18.xml><?xml version="1.0" encoding="utf-8"?>
+<p:sld xmlns:a="http://schemas.openxmlformats.org/drawingml/2006/main" xmlns:r="http://schemas.openxmlformats.org/officeDocument/2006/relationships" xmlns:p="http://schemas.openxmlformats.org/presentationml/2006/main">
+  <p:cSld>
+    <p:spTree>
+      <p:nvGrpSpPr>
+        <p:cNvPr id="1" name=""/>
+        <p:cNvGrpSpPr/>
+        <p:nvPr/>
+      </p:nvGrpSpPr>
+      <p:grpSpPr>
+        <a:xfrm>
+          <a:off x="0" y="0"/>
+          <a:ext cx="0" cy="0"/>
+          <a:chOff x="0" y="0"/>
+          <a:chExt cx="0" cy="0"/>
+        </a:xfrm>
+      </p:grpSpPr>
+      <p:sp>
+        <p:nvSpPr>
+          <p:cNvPr id="2" name="Rectangle 1"/>
+          <p:cNvSpPr/>
+          <p:nvPr/>
+        </p:nvSpPr>
+        <p:spPr>
+          <a:xfrm>
+            <a:off x="0" y="0"/>
+            <a:ext cx="12191695" cy="6858000"/>
+          </a:xfrm>
+          <a:prstGeom prst="rect">
+            <a:avLst/>
+          </a:prstGeom>
+          <a:solidFill>
+            <a:srgbClr val="CC071E"/>
+          </a:solidFill>
+          <a:ln>
+            <a:noFill/>
+          </a:ln>
+          <a:effectLst/>
+        </p:spPr>
+        <p:style>
+          <a:lnRef idx="1">
+            <a:schemeClr val="accent1"/>
+          </a:lnRef>
+          <a:fillRef idx="3">
+            <a:schemeClr val="accent1"/>
+          </a:fillRef>
+          <a:effectRef idx="2">
+            <a:schemeClr val="accent1"/>
+          </a:effectRef>
+          <a:fontRef idx="minor">
+            <a:schemeClr val="lt1"/>
+          </a:fontRef>
+        </p:style>
+        <p:txBody>
+          <a:bodyPr rtlCol="0" anchor="ctr"/>
+          <a:lstStyle/>
+          <a:p>
+            <a:pPr algn="ctr"/>
+            <a:endParaRPr/>
           </a:p>
         </p:txBody>
       </p:sp>
@@ -6653,7 +8849,7 @@
                 </a:solidFill>
                 <a:latin typeface="Calibri"/>
               </a:rPr>
-              <a:t>Next: where would this live in the DGE-METRIC codebase?</a:t>
+              <a:t>Next: implementation architecture and your plan</a:t>
             </a:r>
           </a:p>
         </p:txBody>
@@ -6666,8 +8862,8 @@
 </p:sld>
 </file>
 
-<file path=ppt/slides/slide18.xml><?xml version="1.0" encoding="utf-8"?>
-<p:sld xmlns:a="http://schemas.openxmlformats.org/drawingml/2006/main" xmlns:p="http://schemas.openxmlformats.org/presentationml/2006/main" xmlns:r="http://schemas.openxmlformats.org/officeDocument/2006/relationships">
+<file path=ppt/slides/slide19.xml><?xml version="1.0" encoding="utf-8"?>
+<p:sld xmlns:a="http://schemas.openxmlformats.org/drawingml/2006/main" xmlns:r="http://schemas.openxmlformats.org/officeDocument/2006/relationships" xmlns:p="http://schemas.openxmlformats.org/presentationml/2006/main">
   <p:cSld>
     <p:spTree>
       <p:nvGrpSpPr>
@@ -6675,7 +8871,14 @@
         <p:cNvGrpSpPr/>
         <p:nvPr/>
       </p:nvGrpSpPr>
-      <p:grpSpPr/>
+      <p:grpSpPr>
+        <a:xfrm>
+          <a:off x="0" y="0"/>
+          <a:ext cx="0" cy="0"/>
+          <a:chOff x="0" y="0"/>
+          <a:chExt cx="0" cy="0"/>
+        </a:xfrm>
+      </p:grpSpPr>
       <p:sp>
         <p:nvSpPr>
           <p:cNvPr id="2" name="Rectangle 1"/>
@@ -6717,6 +8920,7 @@
           <a:lstStyle/>
           <a:p>
             <a:pPr algn="ctr"/>
+            <a:endParaRPr/>
           </a:p>
         </p:txBody>
       </p:sp>
@@ -6761,6 +8965,7 @@
           <a:lstStyle/>
           <a:p>
             <a:pPr algn="ctr"/>
+            <a:endParaRPr/>
           </a:p>
         </p:txBody>
       </p:sp>
@@ -6798,7 +9003,7 @@
                 </a:solidFill>
                 <a:latin typeface="Calibri"/>
               </a:rPr>
-              <a:t>BLOCK 5 · 35 MIN</a:t>
+              <a:t>BLOCK 4 · 70 MIN</a:t>
             </a:r>
           </a:p>
           <a:p>
@@ -6809,7 +9014,7 @@
                 </a:solidFill>
                 <a:latin typeface="Calibri"/>
               </a:rPr>
-              <a:t>Implementation: Where This Would Live in DGE-METRIC</a:t>
+              <a:t>Joint Optimal Policy Search</a:t>
             </a:r>
           </a:p>
         </p:txBody>
@@ -6879,6 +9084,7 @@
           <a:lstStyle/>
           <a:p>
             <a:pPr algn="ctr"/>
+            <a:endParaRPr/>
           </a:p>
         </p:txBody>
       </p:sp>
@@ -6946,98 +9152,669 @@
                 </a:solidFill>
                 <a:latin typeface="Calibri"/>
               </a:rPr>
-              <a:t>14</a:t>
-            </a:r>
-          </a:p>
-        </p:txBody>
-      </p:sp>
-      <p:sp>
-        <p:nvSpPr>
-          <p:cNvPr id="9" name="TextBox 8"/>
-          <p:cNvSpPr txBox="1"/>
-          <p:nvPr/>
-        </p:nvSpPr>
-        <p:spPr>
-          <a:xfrm>
-            <a:off x="502920" y="1554480"/>
-            <a:ext cx="11185855" cy="4892040"/>
-          </a:xfrm>
-          <a:prstGeom prst="rect">
-            <a:avLst/>
-          </a:prstGeom>
-          <a:noFill/>
-        </p:spPr>
-        <p:txBody>
-          <a:bodyPr wrap="square">
-            <a:spAutoFit/>
-          </a:bodyPr>
-          <a:lstStyle/>
-          <a:p>
-            <a:pPr marL="0" indent="0">
-              <a:spcAft>
-                <a:spcPts val="1000"/>
-              </a:spcAft>
-            </a:pPr>
-            <a:r>
-              <a:rPr sz="1700" b="1" i="0">
-                <a:solidFill>
-                  <a:srgbClr val="232323"/>
-                </a:solidFill>
-                <a:latin typeface="Calibri"/>
-              </a:rPr>
-              <a:t>•  Reusing the structure-vs-calibration pattern from model modification:</a:t>
-            </a:r>
-          </a:p>
-          <a:p>
-            <a:pPr marL="0" indent="0">
-              <a:spcAft>
-                <a:spcPts val="1000"/>
-              </a:spcAft>
-            </a:pPr>
-            <a:r>
-              <a:rPr sz="1700" b="0" i="0">
-                <a:solidFill>
-                  <a:srgbClr val="232323"/>
-                </a:solidFill>
-                <a:latin typeface="Calibri"/>
-              </a:rPr>
-              <a:t>•  Most plausibly: a post-processing script reading existing DGE-METRIC outputs (energy-carrier demand, import dependence, GDP/investment/fiscal paths) — arithmetic on top of run outputs, not a new structural relationship</a:t>
-            </a:r>
-          </a:p>
-          <a:p>
-            <a:pPr marL="0" indent="0">
-              <a:spcAft>
-                <a:spcPts val="1000"/>
-              </a:spcAft>
-            </a:pPr>
-            <a:r>
-              <a:rPr sz="1700" b="0" i="0">
-                <a:solidFill>
-                  <a:srgbClr val="232323"/>
-                </a:solidFill>
-                <a:latin typeface="Calibri"/>
-              </a:rPr>
-              <a:t>•  If a genuinely endogenous crisis-cost channel were needed inside the model itself, that piece would belong in ModFiles/, with calibration in Functions/ or ExcelFiles/</a:t>
-            </a:r>
-          </a:p>
-          <a:p>
-            <a:pPr marL="0" indent="0">
-              <a:spcAft>
-                <a:spcPts val="1000"/>
-              </a:spcAft>
-            </a:pPr>
-            <a:r>
-              <a:rPr sz="1700" b="1" i="0">
-                <a:solidFill>
-                  <a:srgbClr val="232323"/>
-                </a:solidFill>
-                <a:latin typeface="Calibri"/>
-              </a:rPr>
-              <a:t>•  This implementation pattern is itself provisional until the DGE-METRIC formula is confirmed — teach it as an approach, not a confirmed design</a:t>
-            </a:r>
-          </a:p>
-        </p:txBody>
-      </p:sp>
+              <a:t>15</a:t>
+            </a:r>
+          </a:p>
+        </p:txBody>
+      </p:sp>
+      <mc:AlternateContent xmlns:mc="http://schemas.openxmlformats.org/markup-compatibility/2006">
+        <mc:Choice xmlns:a14="http://schemas.microsoft.com/office/drawing/2010/main" Requires="a14">
+          <p:sp>
+            <p:nvSpPr>
+              <p:cNvPr id="9" name="TextBox 8"/>
+              <p:cNvSpPr txBox="1"/>
+              <p:nvPr/>
+            </p:nvSpPr>
+            <p:spPr>
+              <a:xfrm>
+                <a:off x="502920" y="1554480"/>
+                <a:ext cx="11185855" cy="1978619"/>
+              </a:xfrm>
+              <a:prstGeom prst="rect">
+                <a:avLst/>
+              </a:prstGeom>
+              <a:noFill/>
+            </p:spPr>
+            <p:txBody>
+              <a:bodyPr wrap="square">
+                <a:spAutoFit/>
+              </a:bodyPr>
+              <a:lstStyle/>
+              <a:p>
+                <a:pPr>
+                  <a:spcAft>
+                    <a:spcPts val="1000"/>
+                  </a:spcAft>
+                </a:pPr>
+                <a:r>
+                  <a:rPr lang="pt-PT" sz="1700" b="0" i="0" dirty="0">
+                    <a:solidFill>
+                      <a:srgbClr val="232323"/>
+                    </a:solidFill>
+                    <a:latin typeface="Calibri"/>
+                  </a:rPr>
+                  <a:t>•  The key computation is a 3D Monte Carlo grid over </a:t>
+                </a:r>
+                <a14:m>
+                  <m:oMath xmlns:m="http://schemas.openxmlformats.org/officeDocument/2006/math">
+                    <m:sSub>
+                      <m:sSubPr>
+                        <m:ctrlPr>
+                          <a:rPr lang="en-US" sz="1700" b="0" i="1" smtClean="0">
+                            <a:solidFill>
+                              <a:srgbClr val="232323"/>
+                            </a:solidFill>
+                            <a:latin typeface="Cambria Math" panose="02040503050406030204" pitchFamily="18" charset="0"/>
+                          </a:rPr>
+                        </m:ctrlPr>
+                      </m:sSubPr>
+                      <m:e>
+                        <m:r>
+                          <a:rPr lang="en-US" sz="1700" b="0" i="1" smtClean="0">
+                            <a:solidFill>
+                              <a:srgbClr val="232323"/>
+                            </a:solidFill>
+                            <a:latin typeface="Cambria Math" panose="02040503050406030204" pitchFamily="18" charset="0"/>
+                          </a:rPr>
+                          <m:t>𝜙</m:t>
+                        </m:r>
+                      </m:e>
+                      <m:sub>
+                        <m:r>
+                          <a:rPr lang="en-US" sz="1700" b="0" i="1" smtClean="0">
+                            <a:solidFill>
+                              <a:srgbClr val="232323"/>
+                            </a:solidFill>
+                            <a:latin typeface="Cambria Math" panose="02040503050406030204" pitchFamily="18" charset="0"/>
+                          </a:rPr>
+                          <m:t>𝑅</m:t>
+                        </m:r>
+                      </m:sub>
+                    </m:sSub>
+                    <m:r>
+                      <a:rPr lang="en-US" sz="1700" b="0" i="1" smtClean="0">
+                        <a:solidFill>
+                          <a:srgbClr val="232323"/>
+                        </a:solidFill>
+                        <a:latin typeface="Cambria Math" panose="02040503050406030204" pitchFamily="18" charset="0"/>
+                      </a:rPr>
+                      <m:t> </m:t>
+                    </m:r>
+                  </m:oMath>
+                </a14:m>
+                <a:r>
+                  <a:rPr lang="pt-PT" sz="1700" b="0" i="0" dirty="0">
+                    <a:solidFill>
+                      <a:srgbClr val="232323"/>
+                    </a:solidFill>
+                    <a:latin typeface="Calibri"/>
+                  </a:rPr>
+                  <a:t>× </a:t>
+                </a:r>
+                <a14:m>
+                  <m:oMath xmlns:m="http://schemas.openxmlformats.org/officeDocument/2006/math">
+                    <m:sSub>
+                      <m:sSubPr>
+                        <m:ctrlPr>
+                          <a:rPr lang="en-US" sz="1700" i="1">
+                            <a:solidFill>
+                              <a:srgbClr val="232323"/>
+                            </a:solidFill>
+                            <a:latin typeface="Cambria Math" panose="02040503050406030204" pitchFamily="18" charset="0"/>
+                          </a:rPr>
+                        </m:ctrlPr>
+                      </m:sSubPr>
+                      <m:e>
+                        <m:r>
+                          <a:rPr lang="en-US" sz="1700" i="1">
+                            <a:solidFill>
+                              <a:srgbClr val="232323"/>
+                            </a:solidFill>
+                            <a:latin typeface="Cambria Math" panose="02040503050406030204" pitchFamily="18" charset="0"/>
+                          </a:rPr>
+                          <m:t>𝜙</m:t>
+                        </m:r>
+                      </m:e>
+                      <m:sub>
+                        <m:r>
+                          <a:rPr lang="en-US" sz="1700" b="0" i="1" smtClean="0">
+                            <a:solidFill>
+                              <a:srgbClr val="232323"/>
+                            </a:solidFill>
+                            <a:latin typeface="Cambria Math" panose="02040503050406030204" pitchFamily="18" charset="0"/>
+                          </a:rPr>
+                          <m:t>𝐼𝑄</m:t>
+                        </m:r>
+                      </m:sub>
+                    </m:sSub>
+                    <m:r>
+                      <a:rPr lang="en-US" sz="1700" i="1">
+                        <a:solidFill>
+                          <a:srgbClr val="232323"/>
+                        </a:solidFill>
+                        <a:latin typeface="Cambria Math" panose="02040503050406030204" pitchFamily="18" charset="0"/>
+                      </a:rPr>
+                      <m:t> </m:t>
+                    </m:r>
+                  </m:oMath>
+                </a14:m>
+                <a:r>
+                  <a:rPr lang="pt-PT" sz="1700" b="0" i="0" dirty="0">
+                    <a:solidFill>
+                      <a:srgbClr val="232323"/>
+                    </a:solidFill>
+                    <a:latin typeface="Calibri"/>
+                  </a:rPr>
+                  <a:t> × </a:t>
+                </a:r>
+                <a14:m>
+                  <m:oMath xmlns:m="http://schemas.openxmlformats.org/officeDocument/2006/math">
+                    <m:r>
+                      <m:rPr>
+                        <m:sty m:val="p"/>
+                      </m:rPr>
+                      <a:rPr lang="en-US" sz="1700" b="0" i="0" smtClean="0">
+                        <a:solidFill>
+                          <a:srgbClr val="232323"/>
+                        </a:solidFill>
+                        <a:latin typeface="Cambria Math" panose="02040503050406030204" pitchFamily="18" charset="0"/>
+                      </a:rPr>
+                      <m:t>d</m:t>
+                    </m:r>
+                  </m:oMath>
+                </a14:m>
+                <a:endParaRPr lang="pt-PT" sz="1700" b="0" i="0" dirty="0">
+                  <a:solidFill>
+                    <a:srgbClr val="232323"/>
+                  </a:solidFill>
+                  <a:latin typeface="Calibri"/>
+                </a:endParaRPr>
+              </a:p>
+              <a:p>
+                <a:pPr>
+                  <a:spcAft>
+                    <a:spcPts val="1000"/>
+                  </a:spcAft>
+                </a:pPr>
+                <a:r>
+                  <a:rPr lang="pt-PT" sz="1700" b="0" i="0" dirty="0">
+                    <a:solidFill>
+                      <a:srgbClr val="232323"/>
+                    </a:solidFill>
+                    <a:latin typeface="Calibri"/>
+                  </a:rPr>
+                  <a:t>•  The script searches for the joint optimum (</a:t>
+                </a:r>
+                <a14:m>
+                  <m:oMath xmlns:m="http://schemas.openxmlformats.org/officeDocument/2006/math">
+                    <m:sSubSup>
+                      <m:sSubSupPr>
+                        <m:ctrlPr>
+                          <a:rPr lang="en-US" sz="1700" b="0" i="1" smtClean="0">
+                            <a:solidFill>
+                              <a:srgbClr val="232323"/>
+                            </a:solidFill>
+                            <a:latin typeface="Cambria Math" panose="02040503050406030204" pitchFamily="18" charset="0"/>
+                          </a:rPr>
+                        </m:ctrlPr>
+                      </m:sSubSupPr>
+                      <m:e>
+                        <m:r>
+                          <a:rPr lang="ar-AE" sz="1700" i="1">
+                            <a:solidFill>
+                              <a:srgbClr val="232323"/>
+                            </a:solidFill>
+                            <a:latin typeface="Cambria Math" panose="02040503050406030204" pitchFamily="18" charset="0"/>
+                          </a:rPr>
+                          <m:t>𝜙</m:t>
+                        </m:r>
+                      </m:e>
+                      <m:sub>
+                        <m:r>
+                          <a:rPr lang="ar-AE" sz="1700" i="1">
+                            <a:solidFill>
+                              <a:srgbClr val="232323"/>
+                            </a:solidFill>
+                            <a:latin typeface="Cambria Math" panose="02040503050406030204" pitchFamily="18" charset="0"/>
+                          </a:rPr>
+                          <m:t>𝑅</m:t>
+                        </m:r>
+                      </m:sub>
+                      <m:sup>
+                        <m:r>
+                          <a:rPr lang="en-US" sz="1700" b="0" i="1" smtClean="0">
+                            <a:solidFill>
+                              <a:srgbClr val="232323"/>
+                            </a:solidFill>
+                            <a:latin typeface="Cambria Math" panose="02040503050406030204" pitchFamily="18" charset="0"/>
+                          </a:rPr>
+                          <m:t>∗</m:t>
+                        </m:r>
+                      </m:sup>
+                    </m:sSubSup>
+                    <m:r>
+                      <a:rPr lang="ar-AE" sz="1700" i="1">
+                        <a:solidFill>
+                          <a:srgbClr val="232323"/>
+                        </a:solidFill>
+                        <a:latin typeface="Cambria Math" panose="02040503050406030204" pitchFamily="18" charset="0"/>
+                      </a:rPr>
+                      <m:t> </m:t>
+                    </m:r>
+                  </m:oMath>
+                </a14:m>
+                <a:r>
+                  <a:rPr lang="pt-PT" sz="1700" b="0" i="0" dirty="0">
+                    <a:solidFill>
+                      <a:srgbClr val="232323"/>
+                    </a:solidFill>
+                    <a:latin typeface="Calibri"/>
+                  </a:rPr>
+                  <a:t>, </a:t>
+                </a:r>
+                <a14:m>
+                  <m:oMath xmlns:m="http://schemas.openxmlformats.org/officeDocument/2006/math">
+                    <m:sSubSup>
+                      <m:sSubSupPr>
+                        <m:ctrlPr>
+                          <a:rPr lang="en-US" sz="1700" i="1">
+                            <a:solidFill>
+                              <a:srgbClr val="232323"/>
+                            </a:solidFill>
+                            <a:latin typeface="Cambria Math" panose="02040503050406030204" pitchFamily="18" charset="0"/>
+                          </a:rPr>
+                        </m:ctrlPr>
+                      </m:sSubSupPr>
+                      <m:e>
+                        <m:r>
+                          <a:rPr lang="ar-AE" sz="1700" i="1">
+                            <a:solidFill>
+                              <a:srgbClr val="232323"/>
+                            </a:solidFill>
+                            <a:latin typeface="Cambria Math" panose="02040503050406030204" pitchFamily="18" charset="0"/>
+                          </a:rPr>
+                          <m:t>𝜙</m:t>
+                        </m:r>
+                      </m:e>
+                      <m:sub>
+                        <m:r>
+                          <a:rPr lang="en-US" sz="1700" b="0" i="1" smtClean="0">
+                            <a:solidFill>
+                              <a:srgbClr val="232323"/>
+                            </a:solidFill>
+                            <a:latin typeface="Cambria Math" panose="02040503050406030204" pitchFamily="18" charset="0"/>
+                          </a:rPr>
+                          <m:t>𝐼𝑄</m:t>
+                        </m:r>
+                      </m:sub>
+                      <m:sup>
+                        <m:r>
+                          <a:rPr lang="en-US" sz="1700" i="1">
+                            <a:solidFill>
+                              <a:srgbClr val="232323"/>
+                            </a:solidFill>
+                            <a:latin typeface="Cambria Math" panose="02040503050406030204" pitchFamily="18" charset="0"/>
+                          </a:rPr>
+                          <m:t>∗</m:t>
+                        </m:r>
+                      </m:sup>
+                    </m:sSubSup>
+                  </m:oMath>
+                </a14:m>
+                <a:r>
+                  <a:rPr lang="pt-PT" sz="1700" b="0" i="0" dirty="0">
+                    <a:solidFill>
+                      <a:srgbClr val="232323"/>
+                    </a:solidFill>
+                    <a:latin typeface="Calibri"/>
+                  </a:rPr>
+                  <a:t>, </a:t>
+                </a:r>
+                <a14:m>
+                  <m:oMath xmlns:m="http://schemas.openxmlformats.org/officeDocument/2006/math">
+                    <m:sSup>
+                      <m:sSupPr>
+                        <m:ctrlPr>
+                          <a:rPr lang="en-US" sz="1700" b="0" i="1" smtClean="0">
+                            <a:solidFill>
+                              <a:srgbClr val="232323"/>
+                            </a:solidFill>
+                            <a:latin typeface="Cambria Math" panose="02040503050406030204" pitchFamily="18" charset="0"/>
+                          </a:rPr>
+                        </m:ctrlPr>
+                      </m:sSupPr>
+                      <m:e>
+                        <m:r>
+                          <a:rPr lang="en-US" sz="1700" b="0" i="1" smtClean="0">
+                            <a:solidFill>
+                              <a:srgbClr val="232323"/>
+                            </a:solidFill>
+                            <a:latin typeface="Cambria Math" panose="02040503050406030204" pitchFamily="18" charset="0"/>
+                          </a:rPr>
+                          <m:t>𝑑</m:t>
+                        </m:r>
+                      </m:e>
+                      <m:sup>
+                        <m:r>
+                          <a:rPr lang="en-US" sz="1700" b="0" i="1" smtClean="0">
+                            <a:solidFill>
+                              <a:srgbClr val="232323"/>
+                            </a:solidFill>
+                            <a:latin typeface="Cambria Math" panose="02040503050406030204" pitchFamily="18" charset="0"/>
+                          </a:rPr>
+                          <m:t>∗</m:t>
+                        </m:r>
+                      </m:sup>
+                    </m:sSup>
+                  </m:oMath>
+                </a14:m>
+                <a:r>
+                  <a:rPr lang="pt-PT" sz="1700" b="0" i="0" dirty="0">
+                    <a:solidFill>
+                      <a:srgbClr val="232323"/>
+                    </a:solidFill>
+                    <a:latin typeface="Calibri"/>
+                  </a:rPr>
+                  <a:t>) simultaneously</a:t>
+                </a:r>
+              </a:p>
+              <a:p>
+                <a:pPr marL="0" indent="0">
+                  <a:spcAft>
+                    <a:spcPts val="1000"/>
+                  </a:spcAft>
+                </a:pPr>
+                <a:r>
+                  <a:rPr lang="pt-PT" sz="1700" b="1" i="0" dirty="0">
+                    <a:solidFill>
+                      <a:srgbClr val="232323"/>
+                    </a:solidFill>
+                    <a:latin typeface="Calibri"/>
+                  </a:rPr>
+                  <a:t>•  Sequential </a:t>
+                </a:r>
+                <a:r>
+                  <a:rPr lang="pt-PT" sz="1700" b="1" i="0" dirty="0" err="1">
+                    <a:solidFill>
+                      <a:srgbClr val="232323"/>
+                    </a:solidFill>
+                    <a:latin typeface="Calibri"/>
+                  </a:rPr>
+                  <a:t>optimisation</a:t>
+                </a:r>
+                <a:r>
+                  <a:rPr lang="pt-PT" sz="1700" b="1" i="0" dirty="0">
+                    <a:solidFill>
+                      <a:srgbClr val="232323"/>
+                    </a:solidFill>
+                    <a:latin typeface="Calibri"/>
+                  </a:rPr>
+                  <a:t> is inconsistent here because drawdown policy and reserve size are strategic complements</a:t>
+                </a:r>
+              </a:p>
+              <a:p>
+                <a:pPr>
+                  <a:spcAft>
+                    <a:spcPts val="1000"/>
+                  </a:spcAft>
+                </a:pPr>
+                <a:r>
+                  <a:rPr lang="pt-PT" sz="1700" b="0" i="0" dirty="0">
+                    <a:solidFill>
+                      <a:srgbClr val="232323"/>
+                    </a:solidFill>
+                    <a:latin typeface="Calibri"/>
+                  </a:rPr>
+                  <a:t>•  The objective is </a:t>
+                </a:r>
+                <a14:m>
+                  <m:oMath xmlns:m="http://schemas.openxmlformats.org/officeDocument/2006/math">
+                    <m:r>
+                      <a:rPr lang="en-US" sz="1700" b="0" i="1" smtClean="0">
+                        <a:solidFill>
+                          <a:srgbClr val="232323"/>
+                        </a:solidFill>
+                        <a:latin typeface="Cambria Math" panose="02040503050406030204" pitchFamily="18" charset="0"/>
+                      </a:rPr>
+                      <m:t>𝐸</m:t>
+                    </m:r>
+                    <m:r>
+                      <a:rPr lang="en-US" sz="1700" b="0" i="1" smtClean="0">
+                        <a:solidFill>
+                          <a:srgbClr val="232323"/>
+                        </a:solidFill>
+                        <a:latin typeface="Cambria Math" panose="02040503050406030204" pitchFamily="18" charset="0"/>
+                      </a:rPr>
+                      <m:t>[</m:t>
+                    </m:r>
+                    <m:r>
+                      <a:rPr lang="en-US" sz="1700" b="0" i="1" smtClean="0">
+                        <a:solidFill>
+                          <a:srgbClr val="232323"/>
+                        </a:solidFill>
+                        <a:latin typeface="Cambria Math" panose="02040503050406030204" pitchFamily="18" charset="0"/>
+                      </a:rPr>
+                      <m:t>𝑊</m:t>
+                    </m:r>
+                  </m:oMath>
+                </a14:m>
+                <a:r>
+                  <a:rPr lang="pt-PT" sz="1700" b="0" i="0" dirty="0">
+                    <a:solidFill>
+                      <a:srgbClr val="232323"/>
+                    </a:solidFill>
+                    <a:latin typeface="Calibri"/>
+                  </a:rPr>
+                  <a:t>(</a:t>
+                </a:r>
+                <a14:m>
+                  <m:oMath xmlns:m="http://schemas.openxmlformats.org/officeDocument/2006/math">
+                    <m:sSub>
+                      <m:sSubPr>
+                        <m:ctrlPr>
+                          <a:rPr lang="en-US" sz="1700" i="1">
+                            <a:solidFill>
+                              <a:srgbClr val="232323"/>
+                            </a:solidFill>
+                            <a:latin typeface="Cambria Math" panose="02040503050406030204" pitchFamily="18" charset="0"/>
+                          </a:rPr>
+                        </m:ctrlPr>
+                      </m:sSubPr>
+                      <m:e>
+                        <m:r>
+                          <a:rPr lang="en-US" sz="1700" i="1">
+                            <a:solidFill>
+                              <a:srgbClr val="232323"/>
+                            </a:solidFill>
+                            <a:latin typeface="Cambria Math" panose="02040503050406030204" pitchFamily="18" charset="0"/>
+                          </a:rPr>
+                          <m:t>𝜙</m:t>
+                        </m:r>
+                      </m:e>
+                      <m:sub>
+                        <m:r>
+                          <a:rPr lang="en-US" sz="1700" b="0" i="1" smtClean="0">
+                            <a:solidFill>
+                              <a:srgbClr val="232323"/>
+                            </a:solidFill>
+                            <a:latin typeface="Cambria Math" panose="02040503050406030204" pitchFamily="18" charset="0"/>
+                          </a:rPr>
+                          <m:t>𝑅</m:t>
+                        </m:r>
+                      </m:sub>
+                    </m:sSub>
+                  </m:oMath>
+                </a14:m>
+                <a:r>
+                  <a:rPr lang="pt-PT" sz="1700" dirty="0">
+                    <a:solidFill>
+                      <a:srgbClr val="232323"/>
+                    </a:solidFill>
+                  </a:rPr>
+                  <a:t>,</a:t>
+                </a:r>
+                <a:r>
+                  <a:rPr lang="en-US" sz="1700" dirty="0">
+                    <a:solidFill>
+                      <a:srgbClr val="232323"/>
+                    </a:solidFill>
+                  </a:rPr>
+                  <a:t> </a:t>
+                </a:r>
+                <a14:m>
+                  <m:oMath xmlns:m="http://schemas.openxmlformats.org/officeDocument/2006/math">
+                    <m:sSub>
+                      <m:sSubPr>
+                        <m:ctrlPr>
+                          <a:rPr lang="en-US" sz="1700" i="1">
+                            <a:solidFill>
+                              <a:srgbClr val="232323"/>
+                            </a:solidFill>
+                            <a:latin typeface="Cambria Math" panose="02040503050406030204" pitchFamily="18" charset="0"/>
+                          </a:rPr>
+                        </m:ctrlPr>
+                      </m:sSubPr>
+                      <m:e>
+                        <m:r>
+                          <a:rPr lang="en-US" sz="1700" i="1">
+                            <a:solidFill>
+                              <a:srgbClr val="232323"/>
+                            </a:solidFill>
+                            <a:latin typeface="Cambria Math" panose="02040503050406030204" pitchFamily="18" charset="0"/>
+                          </a:rPr>
+                          <m:t>𝜙</m:t>
+                        </m:r>
+                      </m:e>
+                      <m:sub>
+                        <m:r>
+                          <a:rPr lang="en-US" sz="1700" i="1">
+                            <a:solidFill>
+                              <a:srgbClr val="232323"/>
+                            </a:solidFill>
+                            <a:latin typeface="Cambria Math" panose="02040503050406030204" pitchFamily="18" charset="0"/>
+                          </a:rPr>
+                          <m:t>𝐼𝑄</m:t>
+                        </m:r>
+                      </m:sub>
+                    </m:sSub>
+                  </m:oMath>
+                </a14:m>
+                <a:r>
+                  <a:rPr lang="pt-PT" sz="1700" dirty="0">
+                    <a:solidFill>
+                      <a:srgbClr val="232323"/>
+                    </a:solidFill>
+                  </a:rPr>
+                  <a:t>,</a:t>
+                </a:r>
+                <a14:m>
+                  <m:oMath xmlns:m="http://schemas.openxmlformats.org/officeDocument/2006/math">
+                    <m:r>
+                      <m:rPr>
+                        <m:sty m:val="p"/>
+                      </m:rPr>
+                      <a:rPr lang="en-US" sz="1700" b="0" i="0" smtClean="0">
+                        <a:solidFill>
+                          <a:srgbClr val="232323"/>
+                        </a:solidFill>
+                        <a:latin typeface="Cambria Math" panose="02040503050406030204" pitchFamily="18" charset="0"/>
+                      </a:rPr>
+                      <m:t>d</m:t>
+                    </m:r>
+                    <m:r>
+                      <a:rPr lang="en-US" sz="1700" b="0" i="1" smtClean="0">
+                        <a:solidFill>
+                          <a:srgbClr val="232323"/>
+                        </a:solidFill>
+                        <a:latin typeface="Cambria Math" panose="02040503050406030204" pitchFamily="18" charset="0"/>
+                      </a:rPr>
+                      <m:t>)</m:t>
+                    </m:r>
+                  </m:oMath>
+                </a14:m>
+                <a:r>
+                  <a:rPr lang="pt-PT" sz="1700" b="0" i="0" dirty="0">
+                    <a:solidFill>
+                      <a:srgbClr val="232323"/>
+                    </a:solidFill>
+                    <a:latin typeface="Calibri"/>
+                  </a:rPr>
+                  <a:t>] — storage costs are already netted out inside the resource constraint</a:t>
+                </a:r>
+              </a:p>
+              <a:p>
+                <a:pPr marL="0" indent="0">
+                  <a:spcAft>
+                    <a:spcPts val="1000"/>
+                  </a:spcAft>
+                </a:pPr>
+                <a:r>
+                  <a:rPr lang="pt-PT" sz="1700" b="0" i="0" dirty="0">
+                    <a:solidFill>
+                      <a:srgbClr val="232323"/>
+                    </a:solidFill>
+                    <a:latin typeface="Calibri"/>
+                  </a:rPr>
+                  <a:t>•  The model writes the optimal reserve stocks and policy parameters back into </a:t>
+                </a:r>
+                <a:r>
+                  <a:rPr lang="pt-PT" sz="1700" b="0" i="0" dirty="0" err="1">
+                    <a:solidFill>
+                      <a:srgbClr val="232323"/>
+                    </a:solidFill>
+                    <a:latin typeface="Calibri"/>
+                  </a:rPr>
+                  <a:t>M_.params</a:t>
+                </a:r>
+                <a:endParaRPr sz="1700" b="0" i="0" dirty="0">
+                  <a:solidFill>
+                    <a:srgbClr val="232323"/>
+                  </a:solidFill>
+                  <a:latin typeface="Calibri"/>
+                </a:endParaRPr>
+              </a:p>
+            </p:txBody>
+          </p:sp>
+        </mc:Choice>
+        <mc:Fallback>
+          <p:sp>
+            <p:nvSpPr>
+              <p:cNvPr id="9" name="TextBox 8"/>
+              <p:cNvSpPr txBox="1">
+                <a:spLocks noRot="1" noChangeAspect="1" noMove="1" noResize="1" noEditPoints="1" noAdjustHandles="1" noChangeArrowheads="1" noChangeShapeType="1" noTextEdit="1"/>
+              </p:cNvSpPr>
+              <p:nvPr/>
+            </p:nvSpPr>
+            <p:spPr>
+              <a:xfrm>
+                <a:off x="502920" y="1554480"/>
+                <a:ext cx="11185855" cy="1978619"/>
+              </a:xfrm>
+              <a:prstGeom prst="rect">
+                <a:avLst/>
+              </a:prstGeom>
+              <a:blipFill>
+                <a:blip r:embed="rId3"/>
+                <a:stretch>
+                  <a:fillRect l="-382" t="-615" b="-2769"/>
+                </a:stretch>
+              </a:blipFill>
+            </p:spPr>
+            <p:txBody>
+              <a:bodyPr/>
+              <a:lstStyle/>
+              <a:p>
+                <a:r>
+                  <a:rPr lang="en-DE">
+                    <a:noFill/>
+                  </a:rPr>
+                  <a:t> </a:t>
+                </a:r>
+              </a:p>
+            </p:txBody>
+          </p:sp>
+        </mc:Fallback>
+      </mc:AlternateContent>
     </p:spTree>
   </p:cSld>
   <p:clrMapOvr>
@@ -7046,8 +9823,8 @@
 </p:sld>
 </file>
 
-<file path=ppt/slides/slide19.xml><?xml version="1.0" encoding="utf-8"?>
-<p:sld xmlns:a="http://schemas.openxmlformats.org/drawingml/2006/main" xmlns:p="http://schemas.openxmlformats.org/presentationml/2006/main" xmlns:r="http://schemas.openxmlformats.org/officeDocument/2006/relationships">
+<file path=ppt/slides/slide2.xml><?xml version="1.0" encoding="utf-8"?>
+<p:sld xmlns:a="http://schemas.openxmlformats.org/drawingml/2006/main" xmlns:r="http://schemas.openxmlformats.org/officeDocument/2006/relationships" xmlns:p="http://schemas.openxmlformats.org/presentationml/2006/main">
   <p:cSld>
     <p:spTree>
       <p:nvGrpSpPr>
@@ -7055,7 +9832,174 @@
         <p:cNvGrpSpPr/>
         <p:nvPr/>
       </p:nvGrpSpPr>
-      <p:grpSpPr/>
+      <p:grpSpPr>
+        <a:xfrm>
+          <a:off x="0" y="0"/>
+          <a:ext cx="0" cy="0"/>
+          <a:chOff x="0" y="0"/>
+          <a:chExt cx="0" cy="0"/>
+        </a:xfrm>
+      </p:grpSpPr>
+      <p:sp>
+        <p:nvSpPr>
+          <p:cNvPr id="2" name="Rectangle 1"/>
+          <p:cNvSpPr/>
+          <p:nvPr/>
+        </p:nvSpPr>
+        <p:spPr>
+          <a:xfrm>
+            <a:off x="0" y="0"/>
+            <a:ext cx="12191695" cy="6858000"/>
+          </a:xfrm>
+          <a:prstGeom prst="rect">
+            <a:avLst/>
+          </a:prstGeom>
+          <a:solidFill>
+            <a:srgbClr val="CC071E"/>
+          </a:solidFill>
+          <a:ln>
+            <a:noFill/>
+          </a:ln>
+          <a:effectLst/>
+        </p:spPr>
+        <p:style>
+          <a:lnRef idx="1">
+            <a:schemeClr val="accent1"/>
+          </a:lnRef>
+          <a:fillRef idx="3">
+            <a:schemeClr val="accent1"/>
+          </a:fillRef>
+          <a:effectRef idx="2">
+            <a:schemeClr val="accent1"/>
+          </a:effectRef>
+          <a:fontRef idx="minor">
+            <a:schemeClr val="lt1"/>
+          </a:fontRef>
+        </p:style>
+        <p:txBody>
+          <a:bodyPr rtlCol="0" anchor="ctr"/>
+          <a:lstStyle/>
+          <a:p>
+            <a:pPr algn="ctr"/>
+            <a:endParaRPr/>
+          </a:p>
+        </p:txBody>
+      </p:sp>
+      <p:pic>
+        <p:nvPicPr>
+          <p:cNvPr id="3" name="Picture 2" descr="GIZ_Logo.png"/>
+          <p:cNvPicPr>
+            <a:picLocks noChangeAspect="1"/>
+          </p:cNvPicPr>
+          <p:nvPr/>
+        </p:nvPicPr>
+        <p:blipFill>
+          <a:blip r:embed="rId2"/>
+          <a:stretch>
+            <a:fillRect/>
+          </a:stretch>
+        </p:blipFill>
+        <p:spPr>
+          <a:xfrm>
+            <a:off x="10088575" y="457200"/>
+            <a:ext cx="1656522" cy="457200"/>
+          </a:xfrm>
+          <a:prstGeom prst="rect">
+            <a:avLst/>
+          </a:prstGeom>
+        </p:spPr>
+      </p:pic>
+      <p:sp>
+        <p:nvSpPr>
+          <p:cNvPr id="4" name="TextBox 3"/>
+          <p:cNvSpPr txBox="1"/>
+          <p:nvPr/>
+        </p:nvSpPr>
+        <p:spPr>
+          <a:xfrm>
+            <a:off x="822960" y="2651760"/>
+            <a:ext cx="10058400" cy="2011680"/>
+          </a:xfrm>
+          <a:prstGeom prst="rect">
+            <a:avLst/>
+          </a:prstGeom>
+          <a:noFill/>
+        </p:spPr>
+        <p:txBody>
+          <a:bodyPr wrap="square">
+            <a:spAutoFit/>
+          </a:bodyPr>
+          <a:lstStyle/>
+          <a:p>
+            <a:pPr>
+              <a:spcAft>
+                <a:spcPts val="1000"/>
+              </a:spcAft>
+            </a:pPr>
+            <a:r>
+              <a:rPr sz="1500" b="1" i="0">
+                <a:solidFill>
+                  <a:srgbClr val="FFD2D2"/>
+                </a:solidFill>
+                <a:latin typeface="Calibri"/>
+              </a:rPr>
+              <a:t>ONLINE DAY 2 — MORNING</a:t>
+            </a:r>
+          </a:p>
+          <a:p>
+            <a:r>
+              <a:rPr sz="3400" b="1" i="0">
+                <a:solidFill>
+                  <a:srgbClr val="FFFFFF"/>
+                </a:solidFill>
+                <a:latin typeface="Calibri"/>
+              </a:rPr>
+              <a:t>Calibration &amp; Scenario Hands-On</a:t>
+            </a:r>
+          </a:p>
+          <a:p>
+            <a:pPr>
+              <a:spcBef>
+                <a:spcPts val="1400"/>
+              </a:spcBef>
+            </a:pPr>
+            <a:r>
+              <a:rPr sz="1700" b="0" i="0">
+                <a:solidFill>
+                  <a:srgbClr val="FFFFFF"/>
+                </a:solidFill>
+                <a:latin typeface="Calibri"/>
+              </a:rPr>
+              <a:t>Codebase navigation, Git/GitHub Desktop, debugging, AI-assisted VS Code · 150 minutes</a:t>
+            </a:r>
+          </a:p>
+        </p:txBody>
+      </p:sp>
+    </p:spTree>
+  </p:cSld>
+  <p:clrMapOvr>
+    <a:masterClrMapping/>
+  </p:clrMapOvr>
+</p:sld>
+</file>
+
+<file path=ppt/slides/slide20.xml><?xml version="1.0" encoding="utf-8"?>
+<p:sld xmlns:a="http://schemas.openxmlformats.org/drawingml/2006/main" xmlns:r="http://schemas.openxmlformats.org/officeDocument/2006/relationships" xmlns:p="http://schemas.openxmlformats.org/presentationml/2006/main">
+  <p:cSld>
+    <p:spTree>
+      <p:nvGrpSpPr>
+        <p:cNvPr id="1" name=""/>
+        <p:cNvGrpSpPr/>
+        <p:nvPr/>
+      </p:nvGrpSpPr>
+      <p:grpSpPr>
+        <a:xfrm>
+          <a:off x="0" y="0"/>
+          <a:ext cx="0" cy="0"/>
+          <a:chOff x="0" y="0"/>
+          <a:chExt cx="0" cy="0"/>
+        </a:xfrm>
+      </p:grpSpPr>
       <p:sp>
         <p:nvSpPr>
           <p:cNvPr id="2" name="Rectangle 1"/>
@@ -7097,6 +10041,7 @@
           <a:lstStyle/>
           <a:p>
             <a:pPr algn="ctr"/>
+            <a:endParaRPr/>
           </a:p>
         </p:txBody>
       </p:sp>
@@ -7141,6 +10086,7 @@
           <a:lstStyle/>
           <a:p>
             <a:pPr algn="ctr"/>
+            <a:endParaRPr/>
           </a:p>
         </p:txBody>
       </p:sp>
@@ -7178,7 +10124,7 @@
                 </a:solidFill>
                 <a:latin typeface="Calibri"/>
               </a:rPr>
-              <a:t>BLOCK 6 · 35 MIN</a:t>
+              <a:t>BLOCK 5 · 50 MIN</a:t>
             </a:r>
           </a:p>
           <a:p>
@@ -7189,7 +10135,7 @@
                 </a:solidFill>
                 <a:latin typeface="Calibri"/>
               </a:rPr>
-              <a:t>Draft Your Implementation Plan</a:t>
+              <a:t>What the Toy Model Teaches</a:t>
             </a:r>
           </a:p>
         </p:txBody>
@@ -7259,6 +10205,7 @@
           <a:lstStyle/>
           <a:p>
             <a:pPr algn="ctr"/>
+            <a:endParaRPr/>
           </a:p>
         </p:txBody>
       </p:sp>
@@ -7326,7 +10273,7 @@
                 </a:solidFill>
                 <a:latin typeface="Calibri"/>
               </a:rPr>
-              <a:t>15</a:t>
+              <a:t>16</a:t>
             </a:r>
           </a:p>
         </p:txBody>
@@ -7365,7 +10312,7 @@
                 </a:solidFill>
                 <a:latin typeface="Calibri"/>
               </a:rPr>
-              <a:t>•  Choose one carrier from the break-even table</a:t>
+              <a:t>•  The reserve policy, investment policy, and reserve size should be chosen together</a:t>
             </a:r>
           </a:p>
           <a:p>
@@ -7381,7 +10328,7 @@
                 </a:solidFill>
                 <a:latin typeface="Calibri"/>
               </a:rPr>
-              <a:t>•  Document: mechanism (specific to your carrier); DGE-METRIC outputs it would need (name the indicator); where the logic would live in the codebase, and why; what remains [SME REVIEW NEEDED]</a:t>
+              <a:t>•  Drawdown rules matter most when the crisis is short and severe</a:t>
             </a:r>
           </a:p>
           <a:p>
@@ -7397,7 +10344,39 @@
                 </a:solidFill>
                 <a:latin typeface="Calibri"/>
               </a:rPr>
-              <a:t>•  Record your plan — you'll complete the full analysis note tomorrow morning</a:t>
+              <a:t>•  Growth can erode adequacy quickly unless reserve stocks scale with the economy</a:t>
+            </a:r>
+          </a:p>
+          <a:p>
+            <a:pPr marL="0" indent="0">
+              <a:spcAft>
+                <a:spcPts val="1000"/>
+              </a:spcAft>
+            </a:pPr>
+            <a:r>
+              <a:rPr sz="1700" b="0" i="0">
+                <a:solidFill>
+                  <a:srgbClr val="232323"/>
+                </a:solidFill>
+                <a:latin typeface="Calibri"/>
+              </a:rPr>
+              <a:t>•  Transition policy needs both capacity investment and buffer stocks to keep GDP losses down</a:t>
+            </a:r>
+          </a:p>
+          <a:p>
+            <a:pPr marL="0" indent="0">
+              <a:spcAft>
+                <a:spcPts val="1000"/>
+              </a:spcAft>
+            </a:pPr>
+            <a:r>
+              <a:rPr sz="1700" b="1" i="0">
+                <a:solidFill>
+                  <a:srgbClr val="232323"/>
+                </a:solidFill>
+                <a:latin typeface="Calibri"/>
+              </a:rPr>
+              <a:t>•  This is an illustrative toy model, but it gives the right logic for thinking about policy trade-offs</a:t>
             </a:r>
           </a:p>
         </p:txBody>
@@ -7410,8 +10389,8 @@
 </p:sld>
 </file>
 
-<file path=ppt/slides/slide2.xml><?xml version="1.0" encoding="utf-8"?>
-<p:sld xmlns:a="http://schemas.openxmlformats.org/drawingml/2006/main" xmlns:p="http://schemas.openxmlformats.org/presentationml/2006/main" xmlns:r="http://schemas.openxmlformats.org/officeDocument/2006/relationships">
+<file path=ppt/slides/slide21.xml><?xml version="1.0" encoding="utf-8"?>
+<p:sld xmlns:a="http://schemas.openxmlformats.org/drawingml/2006/main" xmlns:r="http://schemas.openxmlformats.org/officeDocument/2006/relationships" xmlns:p="http://schemas.openxmlformats.org/presentationml/2006/main">
   <p:cSld>
     <p:spTree>
       <p:nvGrpSpPr>
@@ -7419,7 +10398,14 @@
         <p:cNvGrpSpPr/>
         <p:nvPr/>
       </p:nvGrpSpPr>
-      <p:grpSpPr/>
+      <p:grpSpPr>
+        <a:xfrm>
+          <a:off x="0" y="0"/>
+          <a:ext cx="0" cy="0"/>
+          <a:chOff x="0" y="0"/>
+          <a:chExt cx="0" cy="0"/>
+        </a:xfrm>
+      </p:grpSpPr>
       <p:sp>
         <p:nvSpPr>
           <p:cNvPr id="2" name="Rectangle 1"/>
@@ -7430,6 +10416,51 @@
           <a:xfrm>
             <a:off x="0" y="0"/>
             <a:ext cx="12191695" cy="6858000"/>
+          </a:xfrm>
+          <a:prstGeom prst="rect">
+            <a:avLst/>
+          </a:prstGeom>
+          <a:solidFill>
+            <a:srgbClr val="FFFFFF"/>
+          </a:solidFill>
+          <a:ln>
+            <a:noFill/>
+          </a:ln>
+          <a:effectLst/>
+        </p:spPr>
+        <p:style>
+          <a:lnRef idx="1">
+            <a:schemeClr val="accent1"/>
+          </a:lnRef>
+          <a:fillRef idx="3">
+            <a:schemeClr val="accent1"/>
+          </a:fillRef>
+          <a:effectRef idx="2">
+            <a:schemeClr val="accent1"/>
+          </a:effectRef>
+          <a:fontRef idx="minor">
+            <a:schemeClr val="lt1"/>
+          </a:fontRef>
+        </p:style>
+        <p:txBody>
+          <a:bodyPr rtlCol="0" anchor="ctr"/>
+          <a:lstStyle/>
+          <a:p>
+            <a:pPr algn="ctr"/>
+            <a:endParaRPr/>
+          </a:p>
+        </p:txBody>
+      </p:sp>
+      <p:sp>
+        <p:nvSpPr>
+          <p:cNvPr id="3" name="Rectangle 2"/>
+          <p:cNvSpPr/>
+          <p:nvPr/>
+        </p:nvSpPr>
+        <p:spPr>
+          <a:xfrm>
+            <a:off x="0" y="0"/>
+            <a:ext cx="12191695" cy="1280160"/>
           </a:xfrm>
           <a:prstGeom prst="rect">
             <a:avLst/>
@@ -7461,202 +10492,7 @@
           <a:lstStyle/>
           <a:p>
             <a:pPr algn="ctr"/>
-          </a:p>
-        </p:txBody>
-      </p:sp>
-      <p:pic>
-        <p:nvPicPr>
-          <p:cNvPr id="3" name="Picture 2" descr="GIZ_Logo.png"/>
-          <p:cNvPicPr>
-            <a:picLocks noChangeAspect="1"/>
-          </p:cNvPicPr>
-          <p:nvPr/>
-        </p:nvPicPr>
-        <p:blipFill>
-          <a:blip r:embed="rId2"/>
-          <a:stretch>
-            <a:fillRect/>
-          </a:stretch>
-        </p:blipFill>
-        <p:spPr>
-          <a:xfrm>
-            <a:off x="10088575" y="457200"/>
-            <a:ext cx="1656522" cy="457200"/>
-          </a:xfrm>
-          <a:prstGeom prst="rect">
-            <a:avLst/>
-          </a:prstGeom>
-        </p:spPr>
-      </p:pic>
-      <p:sp>
-        <p:nvSpPr>
-          <p:cNvPr id="4" name="TextBox 3"/>
-          <p:cNvSpPr txBox="1"/>
-          <p:nvPr/>
-        </p:nvSpPr>
-        <p:spPr>
-          <a:xfrm>
-            <a:off x="822960" y="2651760"/>
-            <a:ext cx="10058400" cy="2011680"/>
-          </a:xfrm>
-          <a:prstGeom prst="rect">
-            <a:avLst/>
-          </a:prstGeom>
-          <a:noFill/>
-        </p:spPr>
-        <p:txBody>
-          <a:bodyPr wrap="square">
-            <a:spAutoFit/>
-          </a:bodyPr>
-          <a:lstStyle/>
-          <a:p>
-            <a:pPr>
-              <a:spcAft>
-                <a:spcPts val="1000"/>
-              </a:spcAft>
-            </a:pPr>
-            <a:r>
-              <a:rPr sz="1500" b="1" i="0">
-                <a:solidFill>
-                  <a:srgbClr val="FFD2D2"/>
-                </a:solidFill>
-                <a:latin typeface="Calibri"/>
-              </a:rPr>
-              <a:t>ONLINE DAY 2 — MORNING</a:t>
-            </a:r>
-          </a:p>
-          <a:p>
-            <a:r>
-              <a:rPr sz="3400" b="1" i="0">
-                <a:solidFill>
-                  <a:srgbClr val="FFFFFF"/>
-                </a:solidFill>
-                <a:latin typeface="Calibri"/>
-              </a:rPr>
-              <a:t>Calibration &amp; Scenario Hands-On</a:t>
-            </a:r>
-          </a:p>
-          <a:p>
-            <a:pPr>
-              <a:spcBef>
-                <a:spcPts val="1400"/>
-              </a:spcBef>
-            </a:pPr>
-            <a:r>
-              <a:rPr sz="1700" b="0" i="0">
-                <a:solidFill>
-                  <a:srgbClr val="FFFFFF"/>
-                </a:solidFill>
-                <a:latin typeface="Calibri"/>
-              </a:rPr>
-              <a:t>Codebase navigation, Git/GitHub Desktop, debugging, AI-assisted VS Code · 180 minutes</a:t>
-            </a:r>
-          </a:p>
-        </p:txBody>
-      </p:sp>
-    </p:spTree>
-  </p:cSld>
-  <p:clrMapOvr>
-    <a:masterClrMapping/>
-  </p:clrMapOvr>
-</p:sld>
-</file>
-
-<file path=ppt/slides/slide20.xml><?xml version="1.0" encoding="utf-8"?>
-<p:sld xmlns:a="http://schemas.openxmlformats.org/drawingml/2006/main" xmlns:p="http://schemas.openxmlformats.org/presentationml/2006/main" xmlns:r="http://schemas.openxmlformats.org/officeDocument/2006/relationships">
-  <p:cSld>
-    <p:spTree>
-      <p:nvGrpSpPr>
-        <p:cNvPr id="1" name=""/>
-        <p:cNvGrpSpPr/>
-        <p:nvPr/>
-      </p:nvGrpSpPr>
-      <p:grpSpPr/>
-      <p:sp>
-        <p:nvSpPr>
-          <p:cNvPr id="2" name="Rectangle 1"/>
-          <p:cNvSpPr/>
-          <p:nvPr/>
-        </p:nvSpPr>
-        <p:spPr>
-          <a:xfrm>
-            <a:off x="0" y="0"/>
-            <a:ext cx="12191695" cy="6858000"/>
-          </a:xfrm>
-          <a:prstGeom prst="rect">
-            <a:avLst/>
-          </a:prstGeom>
-          <a:solidFill>
-            <a:srgbClr val="FFFFFF"/>
-          </a:solidFill>
-          <a:ln>
-            <a:noFill/>
-          </a:ln>
-          <a:effectLst/>
-        </p:spPr>
-        <p:style>
-          <a:lnRef idx="1">
-            <a:schemeClr val="accent1"/>
-          </a:lnRef>
-          <a:fillRef idx="3">
-            <a:schemeClr val="accent1"/>
-          </a:fillRef>
-          <a:effectRef idx="2">
-            <a:schemeClr val="accent1"/>
-          </a:effectRef>
-          <a:fontRef idx="minor">
-            <a:schemeClr val="lt1"/>
-          </a:fontRef>
-        </p:style>
-        <p:txBody>
-          <a:bodyPr rtlCol="0" anchor="ctr"/>
-          <a:lstStyle/>
-          <a:p>
-            <a:pPr algn="ctr"/>
-          </a:p>
-        </p:txBody>
-      </p:sp>
-      <p:sp>
-        <p:nvSpPr>
-          <p:cNvPr id="3" name="Rectangle 2"/>
-          <p:cNvSpPr/>
-          <p:nvPr/>
-        </p:nvSpPr>
-        <p:spPr>
-          <a:xfrm>
-            <a:off x="0" y="0"/>
-            <a:ext cx="12191695" cy="1280160"/>
-          </a:xfrm>
-          <a:prstGeom prst="rect">
-            <a:avLst/>
-          </a:prstGeom>
-          <a:solidFill>
-            <a:srgbClr val="CC071E"/>
-          </a:solidFill>
-          <a:ln>
-            <a:noFill/>
-          </a:ln>
-          <a:effectLst/>
-        </p:spPr>
-        <p:style>
-          <a:lnRef idx="1">
-            <a:schemeClr val="accent1"/>
-          </a:lnRef>
-          <a:fillRef idx="3">
-            <a:schemeClr val="accent1"/>
-          </a:fillRef>
-          <a:effectRef idx="2">
-            <a:schemeClr val="accent1"/>
-          </a:effectRef>
-          <a:fontRef idx="minor">
-            <a:schemeClr val="lt1"/>
-          </a:fontRef>
-        </p:style>
-        <p:txBody>
-          <a:bodyPr rtlCol="0" anchor="ctr"/>
-          <a:lstStyle/>
-          <a:p>
-            <a:pPr algn="ctr"/>
+            <a:endParaRPr/>
           </a:p>
         </p:txBody>
       </p:sp>
@@ -7694,7 +10530,7 @@
                 </a:solidFill>
                 <a:latin typeface="Calibri"/>
               </a:rPr>
-              <a:t>BLOCK 7 · 15 MIN</a:t>
+              <a:t>BLOCK 5 · 25 MIN</a:t>
             </a:r>
           </a:p>
           <a:p>
@@ -7705,7 +10541,7 @@
                 </a:solidFill>
                 <a:latin typeface="Calibri"/>
               </a:rPr>
-              <a:t>Today's Output &amp; What's Next</a:t>
+              <a:t>Wrap and Preview</a:t>
             </a:r>
           </a:p>
         </p:txBody>
@@ -7775,6 +10611,7 @@
           <a:lstStyle/>
           <a:p>
             <a:pPr algn="ctr"/>
+            <a:endParaRPr/>
           </a:p>
         </p:txBody>
       </p:sp>
@@ -7842,66 +10679,267 @@
                 </a:solidFill>
                 <a:latin typeface="Calibri"/>
               </a:rPr>
-              <a:t>16</a:t>
-            </a:r>
-          </a:p>
-        </p:txBody>
-      </p:sp>
-      <p:sp>
-        <p:nvSpPr>
-          <p:cNvPr id="9" name="TextBox 8"/>
-          <p:cNvSpPr txBox="1"/>
-          <p:nvPr/>
-        </p:nvSpPr>
-        <p:spPr>
-          <a:xfrm>
-            <a:off x="502920" y="1554480"/>
-            <a:ext cx="11185855" cy="4892040"/>
-          </a:xfrm>
-          <a:prstGeom prst="rect">
-            <a:avLst/>
-          </a:prstGeom>
-          <a:noFill/>
-        </p:spPr>
-        <p:txBody>
-          <a:bodyPr wrap="square">
-            <a:spAutoFit/>
-          </a:bodyPr>
-          <a:lstStyle/>
-          <a:p>
-            <a:pPr marL="0" indent="0">
-              <a:spcAft>
-                <a:spcPts val="1000"/>
-              </a:spcAft>
-            </a:pPr>
-            <a:r>
-              <a:rPr sz="1700" b="0" i="0">
-                <a:solidFill>
-                  <a:srgbClr val="232323"/>
-                </a:solidFill>
-                <a:latin typeface="Calibri"/>
-              </a:rPr>
-              <a:t>•  You leave with: a documented MC = MB break-even walkthrough for one carrier, and an implementation plan for how the analysis would be built in DGE-METRIC</a:t>
-            </a:r>
-          </a:p>
-          <a:p>
-            <a:pPr marL="0" indent="0">
-              <a:spcAft>
-                <a:spcPts val="1000"/>
-              </a:spcAft>
-            </a:pPr>
-            <a:r>
-              <a:rPr sz="1700" b="0" i="0">
-                <a:solidFill>
-                  <a:srgbClr val="232323"/>
-                </a:solidFill>
-                <a:latin typeface="Calibri"/>
-              </a:rPr>
-              <a:t>•  Tomorrow morning: guided open lab — finish the walkthrough by hand for your chosen carrier and write the full reserve-requirement analysis note</a:t>
-            </a:r>
-          </a:p>
-        </p:txBody>
-      </p:sp>
+              <a:t>17</a:t>
+            </a:r>
+          </a:p>
+        </p:txBody>
+      </p:sp>
+      <mc:AlternateContent xmlns:mc="http://schemas.openxmlformats.org/markup-compatibility/2006">
+        <mc:Choice xmlns:a14="http://schemas.microsoft.com/office/drawing/2010/main" Requires="a14">
+          <p:sp>
+            <p:nvSpPr>
+              <p:cNvPr id="9" name="TextBox 8"/>
+              <p:cNvSpPr txBox="1"/>
+              <p:nvPr/>
+            </p:nvSpPr>
+            <p:spPr>
+              <a:xfrm>
+                <a:off x="502920" y="1554480"/>
+                <a:ext cx="11185855" cy="1152110"/>
+              </a:xfrm>
+              <a:prstGeom prst="rect">
+                <a:avLst/>
+              </a:prstGeom>
+              <a:noFill/>
+            </p:spPr>
+            <p:txBody>
+              <a:bodyPr wrap="square">
+                <a:spAutoFit/>
+              </a:bodyPr>
+              <a:lstStyle/>
+              <a:p>
+                <a:pPr>
+                  <a:spcAft>
+                    <a:spcPts val="1000"/>
+                  </a:spcAft>
+                </a:pPr>
+                <a:r>
+                  <a:rPr lang="pt-PT" sz="1700" b="0" i="0" dirty="0">
+                    <a:solidFill>
+                      <a:srgbClr val="232323"/>
+                    </a:solidFill>
+                    <a:latin typeface="Calibri"/>
+                  </a:rPr>
+                  <a:t>•  You leave with: a clearer picture of how </a:t>
+                </a:r>
+                <a14:m>
+                  <m:oMath xmlns:m="http://schemas.openxmlformats.org/officeDocument/2006/math">
+                    <m:sSub>
+                      <m:sSubPr>
+                        <m:ctrlPr>
+                          <a:rPr lang="ar-AE" sz="1700" i="1">
+                            <a:solidFill>
+                              <a:srgbClr val="232323"/>
+                            </a:solidFill>
+                            <a:latin typeface="Cambria Math" panose="02040503050406030204" pitchFamily="18" charset="0"/>
+                          </a:rPr>
+                        </m:ctrlPr>
+                      </m:sSubPr>
+                      <m:e>
+                        <m:r>
+                          <a:rPr lang="ar-AE" sz="1700" i="1">
+                            <a:solidFill>
+                              <a:srgbClr val="232323"/>
+                            </a:solidFill>
+                            <a:latin typeface="Cambria Math" panose="02040503050406030204" pitchFamily="18" charset="0"/>
+                          </a:rPr>
+                          <m:t>𝜙</m:t>
+                        </m:r>
+                      </m:e>
+                      <m:sub>
+                        <m:r>
+                          <a:rPr lang="ar-AE" sz="1700" b="0" i="1" smtClean="0">
+                            <a:solidFill>
+                              <a:srgbClr val="232323"/>
+                            </a:solidFill>
+                            <a:latin typeface="Cambria Math" panose="02040503050406030204" pitchFamily="18" charset="0"/>
+                          </a:rPr>
+                          <m:t>𝑅</m:t>
+                        </m:r>
+                      </m:sub>
+                    </m:sSub>
+                    <m:r>
+                      <a:rPr lang="ar-AE" sz="1700" i="1">
+                        <a:solidFill>
+                          <a:srgbClr val="232323"/>
+                        </a:solidFill>
+                        <a:latin typeface="Cambria Math" panose="02040503050406030204" pitchFamily="18" charset="0"/>
+                      </a:rPr>
+                      <m:t> </m:t>
+                    </m:r>
+                  </m:oMath>
+                </a14:m>
+                <a:r>
+                  <a:rPr lang="pt-PT" sz="1700" b="0" i="0" dirty="0">
+                    <a:solidFill>
+                      <a:srgbClr val="232323"/>
+                    </a:solidFill>
+                    <a:latin typeface="Calibri"/>
+                  </a:rPr>
+                  <a:t>, </a:t>
+                </a:r>
+                <a14:m>
+                  <m:oMath xmlns:m="http://schemas.openxmlformats.org/officeDocument/2006/math">
+                    <m:sSub>
+                      <m:sSubPr>
+                        <m:ctrlPr>
+                          <a:rPr lang="en-US" sz="1700" i="1">
+                            <a:solidFill>
+                              <a:srgbClr val="232323"/>
+                            </a:solidFill>
+                            <a:latin typeface="Cambria Math" panose="02040503050406030204" pitchFamily="18" charset="0"/>
+                          </a:rPr>
+                        </m:ctrlPr>
+                      </m:sSubPr>
+                      <m:e>
+                        <m:r>
+                          <a:rPr lang="en-US" sz="1700" i="1">
+                            <a:solidFill>
+                              <a:srgbClr val="232323"/>
+                            </a:solidFill>
+                            <a:latin typeface="Cambria Math" panose="02040503050406030204" pitchFamily="18" charset="0"/>
+                          </a:rPr>
+                          <m:t>𝜙</m:t>
+                        </m:r>
+                      </m:e>
+                      <m:sub>
+                        <m:r>
+                          <a:rPr lang="en-US" sz="1700" i="1">
+                            <a:solidFill>
+                              <a:srgbClr val="232323"/>
+                            </a:solidFill>
+                            <a:latin typeface="Cambria Math" panose="02040503050406030204" pitchFamily="18" charset="0"/>
+                          </a:rPr>
+                          <m:t>𝐼𝑄</m:t>
+                        </m:r>
+                      </m:sub>
+                    </m:sSub>
+                    <m:r>
+                      <a:rPr lang="en-US" sz="1700" i="1">
+                        <a:solidFill>
+                          <a:srgbClr val="232323"/>
+                        </a:solidFill>
+                        <a:latin typeface="Cambria Math" panose="02040503050406030204" pitchFamily="18" charset="0"/>
+                      </a:rPr>
+                      <m:t> </m:t>
+                    </m:r>
+                  </m:oMath>
+                </a14:m>
+                <a:r>
+                  <a:rPr lang="pt-PT" sz="1700" b="0" i="0" dirty="0">
+                    <a:solidFill>
+                      <a:srgbClr val="232323"/>
+                    </a:solidFill>
+                    <a:latin typeface="Calibri"/>
+                  </a:rPr>
+                  <a:t>, and </a:t>
+                </a:r>
+                <a14:m>
+                  <m:oMath xmlns:m="http://schemas.openxmlformats.org/officeDocument/2006/math">
+                    <m:r>
+                      <m:rPr>
+                        <m:sty m:val="p"/>
+                      </m:rPr>
+                      <a:rPr lang="en-US" sz="1700" b="0" i="0" smtClean="0">
+                        <a:solidFill>
+                          <a:srgbClr val="232323"/>
+                        </a:solidFill>
+                        <a:latin typeface="Cambria Math" panose="02040503050406030204" pitchFamily="18" charset="0"/>
+                      </a:rPr>
+                      <m:t>d</m:t>
+                    </m:r>
+                  </m:oMath>
+                </a14:m>
+                <a:r>
+                  <a:rPr lang="pt-PT" sz="1700" b="0" i="0" dirty="0">
+                    <a:solidFill>
+                      <a:srgbClr val="232323"/>
+                    </a:solidFill>
+                    <a:latin typeface="Calibri"/>
+                  </a:rPr>
+                  <a:t> interact</a:t>
+                </a:r>
+              </a:p>
+              <a:p>
+                <a:pPr marL="0" indent="0">
+                  <a:spcAft>
+                    <a:spcPts val="1000"/>
+                  </a:spcAft>
+                </a:pPr>
+                <a:r>
+                  <a:rPr lang="pt-PT" sz="1700" b="0" i="0" dirty="0">
+                    <a:solidFill>
+                      <a:srgbClr val="232323"/>
+                    </a:solidFill>
+                    <a:latin typeface="Calibri"/>
+                  </a:rPr>
+                  <a:t>•  And with the main caveat: the results come from the toy model's calibration, not DGE-METRIC</a:t>
+                </a:r>
+              </a:p>
+              <a:p>
+                <a:pPr marL="0" indent="0">
+                  <a:spcAft>
+                    <a:spcPts val="1000"/>
+                  </a:spcAft>
+                </a:pPr>
+                <a:r>
+                  <a:rPr lang="pt-PT" sz="1700" b="0" i="0" dirty="0">
+                    <a:solidFill>
+                      <a:srgbClr val="232323"/>
+                    </a:solidFill>
+                    <a:latin typeface="Calibri"/>
+                  </a:rPr>
+                  <a:t>•  Preview tomorrow morning's guided lab: compute GDP losses for shortage scenarios using DGE-METRIC outputs</a:t>
+                </a:r>
+                <a:endParaRPr sz="1700" b="0" i="0" dirty="0">
+                  <a:solidFill>
+                    <a:srgbClr val="232323"/>
+                  </a:solidFill>
+                  <a:latin typeface="Calibri"/>
+                </a:endParaRPr>
+              </a:p>
+            </p:txBody>
+          </p:sp>
+        </mc:Choice>
+        <mc:Fallback>
+          <p:sp>
+            <p:nvSpPr>
+              <p:cNvPr id="9" name="TextBox 8"/>
+              <p:cNvSpPr txBox="1">
+                <a:spLocks noRot="1" noChangeAspect="1" noMove="1" noResize="1" noEditPoints="1" noAdjustHandles="1" noChangeArrowheads="1" noChangeShapeType="1" noTextEdit="1"/>
+              </p:cNvSpPr>
+              <p:nvPr/>
+            </p:nvSpPr>
+            <p:spPr>
+              <a:xfrm>
+                <a:off x="502920" y="1554480"/>
+                <a:ext cx="11185855" cy="1152110"/>
+              </a:xfrm>
+              <a:prstGeom prst="rect">
+                <a:avLst/>
+              </a:prstGeom>
+              <a:blipFill>
+                <a:blip r:embed="rId3"/>
+                <a:stretch>
+                  <a:fillRect l="-382" t="-1058" b="-6349"/>
+                </a:stretch>
+              </a:blipFill>
+            </p:spPr>
+            <p:txBody>
+              <a:bodyPr/>
+              <a:lstStyle/>
+              <a:p>
+                <a:r>
+                  <a:rPr lang="en-DE">
+                    <a:noFill/>
+                  </a:rPr>
+                  <a:t> </a:t>
+                </a:r>
+              </a:p>
+            </p:txBody>
+          </p:sp>
+        </mc:Fallback>
+      </mc:AlternateContent>
     </p:spTree>
   </p:cSld>
   <p:clrMapOvr>
@@ -7911,7 +10949,7 @@
 </file>
 
 <file path=ppt/slides/slide3.xml><?xml version="1.0" encoding="utf-8"?>
-<p:sld xmlns:a="http://schemas.openxmlformats.org/drawingml/2006/main" xmlns:p="http://schemas.openxmlformats.org/presentationml/2006/main" xmlns:r="http://schemas.openxmlformats.org/officeDocument/2006/relationships">
+<p:sld xmlns:a="http://schemas.openxmlformats.org/drawingml/2006/main" xmlns:r="http://schemas.openxmlformats.org/officeDocument/2006/relationships" xmlns:p="http://schemas.openxmlformats.org/presentationml/2006/main">
   <p:cSld>
     <p:spTree>
       <p:nvGrpSpPr>
@@ -7919,7 +10957,14 @@
         <p:cNvGrpSpPr/>
         <p:nvPr/>
       </p:nvGrpSpPr>
-      <p:grpSpPr/>
+      <p:grpSpPr>
+        <a:xfrm>
+          <a:off x="0" y="0"/>
+          <a:ext cx="0" cy="0"/>
+          <a:chOff x="0" y="0"/>
+          <a:chExt cx="0" cy="0"/>
+        </a:xfrm>
+      </p:grpSpPr>
       <p:sp>
         <p:nvSpPr>
           <p:cNvPr id="2" name="Rectangle 1"/>
@@ -7961,6 +11006,7 @@
           <a:lstStyle/>
           <a:p>
             <a:pPr algn="ctr"/>
+            <a:endParaRPr/>
           </a:p>
         </p:txBody>
       </p:sp>
@@ -8005,6 +11051,7 @@
           <a:lstStyle/>
           <a:p>
             <a:pPr algn="ctr"/>
+            <a:endParaRPr/>
           </a:p>
         </p:txBody>
       </p:sp>
@@ -8037,7 +11084,7 @@
                 </a:solidFill>
                 <a:latin typeface="Calibri"/>
               </a:rPr>
-              <a:t>This Morning's Agenda — 7 Blocks, 180 Minutes</a:t>
+              <a:t>This Morning's Agenda — 7 Blocks + Break, 150 Minutes</a:t>
             </a:r>
           </a:p>
         </p:txBody>
@@ -8107,6 +11154,7 @@
           <a:lstStyle/>
           <a:p>
             <a:pPr algn="ctr"/>
+            <a:endParaRPr/>
           </a:p>
         </p:txBody>
       </p:sp>
@@ -8198,9 +11246,27 @@
                 <a:tableStyleId>{5C22544A-7EE6-4342-B048-85BDC9FD1C3A}</a:tableStyleId>
               </a:tblPr>
               <a:tblGrid>
-                <a:gridCol w="4003358"/>
-                <a:gridCol w="941966"/>
-                <a:gridCol w="6240529"/>
+                <a:gridCol w="4003358">
+                  <a:extLst>
+                    <a:ext uri="{9D8B030D-6E8A-4147-A177-3AD203B41FA5}">
+                      <a16:colId xmlns:a16="http://schemas.microsoft.com/office/drawing/2014/main" val="20000"/>
+                    </a:ext>
+                  </a:extLst>
+                </a:gridCol>
+                <a:gridCol w="941966">
+                  <a:extLst>
+                    <a:ext uri="{9D8B030D-6E8A-4147-A177-3AD203B41FA5}">
+                      <a16:colId xmlns:a16="http://schemas.microsoft.com/office/drawing/2014/main" val="20001"/>
+                    </a:ext>
+                  </a:extLst>
+                </a:gridCol>
+                <a:gridCol w="6240529">
+                  <a:extLst>
+                    <a:ext uri="{9D8B030D-6E8A-4147-A177-3AD203B41FA5}">
+                      <a16:colId xmlns:a16="http://schemas.microsoft.com/office/drawing/2014/main" val="20002"/>
+                    </a:ext>
+                  </a:extLst>
+                </a:gridCol>
               </a:tblGrid>
               <a:tr h="543560">
                 <a:tc>
@@ -8219,7 +11285,7 @@
                       </a:r>
                     </a:p>
                   </a:txBody>
-                  <a:tcPr anchor="ctr" marT="50800" marB="50800">
+                  <a:tcPr marT="50800" marB="50800" anchor="ctr">
                     <a:solidFill>
                       <a:srgbClr val="CC071E"/>
                     </a:solidFill>
@@ -8241,7 +11307,7 @@
                       </a:r>
                     </a:p>
                   </a:txBody>
-                  <a:tcPr anchor="ctr" marT="50800" marB="50800">
+                  <a:tcPr marT="50800" marB="50800" anchor="ctr">
                     <a:solidFill>
                       <a:srgbClr val="CC071E"/>
                     </a:solidFill>
@@ -8263,17 +11329,22 @@
                       </a:r>
                     </a:p>
                   </a:txBody>
-                  <a:tcPr anchor="ctr" marT="50800" marB="50800">
+                  <a:tcPr marT="50800" marB="50800" anchor="ctr">
                     <a:solidFill>
                       <a:srgbClr val="CC071E"/>
                     </a:solidFill>
                   </a:tcPr>
                 </a:tc>
+                <a:extLst>
+                  <a:ext uri="{0D108BD9-81ED-4DB2-BD59-A6C34878D82A}">
+                    <a16:rowId xmlns:a16="http://schemas.microsoft.com/office/drawing/2014/main" val="10000"/>
+                  </a:ext>
+                </a:extLst>
               </a:tr>
               <a:tr h="543560">
                 <a:tc>
                   <a:txBody>
-                    <a:bodyPr wrap="square"/>
+                    <a:bodyPr/>
                     <a:lstStyle/>
                     <a:p>
                       <a:r>
@@ -8283,11 +11354,11 @@
                           </a:solidFill>
                           <a:latin typeface="Calibri"/>
                         </a:rPr>
-                        <a:t>1. Objective and setup check</a:t>
+                        <a:t>1. Recap and discussion</a:t>
                       </a:r>
                     </a:p>
                   </a:txBody>
-                  <a:tcPr anchor="ctr" marT="38100" marB="38100">
+                  <a:tcPr marT="38100" marB="38100" anchor="ctr">
                     <a:solidFill>
                       <a:srgbClr val="FFFFFF"/>
                     </a:solidFill>
@@ -8295,7 +11366,80 @@
                 </a:tc>
                 <a:tc>
                   <a:txBody>
-                    <a:bodyPr wrap="square"/>
+                    <a:bodyPr/>
+                    <a:lstStyle/>
+                    <a:p>
+                      <a:r>
+                        <a:rPr sz="1300" b="0" i="0">
+                          <a:solidFill>
+                            <a:srgbClr val="232323"/>
+                          </a:solidFill>
+                          <a:latin typeface="Calibri"/>
+                        </a:rPr>
+                        <a:t>60</a:t>
+                      </a:r>
+                    </a:p>
+                  </a:txBody>
+                  <a:tcPr marT="38100" marB="38100" anchor="ctr">
+                    <a:solidFill>
+                      <a:srgbClr val="FFFFFF"/>
+                    </a:solidFill>
+                  </a:tcPr>
+                </a:tc>
+                <a:tc>
+                  <a:txBody>
+                    <a:bodyPr/>
+                    <a:lstStyle/>
+                    <a:p>
+                      <a:r>
+                        <a:rPr sz="1300" b="0" i="0">
+                          <a:solidFill>
+                            <a:srgbClr val="232323"/>
+                          </a:solidFill>
+                          <a:latin typeface="Calibri"/>
+                        </a:rPr>
+                        <a:t>Restate expected outputs; confirm MATLAB/Dynare/paths working; discuss open issues</a:t>
+                      </a:r>
+                    </a:p>
+                  </a:txBody>
+                  <a:tcPr marT="38100" marB="38100" anchor="ctr">
+                    <a:solidFill>
+                      <a:srgbClr val="FFFFFF"/>
+                    </a:solidFill>
+                  </a:tcPr>
+                </a:tc>
+                <a:extLst>
+                  <a:ext uri="{0D108BD9-81ED-4DB2-BD59-A6C34878D82A}">
+                    <a16:rowId xmlns:a16="http://schemas.microsoft.com/office/drawing/2014/main" val="10001"/>
+                  </a:ext>
+                </a:extLst>
+              </a:tr>
+              <a:tr h="543560">
+                <a:tc>
+                  <a:txBody>
+                    <a:bodyPr/>
+                    <a:lstStyle/>
+                    <a:p>
+                      <a:r>
+                        <a:rPr sz="1300" b="1" i="0">
+                          <a:solidFill>
+                            <a:srgbClr val="232323"/>
+                          </a:solidFill>
+                          <a:latin typeface="Calibri"/>
+                        </a:rPr>
+                        <a:t>2. Codebase navigation &amp; version control</a:t>
+                      </a:r>
+                    </a:p>
+                  </a:txBody>
+                  <a:tcPr marT="38100" marB="38100" anchor="ctr">
+                    <a:solidFill>
+                      <a:srgbClr val="F5F5F5"/>
+                    </a:solidFill>
+                  </a:tcPr>
+                </a:tc>
+                <a:tc>
+                  <a:txBody>
+                    <a:bodyPr/>
                     <a:lstStyle/>
                     <a:p>
                       <a:r>
@@ -8309,15 +11453,15 @@
                       </a:r>
                     </a:p>
                   </a:txBody>
-                  <a:tcPr anchor="ctr" marT="38100" marB="38100">
+                  <a:tcPr marT="38100" marB="38100" anchor="ctr">
                     <a:solidFill>
-                      <a:srgbClr val="FFFFFF"/>
+                      <a:srgbClr val="F5F5F5"/>
                     </a:solidFill>
                   </a:tcPr>
                 </a:tc>
                 <a:tc>
                   <a:txBody>
-                    <a:bodyPr wrap="square"/>
+                    <a:bodyPr/>
                     <a:lstStyle/>
                     <a:p>
                       <a:r>
@@ -8327,89 +11471,26 @@
                           </a:solidFill>
                           <a:latin typeface="Calibri"/>
                         </a:rPr>
-                        <a:t>Restate expected outputs; confirm MATLAB/Dynare/paths working</a:t>
+                        <a:t>Trace one equation to its helper; clone and first commit in GitHub Desktop; open in VS Code</a:t>
                       </a:r>
                     </a:p>
                   </a:txBody>
-                  <a:tcPr anchor="ctr" marT="38100" marB="38100">
-                    <a:solidFill>
-                      <a:srgbClr val="FFFFFF"/>
-                    </a:solidFill>
-                  </a:tcPr>
-                </a:tc>
-              </a:tr>
-              <a:tr h="543560">
-                <a:tc>
-                  <a:txBody>
-                    <a:bodyPr wrap="square"/>
-                    <a:lstStyle/>
-                    <a:p>
-                      <a:r>
-                        <a:rPr sz="1300" b="1" i="0">
-                          <a:solidFill>
-                            <a:srgbClr val="232323"/>
-                          </a:solidFill>
-                          <a:latin typeface="Calibri"/>
-                        </a:rPr>
-                        <a:t>2. Codebase nav &amp; version control</a:t>
-                      </a:r>
-                    </a:p>
-                  </a:txBody>
-                  <a:tcPr anchor="ctr" marT="38100" marB="38100">
+                  <a:tcPr marT="38100" marB="38100" anchor="ctr">
                     <a:solidFill>
                       <a:srgbClr val="F5F5F5"/>
                     </a:solidFill>
                   </a:tcPr>
                 </a:tc>
-                <a:tc>
-                  <a:txBody>
-                    <a:bodyPr wrap="square"/>
-                    <a:lstStyle/>
-                    <a:p>
-                      <a:r>
-                        <a:rPr sz="1300" b="0" i="0">
-                          <a:solidFill>
-                            <a:srgbClr val="232323"/>
-                          </a:solidFill>
-                          <a:latin typeface="Calibri"/>
-                        </a:rPr>
-                        <a:t>30</a:t>
-                      </a:r>
-                    </a:p>
-                  </a:txBody>
-                  <a:tcPr anchor="ctr" marT="38100" marB="38100">
-                    <a:solidFill>
-                      <a:srgbClr val="F5F5F5"/>
-                    </a:solidFill>
-                  </a:tcPr>
-                </a:tc>
-                <a:tc>
-                  <a:txBody>
-                    <a:bodyPr wrap="square"/>
-                    <a:lstStyle/>
-                    <a:p>
-                      <a:r>
-                        <a:rPr sz="1300" b="0" i="0">
-                          <a:solidFill>
-                            <a:srgbClr val="232323"/>
-                          </a:solidFill>
-                          <a:latin typeface="Calibri"/>
-                        </a:rPr>
-                        <a:t>Trace an equation to its helper; clone + first commit in GitHub Desktop; open in VS Code</a:t>
-                      </a:r>
-                    </a:p>
-                  </a:txBody>
-                  <a:tcPr anchor="ctr" marT="38100" marB="38100">
-                    <a:solidFill>
-                      <a:srgbClr val="F5F5F5"/>
-                    </a:solidFill>
-                  </a:tcPr>
-                </a:tc>
+                <a:extLst>
+                  <a:ext uri="{0D108BD9-81ED-4DB2-BD59-A6C34878D82A}">
+                    <a16:rowId xmlns:a16="http://schemas.microsoft.com/office/drawing/2014/main" val="10002"/>
+                  </a:ext>
+                </a:extLst>
               </a:tr>
               <a:tr h="543560">
                 <a:tc>
                   <a:txBody>
-                    <a:bodyPr wrap="square"/>
+                    <a:bodyPr/>
                     <a:lstStyle/>
                     <a:p>
                       <a:r>
@@ -8423,7 +11504,7 @@
                       </a:r>
                     </a:p>
                   </a:txBody>
-                  <a:tcPr anchor="ctr" marT="38100" marB="38100">
+                  <a:tcPr marT="38100" marB="38100" anchor="ctr">
                     <a:solidFill>
                       <a:srgbClr val="FFFFFF"/>
                     </a:solidFill>
@@ -8431,7 +11512,7 @@
                 </a:tc>
                 <a:tc>
                   <a:txBody>
-                    <a:bodyPr wrap="square"/>
+                    <a:bodyPr/>
                     <a:lstStyle/>
                     <a:p>
                       <a:r>
@@ -8441,11 +11522,11 @@
                           </a:solidFill>
                           <a:latin typeface="Calibri"/>
                         </a:rPr>
-                        <a:t>25</a:t>
+                        <a:t>10</a:t>
                       </a:r>
                     </a:p>
                   </a:txBody>
-                  <a:tcPr anchor="ctr" marT="38100" marB="38100">
+                  <a:tcPr marT="38100" marB="38100" anchor="ctr">
                     <a:solidFill>
                       <a:srgbClr val="FFFFFF"/>
                     </a:solidFill>
@@ -8453,7 +11534,7 @@
                 </a:tc>
                 <a:tc>
                   <a:txBody>
-                    <a:bodyPr wrap="square"/>
+                    <a:bodyPr/>
                     <a:lstStyle/>
                     <a:p>
                       <a:r>
@@ -8467,17 +11548,22 @@
                       </a:r>
                     </a:p>
                   </a:txBody>
-                  <a:tcPr anchor="ctr" marT="38100" marB="38100">
+                  <a:tcPr marT="38100" marB="38100" anchor="ctr">
                     <a:solidFill>
                       <a:srgbClr val="FFFFFF"/>
                     </a:solidFill>
                   </a:tcPr>
                 </a:tc>
+                <a:extLst>
+                  <a:ext uri="{0D108BD9-81ED-4DB2-BD59-A6C34878D82A}">
+                    <a16:rowId xmlns:a16="http://schemas.microsoft.com/office/drawing/2014/main" val="10003"/>
+                  </a:ext>
+                </a:extLst>
               </a:tr>
               <a:tr h="543560">
                 <a:tc>
                   <a:txBody>
-                    <a:bodyPr wrap="square"/>
+                    <a:bodyPr/>
                     <a:lstStyle/>
                     <a:p>
                       <a:r>
@@ -8491,7 +11577,7 @@
                       </a:r>
                     </a:p>
                   </a:txBody>
-                  <a:tcPr anchor="ctr" marT="38100" marB="38100">
+                  <a:tcPr marT="38100" marB="38100" anchor="ctr">
                     <a:solidFill>
                       <a:srgbClr val="F5F5F5"/>
                     </a:solidFill>
@@ -8499,7 +11585,218 @@
                 </a:tc>
                 <a:tc>
                   <a:txBody>
-                    <a:bodyPr wrap="square"/>
+                    <a:bodyPr/>
+                    <a:lstStyle/>
+                    <a:p>
+                      <a:r>
+                        <a:rPr sz="1300" b="0" i="0">
+                          <a:solidFill>
+                            <a:srgbClr val="232323"/>
+                          </a:solidFill>
+                          <a:latin typeface="Calibri"/>
+                        </a:rPr>
+                        <a:t>10</a:t>
+                      </a:r>
+                    </a:p>
+                  </a:txBody>
+                  <a:tcPr marT="38100" marB="38100" anchor="ctr">
+                    <a:solidFill>
+                      <a:srgbClr val="F5F5F5"/>
+                    </a:solidFill>
+                  </a:tcPr>
+                </a:tc>
+                <a:tc>
+                  <a:txBody>
+                    <a:bodyPr/>
+                    <a:lstStyle/>
+                    <a:p>
+                      <a:r>
+                        <a:rPr sz="1300" b="0" i="0">
+                          <a:solidFill>
+                            <a:srgbClr val="232323"/>
+                          </a:solidFill>
+                          <a:latin typeface="Calibri"/>
+                        </a:rPr>
+                        <a:t>Categorize failure type before fixing; work one broken example together</a:t>
+                      </a:r>
+                    </a:p>
+                  </a:txBody>
+                  <a:tcPr marT="38100" marB="38100" anchor="ctr">
+                    <a:solidFill>
+                      <a:srgbClr val="F5F5F5"/>
+                    </a:solidFill>
+                  </a:tcPr>
+                </a:tc>
+                <a:extLst>
+                  <a:ext uri="{0D108BD9-81ED-4DB2-BD59-A6C34878D82A}">
+                    <a16:rowId xmlns:a16="http://schemas.microsoft.com/office/drawing/2014/main" val="10004"/>
+                  </a:ext>
+                </a:extLst>
+              </a:tr>
+              <a:tr h="543560">
+                <a:tc>
+                  <a:txBody>
+                    <a:bodyPr/>
+                    <a:lstStyle/>
+                    <a:p>
+                      <a:r>
+                        <a:rPr sz="1300" b="1" i="0">
+                          <a:solidFill>
+                            <a:srgbClr val="232323"/>
+                          </a:solidFill>
+                          <a:latin typeface="Calibri"/>
+                        </a:rPr>
+                        <a:t>— Break —</a:t>
+                      </a:r>
+                    </a:p>
+                  </a:txBody>
+                  <a:tcPr marT="38100" marB="38100" anchor="ctr">
+                    <a:solidFill>
+                      <a:srgbClr val="FFFFFF"/>
+                    </a:solidFill>
+                  </a:tcPr>
+                </a:tc>
+                <a:tc>
+                  <a:txBody>
+                    <a:bodyPr/>
+                    <a:lstStyle/>
+                    <a:p>
+                      <a:r>
+                        <a:rPr sz="1300" b="0" i="0">
+                          <a:solidFill>
+                            <a:srgbClr val="232323"/>
+                          </a:solidFill>
+                          <a:latin typeface="Calibri"/>
+                        </a:rPr>
+                        <a:t>15</a:t>
+                      </a:r>
+                    </a:p>
+                  </a:txBody>
+                  <a:tcPr marT="38100" marB="38100" anchor="ctr">
+                    <a:solidFill>
+                      <a:srgbClr val="FFFFFF"/>
+                    </a:solidFill>
+                  </a:tcPr>
+                </a:tc>
+                <a:tc>
+                  <a:txBody>
+                    <a:bodyPr/>
+                    <a:lstStyle/>
+                    <a:p>
+                      <a:endParaRPr/>
+                    </a:p>
+                  </a:txBody>
+                  <a:tcPr marT="38100" marB="38100" anchor="ctr">
+                    <a:solidFill>
+                      <a:srgbClr val="FFFFFF"/>
+                    </a:solidFill>
+                  </a:tcPr>
+                </a:tc>
+                <a:extLst>
+                  <a:ext uri="{0D108BD9-81ED-4DB2-BD59-A6C34878D82A}">
+                    <a16:rowId xmlns:a16="http://schemas.microsoft.com/office/drawing/2014/main" val="10005"/>
+                  </a:ext>
+                </a:extLst>
+              </a:tr>
+              <a:tr h="543560">
+                <a:tc>
+                  <a:txBody>
+                    <a:bodyPr/>
+                    <a:lstStyle/>
+                    <a:p>
+                      <a:r>
+                        <a:rPr sz="1300" b="1" i="0">
+                          <a:solidFill>
+                            <a:srgbClr val="232323"/>
+                          </a:solidFill>
+                          <a:latin typeface="Calibri"/>
+                        </a:rPr>
+                        <a:t>5. Scenario runs + AI-assisted VS Code</a:t>
+                      </a:r>
+                    </a:p>
+                  </a:txBody>
+                  <a:tcPr marT="38100" marB="38100" anchor="ctr">
+                    <a:solidFill>
+                      <a:srgbClr val="F5F5F5"/>
+                    </a:solidFill>
+                  </a:tcPr>
+                </a:tc>
+                <a:tc>
+                  <a:txBody>
+                    <a:bodyPr/>
+                    <a:lstStyle/>
+                    <a:p>
+                      <a:r>
+                        <a:rPr sz="1300" b="0" i="0">
+                          <a:solidFill>
+                            <a:srgbClr val="232323"/>
+                          </a:solidFill>
+                          <a:latin typeface="Calibri"/>
+                        </a:rPr>
+                        <a:t>15</a:t>
+                      </a:r>
+                    </a:p>
+                  </a:txBody>
+                  <a:tcPr marT="38100" marB="38100" anchor="ctr">
+                    <a:solidFill>
+                      <a:srgbClr val="F5F5F5"/>
+                    </a:solidFill>
+                  </a:tcPr>
+                </a:tc>
+                <a:tc>
+                  <a:txBody>
+                    <a:bodyPr/>
+                    <a:lstStyle/>
+                    <a:p>
+                      <a:r>
+                        <a:rPr sz="1300" b="0" i="0">
+                          <a:solidFill>
+                            <a:srgbClr val="232323"/>
+                          </a:solidFill>
+                          <a:latin typeface="Calibri"/>
+                        </a:rPr>
+                        <a:t>Run finance vs. matching base and efficiency vs. PDP8; live AI-assistant demo</a:t>
+                      </a:r>
+                    </a:p>
+                  </a:txBody>
+                  <a:tcPr marT="38100" marB="38100" anchor="ctr">
+                    <a:solidFill>
+                      <a:srgbClr val="F5F5F5"/>
+                    </a:solidFill>
+                  </a:tcPr>
+                </a:tc>
+                <a:extLst>
+                  <a:ext uri="{0D108BD9-81ED-4DB2-BD59-A6C34878D82A}">
+                    <a16:rowId xmlns:a16="http://schemas.microsoft.com/office/drawing/2014/main" val="10006"/>
+                  </a:ext>
+                </a:extLst>
+              </a:tr>
+              <a:tr h="543560">
+                <a:tc>
+                  <a:txBody>
+                    <a:bodyPr/>
+                    <a:lstStyle/>
+                    <a:p>
+                      <a:r>
+                        <a:rPr sz="1300" b="1" i="0">
+                          <a:solidFill>
+                            <a:srgbClr val="232323"/>
+                          </a:solidFill>
+                          <a:latin typeface="Calibri"/>
+                        </a:rPr>
+                        <a:t>6. Comparison table, chart &amp; narrative</a:t>
+                      </a:r>
+                    </a:p>
+                  </a:txBody>
+                  <a:tcPr marT="38100" marB="38100" anchor="ctr">
+                    <a:solidFill>
+                      <a:srgbClr val="FFFFFF"/>
+                    </a:solidFill>
+                  </a:tcPr>
+                </a:tc>
+                <a:tc>
+                  <a:txBody>
+                    <a:bodyPr/>
                     <a:lstStyle/>
                     <a:p>
                       <a:r>
@@ -8513,15 +11810,15 @@
                       </a:r>
                     </a:p>
                   </a:txBody>
-                  <a:tcPr anchor="ctr" marT="38100" marB="38100">
+                  <a:tcPr marT="38100" marB="38100" anchor="ctr">
                     <a:solidFill>
-                      <a:srgbClr val="F5F5F5"/>
+                      <a:srgbClr val="FFFFFF"/>
                     </a:solidFill>
                   </a:tcPr>
                 </a:tc>
                 <a:tc>
                   <a:txBody>
-                    <a:bodyPr wrap="square"/>
+                    <a:bodyPr/>
                     <a:lstStyle/>
                     <a:p>
                       <a:r>
@@ -8531,225 +11828,26 @@
                           </a:solidFill>
                           <a:latin typeface="Calibri"/>
                         </a:rPr>
-                        <a:t>Categorize a failure before fixing it; work a broken example together</a:t>
+                        <a:t>Build comparison table and one policy-facing chart with a short narrative</a:t>
                       </a:r>
                     </a:p>
                   </a:txBody>
-                  <a:tcPr anchor="ctr" marT="38100" marB="38100">
-                    <a:solidFill>
-                      <a:srgbClr val="F5F5F5"/>
-                    </a:solidFill>
-                  </a:tcPr>
-                </a:tc>
-              </a:tr>
-              <a:tr h="543560">
-                <a:tc>
-                  <a:txBody>
-                    <a:bodyPr wrap="square"/>
-                    <a:lstStyle/>
-                    <a:p>
-                      <a:r>
-                        <a:rPr sz="1300" b="1" i="0">
-                          <a:solidFill>
-                            <a:srgbClr val="232323"/>
-                          </a:solidFill>
-                          <a:latin typeface="Calibri"/>
-                        </a:rPr>
-                        <a:t>— Break —</a:t>
-                      </a:r>
-                    </a:p>
-                  </a:txBody>
-                  <a:tcPr anchor="ctr" marT="38100" marB="38100">
+                  <a:tcPr marT="38100" marB="38100" anchor="ctr">
                     <a:solidFill>
                       <a:srgbClr val="FFFFFF"/>
                     </a:solidFill>
                   </a:tcPr>
                 </a:tc>
-                <a:tc>
-                  <a:txBody>
-                    <a:bodyPr wrap="square"/>
-                    <a:lstStyle/>
-                    <a:p>
-                      <a:r>
-                        <a:rPr sz="1300" b="0" i="0">
-                          <a:solidFill>
-                            <a:srgbClr val="232323"/>
-                          </a:solidFill>
-                          <a:latin typeface="Calibri"/>
-                        </a:rPr>
-                        <a:t>15</a:t>
-                      </a:r>
-                    </a:p>
-                  </a:txBody>
-                  <a:tcPr anchor="ctr" marT="38100" marB="38100">
-                    <a:solidFill>
-                      <a:srgbClr val="FFFFFF"/>
-                    </a:solidFill>
-                  </a:tcPr>
-                </a:tc>
-                <a:tc>
-                  <a:txBody>
-                    <a:bodyPr wrap="square"/>
-                    <a:lstStyle/>
-                    <a:p>
-                      <a:r>
-                        <a:rPr sz="1300" b="0" i="0">
-                          <a:solidFill>
-                            <a:srgbClr val="232323"/>
-                          </a:solidFill>
-                          <a:latin typeface="Calibri"/>
-                        </a:rPr>
-                        <a:t/>
-                      </a:r>
-                    </a:p>
-                  </a:txBody>
-                  <a:tcPr anchor="ctr" marT="38100" marB="38100">
-                    <a:solidFill>
-                      <a:srgbClr val="FFFFFF"/>
-                    </a:solidFill>
-                  </a:tcPr>
-                </a:tc>
+                <a:extLst>
+                  <a:ext uri="{0D108BD9-81ED-4DB2-BD59-A6C34878D82A}">
+                    <a16:rowId xmlns:a16="http://schemas.microsoft.com/office/drawing/2014/main" val="10007"/>
+                  </a:ext>
+                </a:extLst>
               </a:tr>
               <a:tr h="543560">
                 <a:tc>
                   <a:txBody>
-                    <a:bodyPr wrap="square"/>
-                    <a:lstStyle/>
-                    <a:p>
-                      <a:r>
-                        <a:rPr sz="1300" b="1" i="0">
-                          <a:solidFill>
-                            <a:srgbClr val="232323"/>
-                          </a:solidFill>
-                          <a:latin typeface="Calibri"/>
-                        </a:rPr>
-                        <a:t>5. Finance + efficiency scenario run, AI-VS Code demo</a:t>
-                      </a:r>
-                    </a:p>
-                  </a:txBody>
-                  <a:tcPr anchor="ctr" marT="38100" marB="38100">
-                    <a:solidFill>
-                      <a:srgbClr val="F5F5F5"/>
-                    </a:solidFill>
-                  </a:tcPr>
-                </a:tc>
-                <a:tc>
-                  <a:txBody>
-                    <a:bodyPr wrap="square"/>
-                    <a:lstStyle/>
-                    <a:p>
-                      <a:r>
-                        <a:rPr sz="1300" b="0" i="0">
-                          <a:solidFill>
-                            <a:srgbClr val="232323"/>
-                          </a:solidFill>
-                          <a:latin typeface="Calibri"/>
-                        </a:rPr>
-                        <a:t>35</a:t>
-                      </a:r>
-                    </a:p>
-                  </a:txBody>
-                  <a:tcPr anchor="ctr" marT="38100" marB="38100">
-                    <a:solidFill>
-                      <a:srgbClr val="F5F5F5"/>
-                    </a:solidFill>
-                  </a:tcPr>
-                </a:tc>
-                <a:tc>
-                  <a:txBody>
-                    <a:bodyPr wrap="square"/>
-                    <a:lstStyle/>
-                    <a:p>
-                      <a:r>
-                        <a:rPr sz="1300" b="0" i="0">
-                          <a:solidFill>
-                            <a:srgbClr val="232323"/>
-                          </a:solidFill>
-                          <a:latin typeface="Calibri"/>
-                        </a:rPr>
-                        <a:t>Run your finance scenario vs. base case, and the efficiency scenario vs. PDP8; live AI-assistant demo</a:t>
-                      </a:r>
-                    </a:p>
-                  </a:txBody>
-                  <a:tcPr anchor="ctr" marT="38100" marB="38100">
-                    <a:solidFill>
-                      <a:srgbClr val="F5F5F5"/>
-                    </a:solidFill>
-                  </a:tcPr>
-                </a:tc>
-              </a:tr>
-              <a:tr h="543560">
-                <a:tc>
-                  <a:txBody>
-                    <a:bodyPr wrap="square"/>
-                    <a:lstStyle/>
-                    <a:p>
-                      <a:r>
-                        <a:rPr sz="1300" b="1" i="0">
-                          <a:solidFill>
-                            <a:srgbClr val="232323"/>
-                          </a:solidFill>
-                          <a:latin typeface="Calibri"/>
-                        </a:rPr>
-                        <a:t>6. Comparison tables, chart &amp; narrative</a:t>
-                      </a:r>
-                    </a:p>
-                  </a:txBody>
-                  <a:tcPr anchor="ctr" marT="38100" marB="38100">
-                    <a:solidFill>
-                      <a:srgbClr val="FFFFFF"/>
-                    </a:solidFill>
-                  </a:tcPr>
-                </a:tc>
-                <a:tc>
-                  <a:txBody>
-                    <a:bodyPr wrap="square"/>
-                    <a:lstStyle/>
-                    <a:p>
-                      <a:r>
-                        <a:rPr sz="1300" b="0" i="0">
-                          <a:solidFill>
-                            <a:srgbClr val="232323"/>
-                          </a:solidFill>
-                          <a:latin typeface="Calibri"/>
-                        </a:rPr>
-                        <a:t>35</a:t>
-                      </a:r>
-                    </a:p>
-                  </a:txBody>
-                  <a:tcPr anchor="ctr" marT="38100" marB="38100">
-                    <a:solidFill>
-                      <a:srgbClr val="FFFFFF"/>
-                    </a:solidFill>
-                  </a:tcPr>
-                </a:tc>
-                <a:tc>
-                  <a:txBody>
-                    <a:bodyPr wrap="square"/>
-                    <a:lstStyle/>
-                    <a:p>
-                      <a:r>
-                        <a:rPr sz="1300" b="0" i="0">
-                          <a:solidFill>
-                            <a:srgbClr val="232323"/>
-                          </a:solidFill>
-                          <a:latin typeface="Calibri"/>
-                        </a:rPr>
-                        <a:t>Build tables for both scenario families; one chart + 4-sentence narrative</a:t>
-                      </a:r>
-                    </a:p>
-                  </a:txBody>
-                  <a:tcPr anchor="ctr" marT="38100" marB="38100">
-                    <a:solidFill>
-                      <a:srgbClr val="FFFFFF"/>
-                    </a:solidFill>
-                  </a:tcPr>
-                </a:tc>
-              </a:tr>
-              <a:tr h="543560">
-                <a:tc>
-                  <a:txBody>
-                    <a:bodyPr wrap="square"/>
+                    <a:bodyPr/>
                     <a:lstStyle/>
                     <a:p>
                       <a:r>
@@ -8763,7 +11861,7 @@
                       </a:r>
                     </a:p>
                   </a:txBody>
-                  <a:tcPr anchor="ctr" marT="38100" marB="38100">
+                  <a:tcPr marT="38100" marB="38100" anchor="ctr">
                     <a:solidFill>
                       <a:srgbClr val="F5F5F5"/>
                     </a:solidFill>
@@ -8771,7 +11869,7 @@
                 </a:tc>
                 <a:tc>
                   <a:txBody>
-                    <a:bodyPr wrap="square"/>
+                    <a:bodyPr/>
                     <a:lstStyle/>
                     <a:p>
                       <a:r>
@@ -8785,7 +11883,7 @@
                       </a:r>
                     </a:p>
                   </a:txBody>
-                  <a:tcPr anchor="ctr" marT="38100" marB="38100">
+                  <a:tcPr marT="38100" marB="38100" anchor="ctr">
                     <a:solidFill>
                       <a:srgbClr val="F5F5F5"/>
                     </a:solidFill>
@@ -8793,7 +11891,7 @@
                 </a:tc>
                 <a:tc>
                   <a:txBody>
-                    <a:bodyPr wrap="square"/>
+                    <a:bodyPr/>
                     <a:lstStyle/>
                     <a:p>
                       <a:r>
@@ -8807,12 +11905,17 @@
                       </a:r>
                     </a:p>
                   </a:txBody>
-                  <a:tcPr anchor="ctr" marT="38100" marB="38100">
+                  <a:tcPr marT="38100" marB="38100" anchor="ctr">
                     <a:solidFill>
                       <a:srgbClr val="F5F5F5"/>
                     </a:solidFill>
                   </a:tcPr>
                 </a:tc>
+                <a:extLst>
+                  <a:ext uri="{0D108BD9-81ED-4DB2-BD59-A6C34878D82A}">
+                    <a16:rowId xmlns:a16="http://schemas.microsoft.com/office/drawing/2014/main" val="10008"/>
+                  </a:ext>
+                </a:extLst>
               </a:tr>
             </a:tbl>
           </a:graphicData>
@@ -8827,7 +11930,7 @@
 </file>
 
 <file path=ppt/slides/slide4.xml><?xml version="1.0" encoding="utf-8"?>
-<p:sld xmlns:a="http://schemas.openxmlformats.org/drawingml/2006/main" xmlns:p="http://schemas.openxmlformats.org/presentationml/2006/main" xmlns:r="http://schemas.openxmlformats.org/officeDocument/2006/relationships">
+<p:sld xmlns:a="http://schemas.openxmlformats.org/drawingml/2006/main" xmlns:r="http://schemas.openxmlformats.org/officeDocument/2006/relationships" xmlns:p="http://schemas.openxmlformats.org/presentationml/2006/main">
   <p:cSld>
     <p:spTree>
       <p:nvGrpSpPr>
@@ -8835,7 +11938,14 @@
         <p:cNvGrpSpPr/>
         <p:nvPr/>
       </p:nvGrpSpPr>
-      <p:grpSpPr/>
+      <p:grpSpPr>
+        <a:xfrm>
+          <a:off x="0" y="0"/>
+          <a:ext cx="0" cy="0"/>
+          <a:chOff x="0" y="0"/>
+          <a:chExt cx="0" cy="0"/>
+        </a:xfrm>
+      </p:grpSpPr>
       <p:sp>
         <p:nvSpPr>
           <p:cNvPr id="2" name="Rectangle 1"/>
@@ -8877,6 +11987,7 @@
           <a:lstStyle/>
           <a:p>
             <a:pPr algn="ctr"/>
+            <a:endParaRPr/>
           </a:p>
         </p:txBody>
       </p:sp>
@@ -8921,6 +12032,7 @@
           <a:lstStyle/>
           <a:p>
             <a:pPr algn="ctr"/>
+            <a:endParaRPr/>
           </a:p>
         </p:txBody>
       </p:sp>
@@ -8958,7 +12070,7 @@
                 </a:solidFill>
                 <a:latin typeface="Calibri"/>
               </a:rPr>
-              <a:t>BLOCK 1 · 10 MIN</a:t>
+              <a:t>BLOCK 1 · 60 MIN</a:t>
             </a:r>
           </a:p>
           <a:p>
@@ -9039,6 +12151,7 @@
           <a:lstStyle/>
           <a:p>
             <a:pPr algn="ctr"/>
+            <a:endParaRPr/>
           </a:p>
         </p:txBody>
       </p:sp>
@@ -9191,7 +12304,7 @@
 </file>
 
 <file path=ppt/slides/slide5.xml><?xml version="1.0" encoding="utf-8"?>
-<p:sld xmlns:a="http://schemas.openxmlformats.org/drawingml/2006/main" xmlns:p="http://schemas.openxmlformats.org/presentationml/2006/main" xmlns:r="http://schemas.openxmlformats.org/officeDocument/2006/relationships">
+<p:sld xmlns:a="http://schemas.openxmlformats.org/drawingml/2006/main" xmlns:r="http://schemas.openxmlformats.org/officeDocument/2006/relationships" xmlns:p="http://schemas.openxmlformats.org/presentationml/2006/main">
   <p:cSld>
     <p:spTree>
       <p:nvGrpSpPr>
@@ -9199,7 +12312,14 @@
         <p:cNvGrpSpPr/>
         <p:nvPr/>
       </p:nvGrpSpPr>
-      <p:grpSpPr/>
+      <p:grpSpPr>
+        <a:xfrm>
+          <a:off x="0" y="0"/>
+          <a:ext cx="0" cy="0"/>
+          <a:chOff x="0" y="0"/>
+          <a:chExt cx="0" cy="0"/>
+        </a:xfrm>
+      </p:grpSpPr>
       <p:sp>
         <p:nvSpPr>
           <p:cNvPr id="2" name="Rectangle 1"/>
@@ -9241,6 +12361,7 @@
           <a:lstStyle/>
           <a:p>
             <a:pPr algn="ctr"/>
+            <a:endParaRPr/>
           </a:p>
         </p:txBody>
       </p:sp>
@@ -9285,6 +12406,7 @@
           <a:lstStyle/>
           <a:p>
             <a:pPr algn="ctr"/>
+            <a:endParaRPr/>
           </a:p>
         </p:txBody>
       </p:sp>
@@ -9322,7 +12444,7 @@
                 </a:solidFill>
                 <a:latin typeface="Calibri"/>
               </a:rPr>
-              <a:t>BLOCK 2 · 30 MIN</a:t>
+              <a:t>BLOCK 2 · 10 MIN</a:t>
             </a:r>
           </a:p>
           <a:p>
@@ -9403,6 +12525,7 @@
           <a:lstStyle/>
           <a:p>
             <a:pPr algn="ctr"/>
+            <a:endParaRPr/>
           </a:p>
         </p:txBody>
       </p:sp>
@@ -9603,7 +12726,7 @@
 </file>
 
 <file path=ppt/slides/slide6.xml><?xml version="1.0" encoding="utf-8"?>
-<p:sld xmlns:a="http://schemas.openxmlformats.org/drawingml/2006/main" xmlns:p="http://schemas.openxmlformats.org/presentationml/2006/main" xmlns:r="http://schemas.openxmlformats.org/officeDocument/2006/relationships">
+<p:sld xmlns:a="http://schemas.openxmlformats.org/drawingml/2006/main" xmlns:r="http://schemas.openxmlformats.org/officeDocument/2006/relationships" xmlns:p="http://schemas.openxmlformats.org/presentationml/2006/main">
   <p:cSld>
     <p:spTree>
       <p:nvGrpSpPr>
@@ -9611,7 +12734,14 @@
         <p:cNvGrpSpPr/>
         <p:nvPr/>
       </p:nvGrpSpPr>
-      <p:grpSpPr/>
+      <p:grpSpPr>
+        <a:xfrm>
+          <a:off x="0" y="0"/>
+          <a:ext cx="0" cy="0"/>
+          <a:chOff x="0" y="0"/>
+          <a:chExt cx="0" cy="0"/>
+        </a:xfrm>
+      </p:grpSpPr>
       <p:sp>
         <p:nvSpPr>
           <p:cNvPr id="2" name="Rectangle 1"/>
@@ -9653,6 +12783,7 @@
           <a:lstStyle/>
           <a:p>
             <a:pPr algn="ctr"/>
+            <a:endParaRPr/>
           </a:p>
         </p:txBody>
       </p:sp>
@@ -9697,6 +12828,7 @@
           <a:lstStyle/>
           <a:p>
             <a:pPr algn="ctr"/>
+            <a:endParaRPr/>
           </a:p>
         </p:txBody>
       </p:sp>
@@ -9734,7 +12866,7 @@
                 </a:solidFill>
                 <a:latin typeface="Calibri"/>
               </a:rPr>
-              <a:t>BLOCKS 3–4 · 45 MIN</a:t>
+              <a:t>BLOCKS 3–4 · 20 MIN</a:t>
             </a:r>
           </a:p>
           <a:p>
@@ -9815,6 +12947,7 @@
           <a:lstStyle/>
           <a:p>
             <a:pPr algn="ctr"/>
+            <a:endParaRPr/>
           </a:p>
         </p:txBody>
       </p:sp>
@@ -10031,7 +13164,7 @@
 </file>
 
 <file path=ppt/slides/slide7.xml><?xml version="1.0" encoding="utf-8"?>
-<p:sld xmlns:a="http://schemas.openxmlformats.org/drawingml/2006/main" xmlns:p="http://schemas.openxmlformats.org/presentationml/2006/main" xmlns:r="http://schemas.openxmlformats.org/officeDocument/2006/relationships">
+<p:sld xmlns:a="http://schemas.openxmlformats.org/drawingml/2006/main" xmlns:r="http://schemas.openxmlformats.org/officeDocument/2006/relationships" xmlns:p="http://schemas.openxmlformats.org/presentationml/2006/main">
   <p:cSld>
     <p:spTree>
       <p:nvGrpSpPr>
@@ -10039,7 +13172,14 @@
         <p:cNvGrpSpPr/>
         <p:nvPr/>
       </p:nvGrpSpPr>
-      <p:grpSpPr/>
+      <p:grpSpPr>
+        <a:xfrm>
+          <a:off x="0" y="0"/>
+          <a:ext cx="0" cy="0"/>
+          <a:chOff x="0" y="0"/>
+          <a:chExt cx="0" cy="0"/>
+        </a:xfrm>
+      </p:grpSpPr>
       <p:sp>
         <p:nvSpPr>
           <p:cNvPr id="2" name="Rectangle 1"/>
@@ -10081,6 +13221,7 @@
           <a:lstStyle/>
           <a:p>
             <a:pPr algn="ctr"/>
+            <a:endParaRPr/>
           </a:p>
         </p:txBody>
       </p:sp>
@@ -10183,7 +13324,7 @@
 </file>
 
 <file path=ppt/slides/slide8.xml><?xml version="1.0" encoding="utf-8"?>
-<p:sld xmlns:a="http://schemas.openxmlformats.org/drawingml/2006/main" xmlns:p="http://schemas.openxmlformats.org/presentationml/2006/main" xmlns:r="http://schemas.openxmlformats.org/officeDocument/2006/relationships">
+<p:sld xmlns:a="http://schemas.openxmlformats.org/drawingml/2006/main" xmlns:r="http://schemas.openxmlformats.org/officeDocument/2006/relationships" xmlns:p="http://schemas.openxmlformats.org/presentationml/2006/main">
   <p:cSld>
     <p:spTree>
       <p:nvGrpSpPr>
@@ -10191,7 +13332,14 @@
         <p:cNvGrpSpPr/>
         <p:nvPr/>
       </p:nvGrpSpPr>
-      <p:grpSpPr/>
+      <p:grpSpPr>
+        <a:xfrm>
+          <a:off x="0" y="0"/>
+          <a:ext cx="0" cy="0"/>
+          <a:chOff x="0" y="0"/>
+          <a:chExt cx="0" cy="0"/>
+        </a:xfrm>
+      </p:grpSpPr>
       <p:sp>
         <p:nvSpPr>
           <p:cNvPr id="2" name="Rectangle 1"/>
@@ -10233,6 +13381,7 @@
           <a:lstStyle/>
           <a:p>
             <a:pPr algn="ctr"/>
+            <a:endParaRPr/>
           </a:p>
         </p:txBody>
       </p:sp>
@@ -10277,6 +13426,7 @@
           <a:lstStyle/>
           <a:p>
             <a:pPr algn="ctr"/>
+            <a:endParaRPr/>
           </a:p>
         </p:txBody>
       </p:sp>
@@ -10314,7 +13464,7 @@
                 </a:solidFill>
                 <a:latin typeface="Calibri"/>
               </a:rPr>
-              <a:t>BLOCK 5 · 35 MIN</a:t>
+              <a:t>BLOCK 5 · 15 MIN</a:t>
             </a:r>
           </a:p>
           <a:p>
@@ -10395,6 +13545,7 @@
           <a:lstStyle/>
           <a:p>
             <a:pPr algn="ctr"/>
+            <a:endParaRPr/>
           </a:p>
         </p:txBody>
       </p:sp>
@@ -10686,7 +13837,7 @@
 </file>
 
 <file path=ppt/slides/slide9.xml><?xml version="1.0" encoding="utf-8"?>
-<p:sld xmlns:a="http://schemas.openxmlformats.org/drawingml/2006/main" xmlns:p="http://schemas.openxmlformats.org/presentationml/2006/main" xmlns:r="http://schemas.openxmlformats.org/officeDocument/2006/relationships">
+<p:sld xmlns:a="http://schemas.openxmlformats.org/drawingml/2006/main" xmlns:r="http://schemas.openxmlformats.org/officeDocument/2006/relationships" xmlns:p="http://schemas.openxmlformats.org/presentationml/2006/main">
   <p:cSld>
     <p:spTree>
       <p:nvGrpSpPr>
@@ -10694,7 +13845,14 @@
         <p:cNvGrpSpPr/>
         <p:nvPr/>
       </p:nvGrpSpPr>
-      <p:grpSpPr/>
+      <p:grpSpPr>
+        <a:xfrm>
+          <a:off x="0" y="0"/>
+          <a:ext cx="0" cy="0"/>
+          <a:chOff x="0" y="0"/>
+          <a:chExt cx="0" cy="0"/>
+        </a:xfrm>
+      </p:grpSpPr>
       <p:sp>
         <p:nvSpPr>
           <p:cNvPr id="2" name="Rectangle 1"/>
@@ -10736,6 +13894,7 @@
           <a:lstStyle/>
           <a:p>
             <a:pPr algn="ctr"/>
+            <a:endParaRPr/>
           </a:p>
         </p:txBody>
       </p:sp>
@@ -10780,6 +13939,7 @@
           <a:lstStyle/>
           <a:p>
             <a:pPr algn="ctr"/>
+            <a:endParaRPr/>
           </a:p>
         </p:txBody>
       </p:sp>
@@ -10817,7 +13977,7 @@
                 </a:solidFill>
                 <a:latin typeface="Calibri"/>
               </a:rPr>
-              <a:t>BLOCK 6 · 35 MIN</a:t>
+              <a:t>BLOCK 6 · 20 MIN</a:t>
             </a:r>
           </a:p>
           <a:p>
@@ -10898,6 +14058,7 @@
           <a:lstStyle/>
           <a:p>
             <a:pPr algn="ctr"/>
+            <a:endParaRPr/>
           </a:p>
         </p:txBody>
       </p:sp>
